--- a/docs/max-presentation/presentation.pptx
+++ b/docs/max-presentation/presentation.pptx
@@ -2207,7 +2207,7 @@
         </p:nvSpPr>
         <p:spPr>
           <a:xfrm>
-            <a:off x="502920" y="1371600"/>
+            <a:off x="502920" y="1316736"/>
             <a:ext cx="1691640" cy="274320"/>
           </a:xfrm>
           <a:prstGeom prst="rect">
@@ -2246,7 +2246,7 @@
         </p:nvSpPr>
         <p:spPr>
           <a:xfrm>
-            <a:off x="2240280" y="1371600"/>
+            <a:off x="2240280" y="1316736"/>
             <a:ext cx="4114800" cy="548640"/>
           </a:xfrm>
           <a:prstGeom prst="rect">
@@ -2314,7 +2314,7 @@
         </p:nvSpPr>
         <p:spPr>
           <a:xfrm>
-            <a:off x="502920" y="2029968"/>
+            <a:off x="502920" y="1938528"/>
             <a:ext cx="1691640" cy="274320"/>
           </a:xfrm>
           <a:prstGeom prst="rect">
@@ -2353,7 +2353,7 @@
         </p:nvSpPr>
         <p:spPr>
           <a:xfrm>
-            <a:off x="2240280" y="2029968"/>
+            <a:off x="2240280" y="1938528"/>
             <a:ext cx="4114800" cy="548640"/>
           </a:xfrm>
           <a:prstGeom prst="rect">
@@ -2421,7 +2421,7 @@
         </p:nvSpPr>
         <p:spPr>
           <a:xfrm>
-            <a:off x="502920" y="2688336"/>
+            <a:off x="502920" y="2560320"/>
             <a:ext cx="1691640" cy="274320"/>
           </a:xfrm>
           <a:prstGeom prst="rect">
@@ -2460,7 +2460,7 @@
         </p:nvSpPr>
         <p:spPr>
           <a:xfrm>
-            <a:off x="2240280" y="2688336"/>
+            <a:off x="2240280" y="2560320"/>
             <a:ext cx="4114800" cy="548640"/>
           </a:xfrm>
           <a:prstGeom prst="rect">
@@ -2502,7 +2502,7 @@
         </p:nvSpPr>
         <p:spPr>
           <a:xfrm>
-            <a:off x="502920" y="3145536"/>
+            <a:off x="502920" y="3017520"/>
             <a:ext cx="1691640" cy="274320"/>
           </a:xfrm>
           <a:prstGeom prst="rect">
@@ -2541,7 +2541,7 @@
         </p:nvSpPr>
         <p:spPr>
           <a:xfrm>
-            <a:off x="2240280" y="3145536"/>
+            <a:off x="2240280" y="3017520"/>
             <a:ext cx="4114800" cy="548640"/>
           </a:xfrm>
           <a:prstGeom prst="rect">
@@ -2569,10 +2569,36 @@
                 <a:ea typeface="Calibri" pitchFamily="34" charset="-122"/>
                 <a:cs typeface="Calibri" pitchFamily="34" charset="-120"/>
               </a:rPr>
-              <a:t>ЗАПОЛНИТЬ ПЕРЕД СДАЧЕЙ · ветка main</a:t>
-            </a:r>
+              <a:t>b9f419f · ветка main</a:t>
+            </a:r>
+            <a:pPr indent="0" marL="0">
+              <a:lnSpc>
+                <a:spcPct val="105000"/>
+              </a:lnSpc>
+              <a:buNone/>
+            </a:pPr>
             <a:endParaRPr lang="en-US" sz="1200" dirty="0"/>
           </a:p>
+          <a:p>
+            <a:pPr indent="0" marL="0">
+              <a:lnSpc>
+                <a:spcPct val="105000"/>
+              </a:lnSpc>
+              <a:buNone/>
+            </a:pPr>
+            <a:r>
+              <a:rPr lang="en-US" sz="1050" dirty="0">
+                <a:solidFill>
+                  <a:srgbClr val="79839A"/>
+                </a:solidFill>
+                <a:latin typeface="Calibri" pitchFamily="34" charset="0"/>
+                <a:ea typeface="Calibri" pitchFamily="34" charset="-122"/>
+                <a:cs typeface="Calibri" pitchFamily="34" charset="-120"/>
+              </a:rPr>
+              <a:t>b9f419fbe69b0e707b6dfc1a7dbd0cfd6370f6e6</a:t>
+            </a:r>
+            <a:endParaRPr lang="en-US" sz="1200" dirty="0"/>
+          </a:p>
         </p:txBody>
       </p:sp>
       <p:sp>
@@ -2583,7 +2609,7 @@
         </p:nvSpPr>
         <p:spPr>
           <a:xfrm>
-            <a:off x="502920" y="3602736"/>
+            <a:off x="502920" y="3639312"/>
             <a:ext cx="1691640" cy="274320"/>
           </a:xfrm>
           <a:prstGeom prst="rect">
@@ -2622,7 +2648,7 @@
         </p:nvSpPr>
         <p:spPr>
           <a:xfrm>
-            <a:off x="2240280" y="3602736"/>
+            <a:off x="2240280" y="3639312"/>
             <a:ext cx="4114800" cy="548640"/>
           </a:xfrm>
           <a:prstGeom prst="rect">

--- a/docs/max-presentation/presentation.pptx
+++ b/docs/max-presentation/presentation.pptx
@@ -2569,7 +2569,7 @@
                 <a:ea typeface="Calibri" pitchFamily="34" charset="-122"/>
                 <a:cs typeface="Calibri" pitchFamily="34" charset="-120"/>
               </a:rPr>
-              <a:t>b9f419f · ветка main</a:t>
+              <a:t>967024c · ветка main</a:t>
             </a:r>
             <a:pPr indent="0" marL="0">
               <a:lnSpc>
@@ -2595,7 +2595,7 @@
                 <a:ea typeface="Calibri" pitchFamily="34" charset="-122"/>
                 <a:cs typeface="Calibri" pitchFamily="34" charset="-120"/>
               </a:rPr>
-              <a:t>b9f419fbe69b0e707b6dfc1a7dbd0cfd6370f6e6</a:t>
+              <a:t>967024c0cb024ab93c623fc4e6189b29a17cfede</a:t>
             </a:r>
             <a:endParaRPr lang="en-US" sz="1200" dirty="0"/>
           </a:p>

--- a/docs/max-presentation/presentation.pptx
+++ b/docs/max-presentation/presentation.pptx
@@ -20,9 +20,10 @@
     <p:sldId id="268" r:id="rId14"/>
     <p:sldId id="269" r:id="rId15"/>
     <p:sldId id="270" r:id="rId16"/>
+    <p:sldId id="271" r:id="rId17"/>
   </p:sldIdLst>
   <p:notesMasterIdLst>
-    <p:notesMasterId r:id="rId17"/>
+    <p:notesMasterId r:id="rId18"/>
   </p:notesMasterIdLst>
   <p:sldSz cx="12192000" cy="6858000"/>
   <p:notesSz cx="6858000" cy="12192000"/>
@@ -1068,6 +1069,94 @@
             <a:fld id="{F7021451-1387-4CA6-816F-3879F97B5CBC}" type="slidenum">
               <a:rPr lang="en-US"/>
               <a:t>15</a:t>
+            </a:fld>
+            <a:endParaRPr lang="en-US"/>
+          </a:p>
+        </p:txBody>
+      </p:sp>
+    </p:spTree>
+    <p:extLst>
+      <p:ext uri="{BB962C8B-B14F-4D97-AF65-F5344CB8AC3E}">
+        <p14:creationId xmlns:p14="http://schemas.microsoft.com/office/powerpoint/2010/main" val="1024086991"/>
+      </p:ext>
+    </p:extLst>
+  </p:cSld>
+  <p:clrMapOvr>
+    <a:masterClrMapping/>
+  </p:clrMapOvr>
+</p:notes>
+</file>
+
+<file path=ppt/notesSlides/notesSlide16.xml><?xml version="1.0" encoding="utf-8"?>
+<p:notes xmlns:a="http://schemas.openxmlformats.org/drawingml/2006/main" xmlns:r="http://schemas.openxmlformats.org/officeDocument/2006/relationships" xmlns:p="http://schemas.openxmlformats.org/presentationml/2006/main">
+  <p:cSld>
+    <p:spTree>
+      <p:nvGrpSpPr>
+        <p:cNvPr id="1" name=""/>
+        <p:cNvGrpSpPr/>
+        <p:nvPr/>
+      </p:nvGrpSpPr>
+      <p:grpSpPr>
+        <a:xfrm>
+          <a:off x="0" y="0"/>
+          <a:ext cx="0" cy="0"/>
+          <a:chOff x="0" y="0"/>
+          <a:chExt cx="0" cy="0"/>
+        </a:xfrm>
+      </p:grpSpPr>
+      <p:sp>
+        <p:nvSpPr>
+          <p:cNvPr id="2" name="Slide Image Placeholder 1"/>
+          <p:cNvSpPr>
+            <a:spLocks noGrp="1" noRot="1" noChangeAspect="1"/>
+          </p:cNvSpPr>
+          <p:nvPr>
+            <p:ph type="sldImg"/>
+          </p:nvPr>
+        </p:nvSpPr>
+        <p:spPr/>
+      </p:sp>
+      <p:sp>
+        <p:nvSpPr>
+          <p:cNvPr id="3" name="Notes Placeholder 2"/>
+          <p:cNvSpPr>
+            <a:spLocks noGrp="1"/>
+          </p:cNvSpPr>
+          <p:nvPr>
+            <p:ph type="body" idx="1"/>
+          </p:nvPr>
+        </p:nvSpPr>
+        <p:spPr/>
+        <p:txBody>
+          <a:bodyPr/>
+          <a:lstStyle/>
+          <a:p>
+            <a:r>
+              <a:rPr lang="en-US" dirty="0"/>
+              <a:t/>
+            </a:r>
+            <a:endParaRPr lang="en-US" dirty="0"/>
+          </a:p>
+        </p:txBody>
+      </p:sp>
+      <p:sp>
+        <p:nvSpPr>
+          <p:cNvPr id="4" name="Slide Number Placeholder 3"/>
+          <p:cNvSpPr>
+            <a:spLocks noGrp="1"/>
+          </p:cNvSpPr>
+          <p:nvPr>
+            <p:ph type="sldNum" sz="quarter" idx="10"/>
+          </p:nvPr>
+        </p:nvSpPr>
+        <p:spPr/>
+        <p:txBody>
+          <a:bodyPr/>
+          <a:lstStyle/>
+          <a:p>
+            <a:fld id="{F7021451-1387-4CA6-816F-3879F97B5CBC}" type="slidenum">
+              <a:rPr lang="en-US"/>
+              <a:t>16</a:t>
             </a:fld>
             <a:endParaRPr lang="en-US"/>
           </a:p>
@@ -8808,6 +8897,858 @@
 </p:sld>
 </file>
 
+<file path=ppt/slides/slide16.xml><?xml version="1.0" encoding="utf-8"?>
+<p:sld xmlns:a="http://schemas.openxmlformats.org/drawingml/2006/main" xmlns:r="http://schemas.openxmlformats.org/officeDocument/2006/relationships" xmlns:p="http://schemas.openxmlformats.org/presentationml/2006/main">
+  <p:cSld name="Slide 16">
+    <p:bg>
+      <p:bgPr>
+        <a:blipFill dpi="0" rotWithShape="1">
+          <a:blip r:embed="rId1">
+            <a:lum/>
+          </a:blip>
+          <a:srcRect/>
+          <a:stretch>
+            <a:fillRect/>
+          </a:stretch>
+        </a:blipFill>
+        <a:effectLst/>
+      </p:bgPr>
+    </p:bg>
+    <p:spTree>
+      <p:nvGrpSpPr>
+        <p:cNvPr id="1" name=""/>
+        <p:cNvGrpSpPr/>
+        <p:nvPr/>
+      </p:nvGrpSpPr>
+      <p:grpSpPr>
+        <a:xfrm>
+          <a:off x="0" y="0"/>
+          <a:ext cx="0" cy="0"/>
+          <a:chOff x="0" y="0"/>
+          <a:chExt cx="0" cy="0"/>
+        </a:xfrm>
+      </p:grpSpPr>
+      <p:pic>
+        <p:nvPicPr>
+          <p:cNvPr id="2" name="Image 0" descr="mark-airuntime.png">    </p:cNvPr>
+          <p:cNvPicPr>
+            <a:picLocks noChangeAspect="1"/>
+          </p:cNvPicPr>
+          <p:nvPr/>
+        </p:nvPicPr>
+        <p:blipFill>
+          <a:blip r:embed="rId2"/>
+          <a:stretch>
+            <a:fillRect/>
+          </a:stretch>
+        </p:blipFill>
+        <p:spPr>
+          <a:xfrm>
+            <a:off x="685800" y="1238250"/>
+            <a:ext cx="304800" cy="304800"/>
+          </a:xfrm>
+          <a:prstGeom prst="rect">
+            <a:avLst/>
+          </a:prstGeom>
+        </p:spPr>
+      </p:pic>
+      <p:sp>
+        <p:nvSpPr>
+          <p:cNvPr id="3" name="Text 0"/>
+          <p:cNvSpPr txBox="1"/>
+          <p:nvPr/>
+        </p:nvSpPr>
+        <p:spPr>
+          <a:xfrm>
+            <a:off x="1076325" y="1238250"/>
+            <a:ext cx="1333500" cy="304800"/>
+          </a:xfrm>
+          <a:prstGeom prst="rect">
+            <a:avLst/>
+          </a:prstGeom>
+          <a:noFill/>
+          <a:ln/>
+        </p:spPr>
+        <p:txBody>
+          <a:bodyPr wrap="square" lIns="0" tIns="0" rIns="0" bIns="0" rtlCol="0" anchor="ctr"/>
+          <a:lstStyle/>
+          <a:p>
+            <a:pPr indent="0" marL="0">
+              <a:buNone/>
+            </a:pPr>
+            <a:r>
+              <a:rPr lang="en-US" sz="1425" b="1" spc="80" kern="0" dirty="0">
+                <a:solidFill>
+                  <a:srgbClr val="FFFFFF"/>
+                </a:solidFill>
+                <a:latin typeface="Calibri" pitchFamily="34" charset="0"/>
+                <a:ea typeface="Calibri" pitchFamily="34" charset="-122"/>
+                <a:cs typeface="Calibri" pitchFamily="34" charset="-120"/>
+              </a:rPr>
+              <a:t>AIRUNTIME</a:t>
+            </a:r>
+            <a:endParaRPr lang="en-US" sz="1425" dirty="0"/>
+          </a:p>
+        </p:txBody>
+      </p:sp>
+      <p:sp>
+        <p:nvSpPr>
+          <p:cNvPr id="4" name="Text 1"/>
+          <p:cNvSpPr txBox="1"/>
+          <p:nvPr/>
+        </p:nvSpPr>
+        <p:spPr>
+          <a:xfrm>
+            <a:off x="2152650" y="1238250"/>
+            <a:ext cx="133350" cy="304800"/>
+          </a:xfrm>
+          <a:prstGeom prst="rect">
+            <a:avLst/>
+          </a:prstGeom>
+          <a:noFill/>
+          <a:ln/>
+        </p:spPr>
+        <p:txBody>
+          <a:bodyPr wrap="square" lIns="0" tIns="0" rIns="0" bIns="0" rtlCol="0" anchor="ctr"/>
+          <a:lstStyle/>
+          <a:p>
+            <a:pPr algn="ctr" indent="0" marL="0">
+              <a:buNone/>
+            </a:pPr>
+            <a:r>
+              <a:rPr lang="en-US" sz="1400" dirty="0">
+                <a:solidFill>
+                  <a:srgbClr val="9DA6BA"/>
+                </a:solidFill>
+                <a:latin typeface="Calibri" pitchFamily="34" charset="0"/>
+                <a:ea typeface="Calibri" pitchFamily="34" charset="-122"/>
+                <a:cs typeface="Calibri" pitchFamily="34" charset="-120"/>
+              </a:rPr>
+              <a:t>×</a:t>
+            </a:r>
+            <a:endParaRPr lang="en-US" sz="1400" dirty="0"/>
+          </a:p>
+        </p:txBody>
+      </p:sp>
+      <p:sp>
+        <p:nvSpPr>
+          <p:cNvPr id="5" name="Shape 2"/>
+          <p:cNvSpPr/>
+          <p:nvPr/>
+        </p:nvSpPr>
+        <p:spPr>
+          <a:xfrm>
+            <a:off x="2371725" y="1281113"/>
+            <a:ext cx="219075" cy="219075"/>
+          </a:xfrm>
+          <a:prstGeom prst="ellipse">
+            <a:avLst/>
+          </a:prstGeom>
+          <a:solidFill>
+            <a:srgbClr val="FFFFFF"/>
+          </a:solidFill>
+          <a:ln w="12700">
+            <a:solidFill>
+              <a:srgbClr val="FFFFFF"/>
+            </a:solidFill>
+            <a:prstDash val="solid"/>
+          </a:ln>
+        </p:spPr>
+      </p:sp>
+      <p:sp>
+        <p:nvSpPr>
+          <p:cNvPr id="6" name="Shape 3"/>
+          <p:cNvSpPr/>
+          <p:nvPr/>
+        </p:nvSpPr>
+        <p:spPr>
+          <a:xfrm>
+            <a:off x="2443163" y="1352550"/>
+            <a:ext cx="76200" cy="76200"/>
+          </a:xfrm>
+          <a:prstGeom prst="ellipse">
+            <a:avLst/>
+          </a:prstGeom>
+          <a:solidFill>
+            <a:srgbClr val="0077FF"/>
+          </a:solidFill>
+          <a:ln w="12700">
+            <a:solidFill>
+              <a:srgbClr val="0077FF"/>
+            </a:solidFill>
+            <a:prstDash val="solid"/>
+          </a:ln>
+        </p:spPr>
+      </p:sp>
+      <p:sp>
+        <p:nvSpPr>
+          <p:cNvPr id="7" name="Text 4"/>
+          <p:cNvSpPr txBox="1"/>
+          <p:nvPr/>
+        </p:nvSpPr>
+        <p:spPr>
+          <a:xfrm>
+            <a:off x="2667000" y="1238250"/>
+            <a:ext cx="762000" cy="304800"/>
+          </a:xfrm>
+          <a:prstGeom prst="rect">
+            <a:avLst/>
+          </a:prstGeom>
+          <a:noFill/>
+          <a:ln/>
+        </p:spPr>
+        <p:txBody>
+          <a:bodyPr wrap="square" lIns="0" tIns="0" rIns="0" bIns="0" rtlCol="0" anchor="ctr"/>
+          <a:lstStyle/>
+          <a:p>
+            <a:pPr indent="0" marL="0">
+              <a:buNone/>
+            </a:pPr>
+            <a:r>
+              <a:rPr lang="en-US" sz="1600" b="1" dirty="0">
+                <a:solidFill>
+                  <a:srgbClr val="FFFFFF"/>
+                </a:solidFill>
+                <a:latin typeface="Calibri" pitchFamily="34" charset="0"/>
+                <a:ea typeface="Calibri" pitchFamily="34" charset="-122"/>
+                <a:cs typeface="Calibri" pitchFamily="34" charset="-120"/>
+              </a:rPr>
+              <a:t>max</a:t>
+            </a:r>
+            <a:endParaRPr lang="en-US" sz="1600" dirty="0"/>
+          </a:p>
+        </p:txBody>
+      </p:sp>
+      <p:sp>
+        <p:nvSpPr>
+          <p:cNvPr id="8" name="Text 5"/>
+          <p:cNvSpPr txBox="1"/>
+          <p:nvPr/>
+        </p:nvSpPr>
+        <p:spPr>
+          <a:xfrm>
+            <a:off x="685800" y="1847850"/>
+            <a:ext cx="4953000" cy="190500"/>
+          </a:xfrm>
+          <a:prstGeom prst="rect">
+            <a:avLst/>
+          </a:prstGeom>
+          <a:noFill/>
+          <a:ln/>
+        </p:spPr>
+        <p:txBody>
+          <a:bodyPr wrap="square" lIns="0" tIns="0" rIns="0" bIns="0" rtlCol="0" anchor="ctr"/>
+          <a:lstStyle/>
+          <a:p>
+            <a:pPr indent="0" marL="0">
+              <a:buNone/>
+            </a:pPr>
+            <a:r>
+              <a:rPr lang="en-US" sz="860" b="1" spc="200" kern="0" dirty="0">
+                <a:solidFill>
+                  <a:srgbClr val="8EC4FF"/>
+                </a:solidFill>
+                <a:latin typeface="Calibri" pitchFamily="34" charset="0"/>
+                <a:ea typeface="Calibri" pitchFamily="34" charset="-122"/>
+                <a:cs typeface="Calibri" pitchFamily="34" charset="-120"/>
+              </a:rPr>
+              <a:t>СПАСИБО ЗА ВНИМАНИЕ</a:t>
+            </a:r>
+            <a:endParaRPr lang="en-US" sz="860" dirty="0"/>
+          </a:p>
+        </p:txBody>
+      </p:sp>
+      <p:sp>
+        <p:nvSpPr>
+          <p:cNvPr id="9" name="Text 6"/>
+          <p:cNvSpPr txBox="1"/>
+          <p:nvPr/>
+        </p:nvSpPr>
+        <p:spPr>
+          <a:xfrm>
+            <a:off x="666750" y="2114550"/>
+            <a:ext cx="7048500" cy="1333500"/>
+          </a:xfrm>
+          <a:prstGeom prst="rect">
+            <a:avLst/>
+          </a:prstGeom>
+          <a:noFill/>
+          <a:ln/>
+        </p:spPr>
+        <p:txBody>
+          <a:bodyPr wrap="square" lIns="0" tIns="0" rIns="0" bIns="0" rtlCol="0" anchor="t"/>
+          <a:lstStyle/>
+          <a:p>
+            <a:pPr indent="0" marL="0">
+              <a:lnSpc>
+                <a:spcPct val="98000"/>
+              </a:lnSpc>
+              <a:buNone/>
+            </a:pPr>
+            <a:r>
+              <a:rPr lang="en-US" sz="4600" b="1" dirty="0">
+                <a:solidFill>
+                  <a:srgbClr val="FFFFFF"/>
+                </a:solidFill>
+                <a:latin typeface="Calibri" pitchFamily="34" charset="0"/>
+                <a:ea typeface="Calibri" pitchFamily="34" charset="-122"/>
+                <a:cs typeface="Calibri" pitchFamily="34" charset="-120"/>
+              </a:rPr>
+              <a:t>Одно сообщение —</a:t>
+            </a:r>
+            <a:endParaRPr lang="en-US" sz="4600" dirty="0"/>
+          </a:p>
+          <a:p>
+            <a:pPr indent="0" marL="0">
+              <a:lnSpc>
+                <a:spcPct val="98000"/>
+              </a:lnSpc>
+              <a:buNone/>
+            </a:pPr>
+            <a:r>
+              <a:rPr lang="en-US" sz="4600" b="1" dirty="0">
+                <a:solidFill>
+                  <a:srgbClr val="FFFFFF"/>
+                </a:solidFill>
+                <a:latin typeface="Calibri" pitchFamily="34" charset="0"/>
+                <a:ea typeface="Calibri" pitchFamily="34" charset="-122"/>
+                <a:cs typeface="Calibri" pitchFamily="34" charset="-120"/>
+              </a:rPr>
+              <a:t>и запись уже в MAX</a:t>
+            </a:r>
+            <a:endParaRPr lang="en-US" sz="4600" dirty="0"/>
+          </a:p>
+        </p:txBody>
+      </p:sp>
+      <p:sp>
+        <p:nvSpPr>
+          <p:cNvPr id="10" name="Text 7"/>
+          <p:cNvSpPr txBox="1"/>
+          <p:nvPr/>
+        </p:nvSpPr>
+        <p:spPr>
+          <a:xfrm>
+            <a:off x="685800" y="3581400"/>
+            <a:ext cx="5524500" cy="819150"/>
+          </a:xfrm>
+          <a:prstGeom prst="rect">
+            <a:avLst/>
+          </a:prstGeom>
+          <a:noFill/>
+          <a:ln/>
+        </p:spPr>
+        <p:txBody>
+          <a:bodyPr wrap="square" lIns="0" tIns="0" rIns="0" bIns="0" rtlCol="0" anchor="t"/>
+          <a:lstStyle/>
+          <a:p>
+            <a:pPr indent="0" marL="0">
+              <a:lnSpc>
+                <a:spcPct val="115000"/>
+              </a:lnSpc>
+              <a:buNone/>
+            </a:pPr>
+            <a:r>
+              <a:rPr lang="en-US" sz="1450" dirty="0">
+                <a:solidFill>
+                  <a:srgbClr val="BDC4D2"/>
+                </a:solidFill>
+                <a:latin typeface="Calibri" pitchFamily="34" charset="0"/>
+                <a:ea typeface="Calibri" pitchFamily="34" charset="-122"/>
+                <a:cs typeface="Calibri" pitchFamily="34" charset="-120"/>
+              </a:rPr>
+              <a:t>Бот и мини-приложение работают прямо сейчас. Опишите бизнес одним сообщением — секунд через десять у клиентов будет витрина с записью, а у вас заявки в чате.</a:t>
+            </a:r>
+            <a:endParaRPr lang="en-US" sz="1450" dirty="0"/>
+          </a:p>
+        </p:txBody>
+      </p:sp>
+      <p:sp>
+        <p:nvSpPr>
+          <p:cNvPr id="11" name="Text 8"/>
+          <p:cNvSpPr txBox="1"/>
+          <p:nvPr/>
+        </p:nvSpPr>
+        <p:spPr>
+          <a:xfrm>
+            <a:off x="685800" y="4752975"/>
+            <a:ext cx="1714500" cy="228600"/>
+          </a:xfrm>
+          <a:prstGeom prst="rect">
+            <a:avLst/>
+          </a:prstGeom>
+          <a:noFill/>
+          <a:ln/>
+        </p:spPr>
+        <p:txBody>
+          <a:bodyPr wrap="square" lIns="0" tIns="0" rIns="0" bIns="0" rtlCol="0" anchor="ctr"/>
+          <a:lstStyle/>
+          <a:p>
+            <a:pPr indent="0" marL="0">
+              <a:buNone/>
+            </a:pPr>
+            <a:r>
+              <a:rPr lang="en-US" sz="860" b="1" spc="200" kern="0" dirty="0">
+                <a:solidFill>
+                  <a:srgbClr val="7B8190"/>
+                </a:solidFill>
+                <a:latin typeface="Calibri" pitchFamily="34" charset="0"/>
+                <a:ea typeface="Calibri" pitchFamily="34" charset="-122"/>
+                <a:cs typeface="Calibri" pitchFamily="34" charset="-120"/>
+              </a:rPr>
+              <a:t>БОТ В MAX</a:t>
+            </a:r>
+            <a:endParaRPr lang="en-US" sz="860" dirty="0"/>
+          </a:p>
+        </p:txBody>
+      </p:sp>
+      <p:sp>
+        <p:nvSpPr>
+          <p:cNvPr id="12" name="Text 9"/>
+          <p:cNvSpPr txBox="1"/>
+          <p:nvPr/>
+        </p:nvSpPr>
+        <p:spPr>
+          <a:xfrm>
+            <a:off x="2457450" y="4752975"/>
+            <a:ext cx="4000500" cy="228600"/>
+          </a:xfrm>
+          <a:prstGeom prst="rect">
+            <a:avLst/>
+          </a:prstGeom>
+          <a:noFill/>
+          <a:ln/>
+        </p:spPr>
+        <p:txBody>
+          <a:bodyPr wrap="square" lIns="0" tIns="0" rIns="0" bIns="0" rtlCol="0" anchor="ctr"/>
+          <a:lstStyle/>
+          <a:p>
+            <a:pPr indent="0" marL="0">
+              <a:buNone/>
+            </a:pPr>
+            <a:r>
+              <a:rPr lang="en-US" sz="1300" b="1" dirty="0">
+                <a:solidFill>
+                  <a:srgbClr val="FFFFFF"/>
+                </a:solidFill>
+                <a:latin typeface="Calibri" pitchFamily="34" charset="0"/>
+                <a:ea typeface="Calibri" pitchFamily="34" charset="-122"/>
+                <a:cs typeface="Calibri" pitchFamily="34" charset="-120"/>
+              </a:rPr>
+              <a:t>max.ru/t403_hakaton_max_bot</a:t>
+            </a:r>
+            <a:endParaRPr lang="en-US" sz="1300" dirty="0"/>
+          </a:p>
+        </p:txBody>
+      </p:sp>
+      <p:sp>
+        <p:nvSpPr>
+          <p:cNvPr id="13" name="Text 10"/>
+          <p:cNvSpPr txBox="1"/>
+          <p:nvPr/>
+        </p:nvSpPr>
+        <p:spPr>
+          <a:xfrm>
+            <a:off x="685800" y="5076825"/>
+            <a:ext cx="1714500" cy="228600"/>
+          </a:xfrm>
+          <a:prstGeom prst="rect">
+            <a:avLst/>
+          </a:prstGeom>
+          <a:noFill/>
+          <a:ln/>
+        </p:spPr>
+        <p:txBody>
+          <a:bodyPr wrap="square" lIns="0" tIns="0" rIns="0" bIns="0" rtlCol="0" anchor="ctr"/>
+          <a:lstStyle/>
+          <a:p>
+            <a:pPr indent="0" marL="0">
+              <a:buNone/>
+            </a:pPr>
+            <a:r>
+              <a:rPr lang="en-US" sz="860" b="1" spc="200" kern="0" dirty="0">
+                <a:solidFill>
+                  <a:srgbClr val="7B8190"/>
+                </a:solidFill>
+                <a:latin typeface="Calibri" pitchFamily="34" charset="0"/>
+                <a:ea typeface="Calibri" pitchFamily="34" charset="-122"/>
+                <a:cs typeface="Calibri" pitchFamily="34" charset="-120"/>
+              </a:rPr>
+              <a:t>МИНИ-ПРИЛОЖЕНИЕ</a:t>
+            </a:r>
+            <a:endParaRPr lang="en-US" sz="860" dirty="0"/>
+          </a:p>
+        </p:txBody>
+      </p:sp>
+      <p:sp>
+        <p:nvSpPr>
+          <p:cNvPr id="14" name="Text 11"/>
+          <p:cNvSpPr txBox="1"/>
+          <p:nvPr/>
+        </p:nvSpPr>
+        <p:spPr>
+          <a:xfrm>
+            <a:off x="2457450" y="5076825"/>
+            <a:ext cx="4000500" cy="228600"/>
+          </a:xfrm>
+          <a:prstGeom prst="rect">
+            <a:avLst/>
+          </a:prstGeom>
+          <a:noFill/>
+          <a:ln/>
+        </p:spPr>
+        <p:txBody>
+          <a:bodyPr wrap="square" lIns="0" tIns="0" rIns="0" bIns="0" rtlCol="0" anchor="ctr"/>
+          <a:lstStyle/>
+          <a:p>
+            <a:pPr indent="0" marL="0">
+              <a:buNone/>
+            </a:pPr>
+            <a:r>
+              <a:rPr lang="en-US" sz="1300" b="1" dirty="0">
+                <a:solidFill>
+                  <a:srgbClr val="FFFFFF"/>
+                </a:solidFill>
+                <a:latin typeface="Calibri" pitchFamily="34" charset="0"/>
+                <a:ea typeface="Calibri" pitchFamily="34" charset="-122"/>
+                <a:cs typeface="Calibri" pitchFamily="34" charset="-120"/>
+              </a:rPr>
+              <a:t>airuntime.ru/max</a:t>
+            </a:r>
+            <a:endParaRPr lang="en-US" sz="1300" dirty="0"/>
+          </a:p>
+        </p:txBody>
+      </p:sp>
+      <p:sp>
+        <p:nvSpPr>
+          <p:cNvPr id="15" name="Text 12"/>
+          <p:cNvSpPr txBox="1"/>
+          <p:nvPr/>
+        </p:nvSpPr>
+        <p:spPr>
+          <a:xfrm>
+            <a:off x="685800" y="5400675"/>
+            <a:ext cx="1714500" cy="228600"/>
+          </a:xfrm>
+          <a:prstGeom prst="rect">
+            <a:avLst/>
+          </a:prstGeom>
+          <a:noFill/>
+          <a:ln/>
+        </p:spPr>
+        <p:txBody>
+          <a:bodyPr wrap="square" lIns="0" tIns="0" rIns="0" bIns="0" rtlCol="0" anchor="ctr"/>
+          <a:lstStyle/>
+          <a:p>
+            <a:pPr indent="0" marL="0">
+              <a:buNone/>
+            </a:pPr>
+            <a:r>
+              <a:rPr lang="en-US" sz="860" b="1" spc="200" kern="0" dirty="0">
+                <a:solidFill>
+                  <a:srgbClr val="7B8190"/>
+                </a:solidFill>
+                <a:latin typeface="Calibri" pitchFamily="34" charset="0"/>
+                <a:ea typeface="Calibri" pitchFamily="34" charset="-122"/>
+                <a:cs typeface="Calibri" pitchFamily="34" charset="-120"/>
+              </a:rPr>
+              <a:t>ИСХОДНЫЙ КОД</a:t>
+            </a:r>
+            <a:endParaRPr lang="en-US" sz="860" dirty="0"/>
+          </a:p>
+        </p:txBody>
+      </p:sp>
+      <p:sp>
+        <p:nvSpPr>
+          <p:cNvPr id="16" name="Text 13"/>
+          <p:cNvSpPr txBox="1"/>
+          <p:nvPr/>
+        </p:nvSpPr>
+        <p:spPr>
+          <a:xfrm>
+            <a:off x="2457450" y="5400675"/>
+            <a:ext cx="4000500" cy="228600"/>
+          </a:xfrm>
+          <a:prstGeom prst="rect">
+            <a:avLst/>
+          </a:prstGeom>
+          <a:noFill/>
+          <a:ln/>
+        </p:spPr>
+        <p:txBody>
+          <a:bodyPr wrap="square" lIns="0" tIns="0" rIns="0" bIns="0" rtlCol="0" anchor="ctr"/>
+          <a:lstStyle/>
+          <a:p>
+            <a:pPr indent="0" marL="0">
+              <a:buNone/>
+            </a:pPr>
+            <a:r>
+              <a:rPr lang="en-US" sz="1300" b="1" dirty="0">
+                <a:solidFill>
+                  <a:srgbClr val="FFFFFF"/>
+                </a:solidFill>
+                <a:latin typeface="Calibri" pitchFamily="34" charset="0"/>
+                <a:ea typeface="Calibri" pitchFamily="34" charset="-122"/>
+                <a:cs typeface="Calibri" pitchFamily="34" charset="-120"/>
+              </a:rPr>
+              <a:t>github.com/airuntime-ru/airuntime</a:t>
+            </a:r>
+            <a:endParaRPr lang="en-US" sz="1300" dirty="0"/>
+          </a:p>
+        </p:txBody>
+      </p:sp>
+      <p:sp>
+        <p:nvSpPr>
+          <p:cNvPr id="17" name="Shape 14"/>
+          <p:cNvSpPr/>
+          <p:nvPr/>
+        </p:nvSpPr>
+        <p:spPr>
+          <a:xfrm>
+            <a:off x="8210550" y="1524000"/>
+            <a:ext cx="3086100" cy="3657600"/>
+          </a:xfrm>
+          <a:prstGeom prst="roundRect">
+            <a:avLst>
+              <a:gd name="adj" fmla="val 8642"/>
+            </a:avLst>
+          </a:prstGeom>
+          <a:solidFill>
+            <a:srgbClr val="FFFFFF"/>
+          </a:solidFill>
+          <a:ln w="12700">
+            <a:solidFill>
+              <a:srgbClr val="FFFFFF"/>
+            </a:solidFill>
+            <a:prstDash val="solid"/>
+          </a:ln>
+          <a:effectLst>
+            <a:outerShdw sx="100000" sy="100000" kx="0" ky="0" algn="bl" rotWithShape="0" blurRad="508000" dist="177800" dir="5400000">
+              <a:srgbClr val="000000">
+                <a:alpha val="55000"/>
+              </a:srgbClr>
+            </a:outerShdw>
+          </a:effectLst>
+        </p:spPr>
+      </p:sp>
+      <p:pic>
+        <p:nvPicPr>
+          <p:cNvPr id="18" name="Image 1" descr="qr-bot.png">    </p:cNvPr>
+          <p:cNvPicPr>
+            <a:picLocks noChangeAspect="1"/>
+          </p:cNvPicPr>
+          <p:nvPr/>
+        </p:nvPicPr>
+        <p:blipFill>
+          <a:blip r:embed="rId3"/>
+          <a:stretch>
+            <a:fillRect/>
+          </a:stretch>
+        </p:blipFill>
+        <p:spPr>
+          <a:xfrm>
+            <a:off x="8629650" y="1809750"/>
+            <a:ext cx="2247900" cy="2247900"/>
+          </a:xfrm>
+          <a:prstGeom prst="rect">
+            <a:avLst/>
+          </a:prstGeom>
+        </p:spPr>
+      </p:pic>
+      <p:sp>
+        <p:nvSpPr>
+          <p:cNvPr id="19" name="Text 15"/>
+          <p:cNvSpPr txBox="1"/>
+          <p:nvPr/>
+        </p:nvSpPr>
+        <p:spPr>
+          <a:xfrm>
+            <a:off x="8496300" y="4229100"/>
+            <a:ext cx="2514600" cy="266700"/>
+          </a:xfrm>
+          <a:prstGeom prst="rect">
+            <a:avLst/>
+          </a:prstGeom>
+          <a:noFill/>
+          <a:ln/>
+        </p:spPr>
+        <p:txBody>
+          <a:bodyPr wrap="square" lIns="0" tIns="0" rIns="0" bIns="0" rtlCol="0" anchor="ctr"/>
+          <a:lstStyle/>
+          <a:p>
+            <a:pPr algn="ctr" indent="0" marL="0">
+              <a:buNone/>
+            </a:pPr>
+            <a:r>
+              <a:rPr lang="en-US" sz="1500" b="1" dirty="0">
+                <a:solidFill>
+                  <a:srgbClr val="0D1117"/>
+                </a:solidFill>
+                <a:latin typeface="Calibri" pitchFamily="34" charset="0"/>
+                <a:ea typeface="Calibri" pitchFamily="34" charset="-122"/>
+                <a:cs typeface="Calibri" pitchFamily="34" charset="-120"/>
+              </a:rPr>
+              <a:t>Наведите камеру</a:t>
+            </a:r>
+            <a:endParaRPr lang="en-US" sz="1500" dirty="0"/>
+          </a:p>
+        </p:txBody>
+      </p:sp>
+      <p:sp>
+        <p:nvSpPr>
+          <p:cNvPr id="20" name="Text 16"/>
+          <p:cNvSpPr txBox="1"/>
+          <p:nvPr/>
+        </p:nvSpPr>
+        <p:spPr>
+          <a:xfrm>
+            <a:off x="8496300" y="4533900"/>
+            <a:ext cx="2514600" cy="419100"/>
+          </a:xfrm>
+          <a:prstGeom prst="rect">
+            <a:avLst/>
+          </a:prstGeom>
+          <a:noFill/>
+          <a:ln/>
+        </p:spPr>
+        <p:txBody>
+          <a:bodyPr wrap="square" lIns="0" tIns="0" rIns="0" bIns="0" rtlCol="0" anchor="t"/>
+          <a:lstStyle/>
+          <a:p>
+            <a:pPr algn="ctr" indent="0" marL="0">
+              <a:lnSpc>
+                <a:spcPct val="110000"/>
+              </a:lnSpc>
+              <a:buNone/>
+            </a:pPr>
+            <a:r>
+              <a:rPr lang="en-US" sz="1100" dirty="0">
+                <a:solidFill>
+                  <a:srgbClr val="4A5464"/>
+                </a:solidFill>
+                <a:latin typeface="Calibri" pitchFamily="34" charset="0"/>
+                <a:ea typeface="Calibri" pitchFamily="34" charset="-122"/>
+                <a:cs typeface="Calibri" pitchFamily="34" charset="-120"/>
+              </a:rPr>
+              <a:t>Откроется бот в MAX — опишите свой бизнес и получите витрину</a:t>
+            </a:r>
+            <a:endParaRPr lang="en-US" sz="1100" dirty="0"/>
+          </a:p>
+        </p:txBody>
+      </p:sp>
+      <p:sp>
+        <p:nvSpPr>
+          <p:cNvPr id="21" name="Text 17"/>
+          <p:cNvSpPr txBox="1"/>
+          <p:nvPr/>
+        </p:nvSpPr>
+        <p:spPr>
+          <a:xfrm>
+            <a:off x="502920" y="6382512"/>
+            <a:ext cx="3657600" cy="274320"/>
+          </a:xfrm>
+          <a:prstGeom prst="rect">
+            <a:avLst/>
+          </a:prstGeom>
+          <a:noFill/>
+          <a:ln/>
+        </p:spPr>
+        <p:txBody>
+          <a:bodyPr wrap="square" lIns="0" tIns="0" rIns="0" bIns="0" rtlCol="0" anchor="ctr"/>
+          <a:lstStyle/>
+          <a:p>
+            <a:pPr indent="0" marL="0">
+              <a:buNone/>
+            </a:pPr>
+            <a:r>
+              <a:rPr lang="en-US" sz="1000" b="1" spc="120" kern="0" dirty="0">
+                <a:solidFill>
+                  <a:srgbClr val="8193AE"/>
+                </a:solidFill>
+                <a:latin typeface="Calibri" pitchFamily="34" charset="0"/>
+                <a:ea typeface="Calibri" pitchFamily="34" charset="-122"/>
+                <a:cs typeface="Calibri" pitchFamily="34" charset="-120"/>
+              </a:rPr>
+              <a:t>AIRUNTIME</a:t>
+            </a:r>
+            <a:pPr indent="0" marL="0">
+              <a:buNone/>
+            </a:pPr>
+            <a:r>
+              <a:rPr lang="en-US" sz="1000" spc="120" kern="0" dirty="0">
+                <a:solidFill>
+                  <a:srgbClr val="5C6B84"/>
+                </a:solidFill>
+                <a:latin typeface="Calibri" pitchFamily="34" charset="0"/>
+                <a:ea typeface="Calibri" pitchFamily="34" charset="-122"/>
+                <a:cs typeface="Calibri" pitchFamily="34" charset="-120"/>
+              </a:rPr>
+              <a:t>  ×  </a:t>
+            </a:r>
+            <a:pPr indent="0" marL="0">
+              <a:buNone/>
+            </a:pPr>
+            <a:r>
+              <a:rPr lang="en-US" sz="1000" b="1" spc="120" kern="0" dirty="0">
+                <a:solidFill>
+                  <a:srgbClr val="8193AE"/>
+                </a:solidFill>
+                <a:latin typeface="Calibri" pitchFamily="34" charset="0"/>
+                <a:ea typeface="Calibri" pitchFamily="34" charset="-122"/>
+                <a:cs typeface="Calibri" pitchFamily="34" charset="-120"/>
+              </a:rPr>
+              <a:t>MAX</a:t>
+            </a:r>
+            <a:endParaRPr lang="en-US" sz="1000" dirty="0"/>
+          </a:p>
+        </p:txBody>
+      </p:sp>
+      <p:sp>
+        <p:nvSpPr>
+          <p:cNvPr id="22" name="Text 18"/>
+          <p:cNvSpPr txBox="1"/>
+          <p:nvPr/>
+        </p:nvSpPr>
+        <p:spPr>
+          <a:xfrm>
+            <a:off x="10771632" y="6382512"/>
+            <a:ext cx="914400" cy="274320"/>
+          </a:xfrm>
+          <a:prstGeom prst="rect">
+            <a:avLst/>
+          </a:prstGeom>
+          <a:noFill/>
+          <a:ln/>
+        </p:spPr>
+        <p:txBody>
+          <a:bodyPr wrap="square" lIns="0" tIns="0" rIns="0" bIns="0" rtlCol="0" anchor="ctr"/>
+          <a:lstStyle/>
+          <a:p>
+            <a:pPr algn="r" indent="0" marL="0">
+              <a:buNone/>
+            </a:pPr>
+            <a:r>
+              <a:rPr lang="en-US" sz="1100" b="1" dirty="0">
+                <a:solidFill>
+                  <a:srgbClr val="8193AE"/>
+                </a:solidFill>
+                <a:latin typeface="Calibri" pitchFamily="34" charset="0"/>
+                <a:ea typeface="Calibri" pitchFamily="34" charset="-122"/>
+                <a:cs typeface="Calibri" pitchFamily="34" charset="-120"/>
+              </a:rPr>
+              <a:t>16</a:t>
+            </a:r>
+            <a:endParaRPr lang="en-US" sz="1100" dirty="0"/>
+          </a:p>
+        </p:txBody>
+      </p:sp>
+    </p:spTree>
+  </p:cSld>
+  <p:clrMapOvr>
+    <a:masterClrMapping/>
+  </p:clrMapOvr>
+</p:sld>
+</file>
+
 <file path=ppt/slides/slide2.xml><?xml version="1.0" encoding="utf-8"?>
 <p:sld xmlns:a="http://schemas.openxmlformats.org/drawingml/2006/main" xmlns:r="http://schemas.openxmlformats.org/officeDocument/2006/relationships" xmlns:p="http://schemas.openxmlformats.org/presentationml/2006/main">
   <p:cSld name="Slide 2">
@@ -8839,32 +9780,56 @@
           <a:chExt cx="0" cy="0"/>
         </a:xfrm>
       </p:grpSpPr>
-      <p:sp>
-        <p:nvSpPr>
-          <p:cNvPr id="2" name="Text 0"/>
-          <p:cNvSpPr txBox="1"/>
-          <p:nvPr/>
-        </p:nvSpPr>
-        <p:spPr>
-          <a:xfrm>
-            <a:off x="502920" y="1417320"/>
-            <a:ext cx="4572000" cy="365760"/>
-          </a:xfrm>
-          <a:prstGeom prst="rect">
-            <a:avLst/>
-          </a:prstGeom>
-          <a:noFill/>
-          <a:ln/>
-        </p:spPr>
-        <p:txBody>
-          <a:bodyPr wrap="square" lIns="0" tIns="0" rIns="0" bIns="0" rtlCol="0" anchor="ctr"/>
-          <a:lstStyle/>
-          <a:p>
-            <a:pPr indent="0" marL="0">
-              <a:buNone/>
-            </a:pPr>
-            <a:r>
-              <a:rPr lang="en-US" sz="1600" b="1" spc="150" kern="0" dirty="0">
+      <p:pic>
+        <p:nvPicPr>
+          <p:cNvPr id="2" name="Image 0" descr="mark-airuntime.png">    </p:cNvPr>
+          <p:cNvPicPr>
+            <a:picLocks noChangeAspect="1"/>
+          </p:cNvPicPr>
+          <p:nvPr/>
+        </p:nvPicPr>
+        <p:blipFill>
+          <a:blip r:embed="rId2"/>
+          <a:stretch>
+            <a:fillRect/>
+          </a:stretch>
+        </p:blipFill>
+        <p:spPr>
+          <a:xfrm>
+            <a:off x="685800" y="1333500"/>
+            <a:ext cx="304800" cy="304800"/>
+          </a:xfrm>
+          <a:prstGeom prst="rect">
+            <a:avLst/>
+          </a:prstGeom>
+        </p:spPr>
+      </p:pic>
+      <p:sp>
+        <p:nvSpPr>
+          <p:cNvPr id="3" name="Text 0"/>
+          <p:cNvSpPr txBox="1"/>
+          <p:nvPr/>
+        </p:nvSpPr>
+        <p:spPr>
+          <a:xfrm>
+            <a:off x="1076325" y="1333500"/>
+            <a:ext cx="1333500" cy="304800"/>
+          </a:xfrm>
+          <a:prstGeom prst="rect">
+            <a:avLst/>
+          </a:prstGeom>
+          <a:noFill/>
+          <a:ln/>
+        </p:spPr>
+        <p:txBody>
+          <a:bodyPr wrap="square" lIns="0" tIns="0" rIns="0" bIns="0" rtlCol="0" anchor="ctr"/>
+          <a:lstStyle/>
+          <a:p>
+            <a:pPr indent="0" marL="0">
+              <a:buNone/>
+            </a:pPr>
+            <a:r>
+              <a:rPr lang="en-US" sz="1425" b="1" spc="80" kern="0" dirty="0">
                 <a:solidFill>
                   <a:srgbClr val="FFFFFF"/>
                 </a:solidFill>
@@ -8874,25 +9839,125 @@
               </a:rPr>
               <a:t>AIRUNTIME</a:t>
             </a:r>
-            <a:pPr indent="0" marL="0">
-              <a:buNone/>
-            </a:pPr>
-            <a:r>
-              <a:rPr lang="en-US" sz="1500" spc="150" kern="0" dirty="0">
-                <a:solidFill>
-                  <a:srgbClr val="D5DCF5"/>
-                </a:solidFill>
-                <a:latin typeface="Calibri" pitchFamily="34" charset="0"/>
-                <a:ea typeface="Calibri" pitchFamily="34" charset="-122"/>
-                <a:cs typeface="Calibri" pitchFamily="34" charset="-120"/>
-              </a:rPr>
-              <a:t>   ×   </a:t>
-            </a:r>
-            <a:pPr indent="0" marL="0">
-              <a:buNone/>
-            </a:pPr>
-            <a:r>
-              <a:rPr lang="en-US" sz="1800" b="1" spc="150" kern="0" dirty="0">
+            <a:endParaRPr lang="en-US" sz="1425" dirty="0"/>
+          </a:p>
+        </p:txBody>
+      </p:sp>
+      <p:sp>
+        <p:nvSpPr>
+          <p:cNvPr id="4" name="Text 1"/>
+          <p:cNvSpPr txBox="1"/>
+          <p:nvPr/>
+        </p:nvSpPr>
+        <p:spPr>
+          <a:xfrm>
+            <a:off x="2152650" y="1333500"/>
+            <a:ext cx="133350" cy="304800"/>
+          </a:xfrm>
+          <a:prstGeom prst="rect">
+            <a:avLst/>
+          </a:prstGeom>
+          <a:noFill/>
+          <a:ln/>
+        </p:spPr>
+        <p:txBody>
+          <a:bodyPr wrap="square" lIns="0" tIns="0" rIns="0" bIns="0" rtlCol="0" anchor="ctr"/>
+          <a:lstStyle/>
+          <a:p>
+            <a:pPr algn="ctr" indent="0" marL="0">
+              <a:buNone/>
+            </a:pPr>
+            <a:r>
+              <a:rPr lang="en-US" sz="1400" dirty="0">
+                <a:solidFill>
+                  <a:srgbClr val="9DA6BA"/>
+                </a:solidFill>
+                <a:latin typeface="Calibri" pitchFamily="34" charset="0"/>
+                <a:ea typeface="Calibri" pitchFamily="34" charset="-122"/>
+                <a:cs typeface="Calibri" pitchFamily="34" charset="-120"/>
+              </a:rPr>
+              <a:t>×</a:t>
+            </a:r>
+            <a:endParaRPr lang="en-US" sz="1400" dirty="0"/>
+          </a:p>
+        </p:txBody>
+      </p:sp>
+      <p:sp>
+        <p:nvSpPr>
+          <p:cNvPr id="5" name="Shape 2"/>
+          <p:cNvSpPr/>
+          <p:nvPr/>
+        </p:nvSpPr>
+        <p:spPr>
+          <a:xfrm>
+            <a:off x="2371725" y="1376363"/>
+            <a:ext cx="219075" cy="219075"/>
+          </a:xfrm>
+          <a:prstGeom prst="ellipse">
+            <a:avLst/>
+          </a:prstGeom>
+          <a:solidFill>
+            <a:srgbClr val="FFFFFF"/>
+          </a:solidFill>
+          <a:ln w="12700">
+            <a:solidFill>
+              <a:srgbClr val="FFFFFF"/>
+            </a:solidFill>
+            <a:prstDash val="solid"/>
+          </a:ln>
+        </p:spPr>
+      </p:sp>
+      <p:sp>
+        <p:nvSpPr>
+          <p:cNvPr id="6" name="Shape 3"/>
+          <p:cNvSpPr/>
+          <p:nvPr/>
+        </p:nvSpPr>
+        <p:spPr>
+          <a:xfrm>
+            <a:off x="2443163" y="1447800"/>
+            <a:ext cx="76200" cy="76200"/>
+          </a:xfrm>
+          <a:prstGeom prst="ellipse">
+            <a:avLst/>
+          </a:prstGeom>
+          <a:solidFill>
+            <a:srgbClr val="0077FF"/>
+          </a:solidFill>
+          <a:ln w="12700">
+            <a:solidFill>
+              <a:srgbClr val="0077FF"/>
+            </a:solidFill>
+            <a:prstDash val="solid"/>
+          </a:ln>
+        </p:spPr>
+      </p:sp>
+      <p:sp>
+        <p:nvSpPr>
+          <p:cNvPr id="7" name="Text 4"/>
+          <p:cNvSpPr txBox="1"/>
+          <p:nvPr/>
+        </p:nvSpPr>
+        <p:spPr>
+          <a:xfrm>
+            <a:off x="2667000" y="1333500"/>
+            <a:ext cx="762000" cy="304800"/>
+          </a:xfrm>
+          <a:prstGeom prst="rect">
+            <a:avLst/>
+          </a:prstGeom>
+          <a:noFill/>
+          <a:ln/>
+        </p:spPr>
+        <p:txBody>
+          <a:bodyPr wrap="square" lIns="0" tIns="0" rIns="0" bIns="0" rtlCol="0" anchor="ctr"/>
+          <a:lstStyle/>
+          <a:p>
+            <a:pPr indent="0" marL="0">
+              <a:buNone/>
+            </a:pPr>
+            <a:r>
+              <a:rPr lang="en-US" sz="1600" b="1" dirty="0">
                 <a:solidFill>
                   <a:srgbClr val="FFFFFF"/>
                 </a:solidFill>
@@ -8908,32 +9973,32 @@
       </p:sp>
       <p:sp>
         <p:nvSpPr>
-          <p:cNvPr id="3" name="Text 1"/>
-          <p:cNvSpPr txBox="1"/>
-          <p:nvPr/>
-        </p:nvSpPr>
-        <p:spPr>
-          <a:xfrm>
-            <a:off x="502920" y="1920240"/>
-            <a:ext cx="5486400" cy="274320"/>
-          </a:xfrm>
-          <a:prstGeom prst="rect">
-            <a:avLst/>
-          </a:prstGeom>
-          <a:noFill/>
-          <a:ln/>
-        </p:spPr>
-        <p:txBody>
-          <a:bodyPr wrap="square" lIns="0" tIns="0" rIns="0" bIns="0" rtlCol="0" anchor="ctr"/>
-          <a:lstStyle/>
-          <a:p>
-            <a:pPr indent="0" marL="0">
-              <a:buNone/>
-            </a:pPr>
-            <a:r>
-              <a:rPr lang="en-US" sz="1100" b="1" spc="220" kern="0" dirty="0">
-                <a:solidFill>
-                  <a:srgbClr val="D9E4FF"/>
+          <p:cNvPr id="8" name="Text 5"/>
+          <p:cNvSpPr txBox="1"/>
+          <p:nvPr/>
+        </p:nvSpPr>
+        <p:spPr>
+          <a:xfrm>
+            <a:off x="685800" y="1943100"/>
+            <a:ext cx="4953000" cy="190500"/>
+          </a:xfrm>
+          <a:prstGeom prst="rect">
+            <a:avLst/>
+          </a:prstGeom>
+          <a:noFill/>
+          <a:ln/>
+        </p:spPr>
+        <p:txBody>
+          <a:bodyPr wrap="square" lIns="0" tIns="0" rIns="0" bIns="0" rtlCol="0" anchor="ctr"/>
+          <a:lstStyle/>
+          <a:p>
+            <a:pPr indent="0" marL="0">
+              <a:buNone/>
+            </a:pPr>
+            <a:r>
+              <a:rPr lang="en-US" sz="860" b="1" spc="200" kern="0" dirty="0">
+                <a:solidFill>
+                  <a:srgbClr val="8EC4FF"/>
                 </a:solidFill>
                 <a:latin typeface="Calibri" pitchFamily="34" charset="0"/>
                 <a:ea typeface="Calibri" pitchFamily="34" charset="-122"/>
@@ -8941,159 +10006,730 @@
               </a:rPr>
               <a:t>ТРЕК «ЭФФЕКТИВНЫЙ БИЗНЕС»</a:t>
             </a:r>
+            <a:endParaRPr lang="en-US" sz="860" dirty="0"/>
+          </a:p>
+        </p:txBody>
+      </p:sp>
+      <p:sp>
+        <p:nvSpPr>
+          <p:cNvPr id="9" name="Text 6"/>
+          <p:cNvSpPr txBox="1"/>
+          <p:nvPr/>
+        </p:nvSpPr>
+        <p:spPr>
+          <a:xfrm>
+            <a:off x="647700" y="2152650"/>
+            <a:ext cx="5334000" cy="1181100"/>
+          </a:xfrm>
+          <a:prstGeom prst="rect">
+            <a:avLst/>
+          </a:prstGeom>
+          <a:noFill/>
+          <a:ln/>
+        </p:spPr>
+        <p:txBody>
+          <a:bodyPr wrap="square" lIns="0" tIns="0" rIns="0" bIns="0" rtlCol="0" anchor="t"/>
+          <a:lstStyle/>
+          <a:p>
+            <a:pPr indent="0" marL="0">
+              <a:buNone/>
+            </a:pPr>
+            <a:r>
+              <a:rPr lang="en-US" sz="8400" b="1" dirty="0">
+                <a:solidFill>
+                  <a:srgbClr val="FFFFFF"/>
+                </a:solidFill>
+                <a:latin typeface="Calibri" pitchFamily="34" charset="0"/>
+                <a:ea typeface="Calibri" pitchFamily="34" charset="-122"/>
+                <a:cs typeface="Calibri" pitchFamily="34" charset="-120"/>
+              </a:rPr>
+              <a:t>Витрина</a:t>
+            </a:r>
+            <a:endParaRPr lang="en-US" sz="8400" dirty="0"/>
+          </a:p>
+        </p:txBody>
+      </p:sp>
+      <p:sp>
+        <p:nvSpPr>
+          <p:cNvPr id="10" name="Text 7"/>
+          <p:cNvSpPr txBox="1"/>
+          <p:nvPr/>
+        </p:nvSpPr>
+        <p:spPr>
+          <a:xfrm>
+            <a:off x="685800" y="3505200"/>
+            <a:ext cx="4762500" cy="876300"/>
+          </a:xfrm>
+          <a:prstGeom prst="rect">
+            <a:avLst/>
+          </a:prstGeom>
+          <a:noFill/>
+          <a:ln/>
+        </p:spPr>
+        <p:txBody>
+          <a:bodyPr wrap="square" lIns="0" tIns="0" rIns="0" bIns="0" rtlCol="0" anchor="t"/>
+          <a:lstStyle/>
+          <a:p>
+            <a:pPr indent="0" marL="0">
+              <a:lnSpc>
+                <a:spcPct val="115000"/>
+              </a:lnSpc>
+              <a:buNone/>
+            </a:pPr>
+            <a:r>
+              <a:rPr lang="en-US" sz="1600" dirty="0">
+                <a:solidFill>
+                  <a:srgbClr val="BDC4D2"/>
+                </a:solidFill>
+                <a:latin typeface="Calibri" pitchFamily="34" charset="0"/>
+                <a:ea typeface="Calibri" pitchFamily="34" charset="-122"/>
+                <a:cs typeface="Calibri" pitchFamily="34" charset="-120"/>
+              </a:rPr>
+              <a:t>Рабочий сервис записи в MAX из одного сообщения — без разработчика, без подрядчика, без ожидания.</a:t>
+            </a:r>
+            <a:endParaRPr lang="en-US" sz="1600" dirty="0"/>
+          </a:p>
+        </p:txBody>
+      </p:sp>
+      <p:sp>
+        <p:nvSpPr>
+          <p:cNvPr id="11" name="Text 8"/>
+          <p:cNvSpPr txBox="1"/>
+          <p:nvPr/>
+        </p:nvSpPr>
+        <p:spPr>
+          <a:xfrm>
+            <a:off x="685800" y="4810125"/>
+            <a:ext cx="1905000" cy="152400"/>
+          </a:xfrm>
+          <a:prstGeom prst="rect">
+            <a:avLst/>
+          </a:prstGeom>
+          <a:noFill/>
+          <a:ln/>
+        </p:spPr>
+        <p:txBody>
+          <a:bodyPr wrap="square" lIns="0" tIns="0" rIns="0" bIns="0" rtlCol="0" anchor="ctr"/>
+          <a:lstStyle/>
+          <a:p>
+            <a:pPr indent="0" marL="0">
+              <a:buNone/>
+            </a:pPr>
+            <a:r>
+              <a:rPr lang="en-US" sz="860" b="1" spc="200" kern="0" dirty="0">
+                <a:solidFill>
+                  <a:srgbClr val="7B8190"/>
+                </a:solidFill>
+                <a:latin typeface="Calibri" pitchFamily="34" charset="0"/>
+                <a:ea typeface="Calibri" pitchFamily="34" charset="-122"/>
+                <a:cs typeface="Calibri" pitchFamily="34" charset="-120"/>
+              </a:rPr>
+              <a:t>КОМАНДА</a:t>
+            </a:r>
+            <a:endParaRPr lang="en-US" sz="860" dirty="0"/>
+          </a:p>
+        </p:txBody>
+      </p:sp>
+      <p:sp>
+        <p:nvSpPr>
+          <p:cNvPr id="12" name="Text 9"/>
+          <p:cNvSpPr txBox="1"/>
+          <p:nvPr/>
+        </p:nvSpPr>
+        <p:spPr>
+          <a:xfrm>
+            <a:off x="685800" y="5029200"/>
+            <a:ext cx="2000250" cy="228600"/>
+          </a:xfrm>
+          <a:prstGeom prst="rect">
+            <a:avLst/>
+          </a:prstGeom>
+          <a:noFill/>
+          <a:ln/>
+        </p:spPr>
+        <p:txBody>
+          <a:bodyPr wrap="square" lIns="0" tIns="0" rIns="0" bIns="0" rtlCol="0" anchor="ctr"/>
+          <a:lstStyle/>
+          <a:p>
+            <a:pPr indent="0" marL="0">
+              <a:buNone/>
+            </a:pPr>
+            <a:r>
+              <a:rPr lang="en-US" sz="1275" b="1" u="dash" dirty="0">
+                <a:solidFill>
+                  <a:srgbClr val="8F96A6"/>
+                </a:solidFill>
+                <a:uFill>
+                  <a:solidFill>
+                    <a:srgbClr val="59627A"/>
+                  </a:solidFill>
+                </a:uFill>
+                <a:latin typeface="Calibri" pitchFamily="34" charset="0"/>
+                <a:ea typeface="Calibri" pitchFamily="34" charset="-122"/>
+                <a:cs typeface="Calibri" pitchFamily="34" charset="-120"/>
+              </a:rPr>
+              <a:t>[Название команды]</a:t>
+            </a:r>
+            <a:endParaRPr lang="en-US" sz="1275" dirty="0"/>
+          </a:p>
+        </p:txBody>
+      </p:sp>
+      <p:sp>
+        <p:nvSpPr>
+          <p:cNvPr id="13" name="Text 10"/>
+          <p:cNvSpPr txBox="1"/>
+          <p:nvPr/>
+        </p:nvSpPr>
+        <p:spPr>
+          <a:xfrm>
+            <a:off x="685800" y="5295900"/>
+            <a:ext cx="2000250" cy="190500"/>
+          </a:xfrm>
+          <a:prstGeom prst="rect">
+            <a:avLst/>
+          </a:prstGeom>
+          <a:noFill/>
+          <a:ln/>
+        </p:spPr>
+        <p:txBody>
+          <a:bodyPr wrap="square" lIns="0" tIns="0" rIns="0" bIns="0" rtlCol="0" anchor="ctr"/>
+          <a:lstStyle/>
+          <a:p>
+            <a:pPr indent="0" marL="0">
+              <a:buNone/>
+            </a:pPr>
+            <a:r>
+              <a:rPr lang="en-US" sz="1000" u="dash" dirty="0">
+                <a:solidFill>
+                  <a:srgbClr val="8F96A6"/>
+                </a:solidFill>
+                <a:uFill>
+                  <a:solidFill>
+                    <a:srgbClr val="59627A"/>
+                  </a:solidFill>
+                </a:uFill>
+                <a:latin typeface="Calibri" pitchFamily="34" charset="0"/>
+                <a:ea typeface="Calibri" pitchFamily="34" charset="-122"/>
+                <a:cs typeface="Calibri" pitchFamily="34" charset="-120"/>
+              </a:rPr>
+              <a:t>[Участники и роли]</a:t>
+            </a:r>
+            <a:endParaRPr lang="en-US" sz="1000" dirty="0"/>
+          </a:p>
+        </p:txBody>
+      </p:sp>
+      <p:sp>
+        <p:nvSpPr>
+          <p:cNvPr id="14" name="Text 11"/>
+          <p:cNvSpPr txBox="1"/>
+          <p:nvPr/>
+        </p:nvSpPr>
+        <p:spPr>
+          <a:xfrm>
+            <a:off x="2838450" y="4810125"/>
+            <a:ext cx="2381250" cy="152400"/>
+          </a:xfrm>
+          <a:prstGeom prst="rect">
+            <a:avLst/>
+          </a:prstGeom>
+          <a:noFill/>
+          <a:ln/>
+        </p:spPr>
+        <p:txBody>
+          <a:bodyPr wrap="square" lIns="0" tIns="0" rIns="0" bIns="0" rtlCol="0" anchor="ctr"/>
+          <a:lstStyle/>
+          <a:p>
+            <a:pPr indent="0" marL="0">
+              <a:buNone/>
+            </a:pPr>
+            <a:r>
+              <a:rPr lang="en-US" sz="860" b="1" spc="200" kern="0" dirty="0">
+                <a:solidFill>
+                  <a:srgbClr val="7B8190"/>
+                </a:solidFill>
+                <a:latin typeface="Calibri" pitchFamily="34" charset="0"/>
+                <a:ea typeface="Calibri" pitchFamily="34" charset="-122"/>
+                <a:cs typeface="Calibri" pitchFamily="34" charset="-120"/>
+              </a:rPr>
+              <a:t>РЕШЕНИЕ</a:t>
+            </a:r>
+            <a:endParaRPr lang="en-US" sz="860" dirty="0"/>
+          </a:p>
+        </p:txBody>
+      </p:sp>
+      <p:sp>
+        <p:nvSpPr>
+          <p:cNvPr id="15" name="Text 12"/>
+          <p:cNvSpPr txBox="1"/>
+          <p:nvPr/>
+        </p:nvSpPr>
+        <p:spPr>
+          <a:xfrm>
+            <a:off x="2838450" y="5029200"/>
+            <a:ext cx="2571750" cy="228600"/>
+          </a:xfrm>
+          <a:prstGeom prst="rect">
+            <a:avLst/>
+          </a:prstGeom>
+          <a:noFill/>
+          <a:ln/>
+        </p:spPr>
+        <p:txBody>
+          <a:bodyPr wrap="square" lIns="0" tIns="0" rIns="0" bIns="0" rtlCol="0" anchor="ctr"/>
+          <a:lstStyle/>
+          <a:p>
+            <a:pPr indent="0" marL="0">
+              <a:buNone/>
+            </a:pPr>
+            <a:r>
+              <a:rPr lang="en-US" sz="1275" b="1" dirty="0">
+                <a:solidFill>
+                  <a:srgbClr val="FFFFFF"/>
+                </a:solidFill>
+                <a:latin typeface="Calibri" pitchFamily="34" charset="0"/>
+                <a:ea typeface="Calibri" pitchFamily="34" charset="-122"/>
+                <a:cs typeface="Calibri" pitchFamily="34" charset="-120"/>
+              </a:rPr>
+              <a:t>Чат-бот + мини-приложение</a:t>
+            </a:r>
+            <a:endParaRPr lang="en-US" sz="1275" dirty="0"/>
+          </a:p>
+        </p:txBody>
+      </p:sp>
+      <p:sp>
+        <p:nvSpPr>
+          <p:cNvPr id="16" name="Text 13"/>
+          <p:cNvSpPr txBox="1"/>
+          <p:nvPr/>
+        </p:nvSpPr>
+        <p:spPr>
+          <a:xfrm>
+            <a:off x="2838450" y="5295900"/>
+            <a:ext cx="2571750" cy="190500"/>
+          </a:xfrm>
+          <a:prstGeom prst="rect">
+            <a:avLst/>
+          </a:prstGeom>
+          <a:noFill/>
+          <a:ln/>
+        </p:spPr>
+        <p:txBody>
+          <a:bodyPr wrap="square" lIns="0" tIns="0" rIns="0" bIns="0" rtlCol="0" anchor="ctr"/>
+          <a:lstStyle/>
+          <a:p>
+            <a:pPr indent="0" marL="0">
+              <a:buNone/>
+            </a:pPr>
+            <a:r>
+              <a:rPr lang="en-US" sz="1000" dirty="0">
+                <a:solidFill>
+                  <a:srgbClr val="A5ACBC"/>
+                </a:solidFill>
+                <a:latin typeface="Calibri" pitchFamily="34" charset="0"/>
+                <a:ea typeface="Calibri" pitchFamily="34" charset="-122"/>
+                <a:cs typeface="Calibri" pitchFamily="34" charset="-120"/>
+              </a:rPr>
+              <a:t>@t403_hakaton_max_bot</a:t>
+            </a:r>
+            <a:endParaRPr lang="en-US" sz="1000" dirty="0"/>
+          </a:p>
+        </p:txBody>
+      </p:sp>
+      <p:sp>
+        <p:nvSpPr>
+          <p:cNvPr id="17" name="Text 14"/>
+          <p:cNvSpPr txBox="1"/>
+          <p:nvPr/>
+        </p:nvSpPr>
+        <p:spPr>
+          <a:xfrm>
+            <a:off x="5848350" y="990600"/>
+            <a:ext cx="2857500" cy="152400"/>
+          </a:xfrm>
+          <a:prstGeom prst="rect">
+            <a:avLst/>
+          </a:prstGeom>
+          <a:noFill/>
+          <a:ln/>
+        </p:spPr>
+        <p:txBody>
+          <a:bodyPr wrap="square" lIns="0" tIns="0" rIns="0" bIns="0" rtlCol="0" anchor="ctr"/>
+          <a:lstStyle/>
+          <a:p>
+            <a:pPr indent="0" marL="0">
+              <a:buNone/>
+            </a:pPr>
+            <a:r>
+              <a:rPr lang="en-US" sz="825" b="1" spc="200" kern="0" dirty="0">
+                <a:solidFill>
+                  <a:srgbClr val="7B8190"/>
+                </a:solidFill>
+                <a:latin typeface="Calibri" pitchFamily="34" charset="0"/>
+                <a:ea typeface="Calibri" pitchFamily="34" charset="-122"/>
+                <a:cs typeface="Calibri" pitchFamily="34" charset="-120"/>
+              </a:rPr>
+              <a:t>ВЛАДЕЛЕЦ ПИШЕТ БОТУ</a:t>
+            </a:r>
+            <a:endParaRPr lang="en-US" sz="825" dirty="0"/>
+          </a:p>
+        </p:txBody>
+      </p:sp>
+      <p:pic>
+        <p:nvPicPr>
+          <p:cNvPr id="18" name="Image 1" descr="bubble-owner.png">    </p:cNvPr>
+          <p:cNvPicPr>
+            <a:picLocks noChangeAspect="1"/>
+          </p:cNvPicPr>
+          <p:nvPr/>
+        </p:nvPicPr>
+        <p:blipFill>
+          <a:blip r:embed="rId3"/>
+          <a:stretch>
+            <a:fillRect/>
+          </a:stretch>
+        </p:blipFill>
+        <p:spPr>
+          <a:xfrm>
+            <a:off x="5848350" y="1257300"/>
+            <a:ext cx="2590800" cy="1047750"/>
+          </a:xfrm>
+          <a:prstGeom prst="rect">
+            <a:avLst/>
+          </a:prstGeom>
+        </p:spPr>
+      </p:pic>
+      <p:sp>
+        <p:nvSpPr>
+          <p:cNvPr id="19" name="Text 15"/>
+          <p:cNvSpPr txBox="1"/>
+          <p:nvPr/>
+        </p:nvSpPr>
+        <p:spPr>
+          <a:xfrm>
+            <a:off x="6010275" y="1352550"/>
+            <a:ext cx="2286000" cy="857250"/>
+          </a:xfrm>
+          <a:prstGeom prst="rect">
+            <a:avLst/>
+          </a:prstGeom>
+          <a:noFill/>
+          <a:ln/>
+        </p:spPr>
+        <p:txBody>
+          <a:bodyPr wrap="square" lIns="0" tIns="0" rIns="0" bIns="0" rtlCol="0" anchor="ctr"/>
+          <a:lstStyle/>
+          <a:p>
+            <a:pPr indent="0" marL="0">
+              <a:lnSpc>
+                <a:spcPct val="110000"/>
+              </a:lnSpc>
+              <a:buNone/>
+            </a:pPr>
+            <a:r>
+              <a:rPr lang="en-US" sz="1100" dirty="0">
+                <a:solidFill>
+                  <a:srgbClr val="FFFFFF"/>
+                </a:solidFill>
+                <a:latin typeface="Calibri" pitchFamily="34" charset="0"/>
+                <a:ea typeface="Calibri" pitchFamily="34" charset="-122"/>
+                <a:cs typeface="Calibri" pitchFamily="34" charset="-120"/>
+              </a:rPr>
+              <a:t>Автосервис на Лесной пр. 12. Диагностика подвески 1500, замена масла 900, шиномонтаж 2400. С 9 до 20, +7 812 000-00-00</a:t>
+            </a:r>
             <a:endParaRPr lang="en-US" sz="1100" dirty="0"/>
           </a:p>
         </p:txBody>
       </p:sp>
       <p:sp>
         <p:nvSpPr>
-          <p:cNvPr id="4" name="Text 2"/>
-          <p:cNvSpPr txBox="1"/>
-          <p:nvPr/>
-        </p:nvSpPr>
-        <p:spPr>
-          <a:xfrm>
-            <a:off x="502920" y="2194560"/>
-            <a:ext cx="6400800" cy="1051560"/>
-          </a:xfrm>
-          <a:prstGeom prst="rect">
-            <a:avLst/>
-          </a:prstGeom>
-          <a:noFill/>
-          <a:ln/>
-        </p:spPr>
-        <p:txBody>
-          <a:bodyPr wrap="square" lIns="0" tIns="0" rIns="0" bIns="0" rtlCol="0" anchor="ctr"/>
-          <a:lstStyle/>
-          <a:p>
-            <a:pPr indent="0" marL="0">
-              <a:buNone/>
-            </a:pPr>
-            <a:r>
-              <a:rPr lang="en-US" sz="6000" b="1" dirty="0">
+          <p:cNvPr id="20" name="Shape 16"/>
+          <p:cNvSpPr/>
+          <p:nvPr/>
+        </p:nvSpPr>
+        <p:spPr>
+          <a:xfrm>
+            <a:off x="8686800" y="723900"/>
+            <a:ext cx="2762250" cy="5380863"/>
+          </a:xfrm>
+          <a:prstGeom prst="roundRect">
+            <a:avLst>
+              <a:gd name="adj" fmla="val 8200"/>
+            </a:avLst>
+          </a:prstGeom>
+          <a:solidFill>
+            <a:srgbClr val="1E2638"/>
+          </a:solidFill>
+          <a:ln w="9525">
+            <a:solidFill>
+              <a:srgbClr val="39445E"/>
+            </a:solidFill>
+            <a:prstDash val="solid"/>
+          </a:ln>
+          <a:effectLst>
+            <a:outerShdw sx="100000" sy="100000" kx="0" ky="0" algn="bl" rotWithShape="0" blurRad="381000" dist="152400" dir="5400000">
+              <a:srgbClr val="000000">
+                <a:alpha val="55000"/>
+              </a:srgbClr>
+            </a:outerShdw>
+          </a:effectLst>
+        </p:spPr>
+      </p:sp>
+      <p:pic>
+        <p:nvPicPr>
+          <p:cNvPr id="21" name="Image 2" descr="screen-storefront.png">    </p:cNvPr>
+          <p:cNvPicPr>
+            <a:picLocks noChangeAspect="1"/>
+          </p:cNvPicPr>
+          <p:nvPr/>
+        </p:nvPicPr>
+        <p:blipFill>
+          <a:blip r:embed="rId4"/>
+          <a:stretch>
+            <a:fillRect/>
+          </a:stretch>
+        </p:blipFill>
+        <p:spPr>
+          <a:xfrm>
+            <a:off x="8758619" y="795718"/>
+            <a:ext cx="2618613" cy="5237226"/>
+          </a:xfrm>
+          <a:prstGeom prst="rect">
+            <a:avLst/>
+          </a:prstGeom>
+        </p:spPr>
+      </p:pic>
+      <p:sp>
+        <p:nvSpPr>
+          <p:cNvPr id="22" name="Shape 17"/>
+          <p:cNvSpPr/>
+          <p:nvPr/>
+        </p:nvSpPr>
+        <p:spPr>
+          <a:xfrm>
+            <a:off x="6096000" y="3848100"/>
+            <a:ext cx="2857500" cy="1390650"/>
+          </a:xfrm>
+          <a:prstGeom prst="roundRect">
+            <a:avLst>
+              <a:gd name="adj" fmla="val 13699"/>
+            </a:avLst>
+          </a:prstGeom>
+          <a:solidFill>
+            <a:srgbClr val="FFFFFF"/>
+          </a:solidFill>
+          <a:ln w="12700">
+            <a:solidFill>
+              <a:srgbClr val="FFFFFF"/>
+            </a:solidFill>
+            <a:prstDash val="solid"/>
+          </a:ln>
+          <a:effectLst>
+            <a:outerShdw sx="100000" sy="100000" kx="0" ky="0" algn="bl" rotWithShape="0" blurRad="381000" dist="152400" dir="5400000">
+              <a:srgbClr val="000000">
+                <a:alpha val="50000"/>
+              </a:srgbClr>
+            </a:outerShdw>
+          </a:effectLst>
+        </p:spPr>
+      </p:sp>
+      <p:sp>
+        <p:nvSpPr>
+          <p:cNvPr id="23" name="Shape 18"/>
+          <p:cNvSpPr/>
+          <p:nvPr/>
+        </p:nvSpPr>
+        <p:spPr>
+          <a:xfrm>
+            <a:off x="6267450" y="4000500"/>
+            <a:ext cx="209550" cy="209550"/>
+          </a:xfrm>
+          <a:prstGeom prst="ellipse">
+            <a:avLst/>
+          </a:prstGeom>
+          <a:solidFill>
+            <a:srgbClr val="1F8A55"/>
+          </a:solidFill>
+          <a:ln w="12700">
+            <a:solidFill>
+              <a:srgbClr val="1F8A55"/>
+            </a:solidFill>
+            <a:prstDash val="solid"/>
+          </a:ln>
+        </p:spPr>
+      </p:sp>
+      <p:sp>
+        <p:nvSpPr>
+          <p:cNvPr id="24" name="Text 19"/>
+          <p:cNvSpPr txBox="1"/>
+          <p:nvPr/>
+        </p:nvSpPr>
+        <p:spPr>
+          <a:xfrm>
+            <a:off x="6267450" y="4000500"/>
+            <a:ext cx="209550" cy="209550"/>
+          </a:xfrm>
+          <a:prstGeom prst="rect">
+            <a:avLst/>
+          </a:prstGeom>
+          <a:noFill/>
+          <a:ln/>
+        </p:spPr>
+        <p:txBody>
+          <a:bodyPr wrap="square" lIns="0" tIns="0" rIns="0" bIns="0" rtlCol="0" anchor="ctr"/>
+          <a:lstStyle/>
+          <a:p>
+            <a:pPr algn="ctr" indent="0" marL="0">
+              <a:buNone/>
+            </a:pPr>
+            <a:r>
+              <a:rPr lang="en-US" sz="950" b="1" dirty="0">
                 <a:solidFill>
                   <a:srgbClr val="FFFFFF"/>
                 </a:solidFill>
-                <a:latin typeface="Calibri" pitchFamily="34" charset="0"/>
-                <a:ea typeface="Calibri" pitchFamily="34" charset="-122"/>
-                <a:cs typeface="Calibri" pitchFamily="34" charset="-120"/>
-              </a:rPr>
-              <a:t>Витрина</a:t>
-            </a:r>
-            <a:endParaRPr lang="en-US" sz="6000" dirty="0"/>
-          </a:p>
-        </p:txBody>
-      </p:sp>
-      <p:sp>
-        <p:nvSpPr>
-          <p:cNvPr id="5" name="Text 3"/>
-          <p:cNvSpPr txBox="1"/>
-          <p:nvPr/>
-        </p:nvSpPr>
-        <p:spPr>
-          <a:xfrm>
-            <a:off x="502920" y="3310128"/>
-            <a:ext cx="5669280" cy="777240"/>
-          </a:xfrm>
-          <a:prstGeom prst="rect">
-            <a:avLst/>
-          </a:prstGeom>
-          <a:noFill/>
-          <a:ln/>
-        </p:spPr>
-        <p:txBody>
-          <a:bodyPr wrap="square" lIns="0" tIns="0" rIns="0" bIns="0" rtlCol="0" anchor="ctr"/>
-          <a:lstStyle/>
-          <a:p>
-            <a:pPr indent="0" marL="0">
-              <a:lnSpc>
-                <a:spcPct val="115000"/>
-              </a:lnSpc>
-              <a:buNone/>
-            </a:pPr>
-            <a:r>
-              <a:rPr lang="en-US" sz="1600" dirty="0">
-                <a:solidFill>
-                  <a:srgbClr val="E4ECFF"/>
-                </a:solidFill>
-                <a:latin typeface="Calibri" pitchFamily="34" charset="0"/>
-                <a:ea typeface="Calibri" pitchFamily="34" charset="-122"/>
-                <a:cs typeface="Calibri" pitchFamily="34" charset="-120"/>
-              </a:rPr>
-              <a:t>Рабочий сервис записи в MAX из одного сообщения — без разработчика, без подрядчика, без ожидания.</a:t>
-            </a:r>
-            <a:endParaRPr lang="en-US" sz="1600" dirty="0"/>
-          </a:p>
-        </p:txBody>
-      </p:sp>
-      <p:sp>
-        <p:nvSpPr>
-          <p:cNvPr id="6" name="Text 4"/>
-          <p:cNvSpPr txBox="1"/>
-          <p:nvPr/>
-        </p:nvSpPr>
-        <p:spPr>
-          <a:xfrm>
-            <a:off x="502920" y="4343400"/>
-            <a:ext cx="2377440" cy="219456"/>
-          </a:xfrm>
-          <a:prstGeom prst="rect">
-            <a:avLst/>
-          </a:prstGeom>
-          <a:noFill/>
-          <a:ln/>
-        </p:spPr>
-        <p:txBody>
-          <a:bodyPr wrap="square" lIns="0" tIns="0" rIns="0" bIns="0" rtlCol="0" anchor="ctr"/>
-          <a:lstStyle/>
-          <a:p>
-            <a:pPr indent="0" marL="0">
-              <a:buNone/>
-            </a:pPr>
-            <a:r>
-              <a:rPr lang="en-US" sz="1000" b="1" spc="200" kern="0" dirty="0">
-                <a:solidFill>
-                  <a:srgbClr val="B9C8EE"/>
-                </a:solidFill>
-                <a:latin typeface="Calibri" pitchFamily="34" charset="0"/>
-                <a:ea typeface="Calibri" pitchFamily="34" charset="-122"/>
-                <a:cs typeface="Calibri" pitchFamily="34" charset="-120"/>
-              </a:rPr>
-              <a:t>КОМАНДА</a:t>
-            </a:r>
-            <a:endParaRPr lang="en-US" sz="1000" dirty="0"/>
-          </a:p>
-        </p:txBody>
-      </p:sp>
-      <p:sp>
-        <p:nvSpPr>
-          <p:cNvPr id="7" name="Text 5"/>
-          <p:cNvSpPr txBox="1"/>
-          <p:nvPr/>
-        </p:nvSpPr>
-        <p:spPr>
-          <a:xfrm>
-            <a:off x="502920" y="4572000"/>
-            <a:ext cx="2926080" cy="640080"/>
-          </a:xfrm>
-          <a:prstGeom prst="rect">
-            <a:avLst/>
-          </a:prstGeom>
-          <a:noFill/>
-          <a:ln/>
-        </p:spPr>
-        <p:txBody>
-          <a:bodyPr wrap="square" lIns="0" tIns="0" rIns="0" bIns="0" rtlCol="0" anchor="ctr"/>
-          <a:lstStyle/>
-          <a:p>
-            <a:pPr indent="0" marL="0">
-              <a:lnSpc>
-                <a:spcPct val="115000"/>
-              </a:lnSpc>
-              <a:buNone/>
-            </a:pPr>
-            <a:r>
-              <a:rPr lang="en-US" sz="1250" dirty="0">
+                <a:latin typeface="Segoe UI Symbol" pitchFamily="34" charset="0"/>
+                <a:ea typeface="Segoe UI Symbol" pitchFamily="34" charset="-122"/>
+                <a:cs typeface="Segoe UI Symbol" pitchFamily="34" charset="-120"/>
+              </a:rPr>
+              <a:t>✓</a:t>
+            </a:r>
+            <a:endParaRPr lang="en-US" sz="950" dirty="0"/>
+          </a:p>
+        </p:txBody>
+      </p:sp>
+      <p:sp>
+        <p:nvSpPr>
+          <p:cNvPr id="25" name="Text 20"/>
+          <p:cNvSpPr txBox="1"/>
+          <p:nvPr/>
+        </p:nvSpPr>
+        <p:spPr>
+          <a:xfrm>
+            <a:off x="6562725" y="3981450"/>
+            <a:ext cx="2190750" cy="247650"/>
+          </a:xfrm>
+          <a:prstGeom prst="rect">
+            <a:avLst/>
+          </a:prstGeom>
+          <a:noFill/>
+          <a:ln/>
+        </p:spPr>
+        <p:txBody>
+          <a:bodyPr wrap="square" lIns="0" tIns="0" rIns="0" bIns="0" rtlCol="0" anchor="ctr"/>
+          <a:lstStyle/>
+          <a:p>
+            <a:pPr indent="0" marL="0">
+              <a:buNone/>
+            </a:pPr>
+            <a:r>
+              <a:rPr lang="en-US" sz="1250" b="1" dirty="0">
+                <a:solidFill>
+                  <a:srgbClr val="0D1117"/>
+                </a:solidFill>
+                <a:latin typeface="Calibri" pitchFamily="34" charset="0"/>
+                <a:ea typeface="Calibri" pitchFamily="34" charset="-122"/>
+                <a:cs typeface="Calibri" pitchFamily="34" charset="-120"/>
+              </a:rPr>
+              <a:t>Витрина готова</a:t>
+            </a:r>
+            <a:endParaRPr lang="en-US" sz="1250" dirty="0"/>
+          </a:p>
+        </p:txBody>
+      </p:sp>
+      <p:sp>
+        <p:nvSpPr>
+          <p:cNvPr id="26" name="Text 21"/>
+          <p:cNvSpPr txBox="1"/>
+          <p:nvPr/>
+        </p:nvSpPr>
+        <p:spPr>
+          <a:xfrm>
+            <a:off x="6267450" y="4267200"/>
+            <a:ext cx="2514600" cy="381000"/>
+          </a:xfrm>
+          <a:prstGeom prst="rect">
+            <a:avLst/>
+          </a:prstGeom>
+          <a:noFill/>
+          <a:ln/>
+        </p:spPr>
+        <p:txBody>
+          <a:bodyPr wrap="square" lIns="0" tIns="0" rIns="0" bIns="0" rtlCol="0" anchor="t"/>
+          <a:lstStyle/>
+          <a:p>
+            <a:pPr indent="0" marL="0">
+              <a:lnSpc>
+                <a:spcPct val="108000"/>
+              </a:lnSpc>
+              <a:buNone/>
+            </a:pPr>
+            <a:r>
+              <a:rPr lang="en-US" sz="1050" dirty="0">
+                <a:solidFill>
+                  <a:srgbClr val="4A5464"/>
+                </a:solidFill>
+                <a:latin typeface="Calibri" pitchFamily="34" charset="0"/>
+                <a:ea typeface="Calibri" pitchFamily="34" charset="-122"/>
+                <a:cs typeface="Calibri" pitchFamily="34" charset="-120"/>
+              </a:rPr>
+              <a:t>Клиенты записываются по ссылке, заявки приходят сюда, в чат.</a:t>
+            </a:r>
+            <a:endParaRPr lang="en-US" sz="1050" dirty="0"/>
+          </a:p>
+        </p:txBody>
+      </p:sp>
+      <p:sp>
+        <p:nvSpPr>
+          <p:cNvPr id="27" name="Shape 22"/>
+          <p:cNvSpPr/>
+          <p:nvPr/>
+        </p:nvSpPr>
+        <p:spPr>
+          <a:xfrm>
+            <a:off x="6267450" y="4743450"/>
+            <a:ext cx="2514600" cy="352425"/>
+          </a:xfrm>
+          <a:prstGeom prst="roundRect">
+            <a:avLst>
+              <a:gd name="adj" fmla="val 29730"/>
+            </a:avLst>
+          </a:prstGeom>
+          <a:solidFill>
+            <a:srgbClr val="0077FF"/>
+          </a:solidFill>
+          <a:ln w="12700">
+            <a:solidFill>
+              <a:srgbClr val="0077FF"/>
+            </a:solidFill>
+            <a:prstDash val="solid"/>
+          </a:ln>
+        </p:spPr>
+      </p:sp>
+      <p:sp>
+        <p:nvSpPr>
+          <p:cNvPr id="28" name="Text 23"/>
+          <p:cNvSpPr txBox="1"/>
+          <p:nvPr/>
+        </p:nvSpPr>
+        <p:spPr>
+          <a:xfrm>
+            <a:off x="6267450" y="4743450"/>
+            <a:ext cx="2514600" cy="352425"/>
+          </a:xfrm>
+          <a:prstGeom prst="rect">
+            <a:avLst/>
+          </a:prstGeom>
+          <a:noFill/>
+          <a:ln/>
+        </p:spPr>
+        <p:txBody>
+          <a:bodyPr wrap="square" lIns="0" tIns="0" rIns="0" bIns="0" rtlCol="0" anchor="ctr"/>
+          <a:lstStyle/>
+          <a:p>
+            <a:pPr algn="ctr" indent="0" marL="0">
+              <a:buNone/>
+            </a:pPr>
+            <a:r>
+              <a:rPr lang="en-US" sz="1100" b="1" dirty="0">
                 <a:solidFill>
                   <a:srgbClr val="FFFFFF"/>
                 </a:solidFill>
@@ -9101,136 +10737,15 @@
                 <a:ea typeface="Calibri" pitchFamily="34" charset="-122"/>
                 <a:cs typeface="Calibri" pitchFamily="34" charset="-120"/>
               </a:rPr>
-              <a:t>ЗАПОЛНИТЬ: название</a:t>
-            </a:r>
-            <a:endParaRPr lang="en-US" sz="1250" dirty="0"/>
-          </a:p>
-          <a:p>
-            <a:pPr indent="0" marL="0">
-              <a:lnSpc>
-                <a:spcPct val="115000"/>
-              </a:lnSpc>
-              <a:buNone/>
-            </a:pPr>
-            <a:r>
-              <a:rPr lang="en-US" sz="1250" dirty="0">
-                <a:solidFill>
-                  <a:srgbClr val="FFFFFF"/>
-                </a:solidFill>
-                <a:latin typeface="Calibri" pitchFamily="34" charset="0"/>
-                <a:ea typeface="Calibri" pitchFamily="34" charset="-122"/>
-                <a:cs typeface="Calibri" pitchFamily="34" charset="-120"/>
-              </a:rPr>
-              <a:t>ЗАПОЛНИТЬ: участники и роли</a:t>
-            </a:r>
-            <a:endParaRPr lang="en-US" sz="1250" dirty="0"/>
-          </a:p>
-        </p:txBody>
-      </p:sp>
-      <p:sp>
-        <p:nvSpPr>
-          <p:cNvPr id="8" name="Text 6"/>
-          <p:cNvSpPr txBox="1"/>
-          <p:nvPr/>
-        </p:nvSpPr>
-        <p:spPr>
-          <a:xfrm>
-            <a:off x="3794760" y="4343400"/>
-            <a:ext cx="2743200" cy="219456"/>
-          </a:xfrm>
-          <a:prstGeom prst="rect">
-            <a:avLst/>
-          </a:prstGeom>
-          <a:noFill/>
-          <a:ln/>
-        </p:spPr>
-        <p:txBody>
-          <a:bodyPr wrap="square" lIns="0" tIns="0" rIns="0" bIns="0" rtlCol="0" anchor="ctr"/>
-          <a:lstStyle/>
-          <a:p>
-            <a:pPr indent="0" marL="0">
-              <a:buNone/>
-            </a:pPr>
-            <a:r>
-              <a:rPr lang="en-US" sz="1000" b="1" spc="200" kern="0" dirty="0">
-                <a:solidFill>
-                  <a:srgbClr val="B9C8EE"/>
-                </a:solidFill>
-                <a:latin typeface="Calibri" pitchFamily="34" charset="0"/>
-                <a:ea typeface="Calibri" pitchFamily="34" charset="-122"/>
-                <a:cs typeface="Calibri" pitchFamily="34" charset="-120"/>
-              </a:rPr>
-              <a:t>ПЛАТФОРМА</a:t>
-            </a:r>
-            <a:endParaRPr lang="en-US" sz="1000" dirty="0"/>
-          </a:p>
-        </p:txBody>
-      </p:sp>
-      <p:sp>
-        <p:nvSpPr>
-          <p:cNvPr id="9" name="Text 7"/>
-          <p:cNvSpPr txBox="1"/>
-          <p:nvPr/>
-        </p:nvSpPr>
-        <p:spPr>
-          <a:xfrm>
-            <a:off x="3794760" y="4572000"/>
-            <a:ext cx="3291840" cy="640080"/>
-          </a:xfrm>
-          <a:prstGeom prst="rect">
-            <a:avLst/>
-          </a:prstGeom>
-          <a:noFill/>
-          <a:ln/>
-        </p:spPr>
-        <p:txBody>
-          <a:bodyPr wrap="square" lIns="0" tIns="0" rIns="0" bIns="0" rtlCol="0" anchor="ctr"/>
-          <a:lstStyle/>
-          <a:p>
-            <a:pPr indent="0" marL="0">
-              <a:lnSpc>
-                <a:spcPct val="115000"/>
-              </a:lnSpc>
-              <a:buNone/>
-            </a:pPr>
-            <a:r>
-              <a:rPr lang="en-US" sz="1250" dirty="0">
-                <a:solidFill>
-                  <a:srgbClr val="FFFFFF"/>
-                </a:solidFill>
-                <a:latin typeface="Calibri" pitchFamily="34" charset="0"/>
-                <a:ea typeface="Calibri" pitchFamily="34" charset="-122"/>
-                <a:cs typeface="Calibri" pitchFamily="34" charset="-120"/>
-              </a:rPr>
-              <a:t>Чат-бот + мини-приложение</a:t>
-            </a:r>
-            <a:endParaRPr lang="en-US" sz="1250" dirty="0"/>
-          </a:p>
-          <a:p>
-            <a:pPr indent="0" marL="0">
-              <a:lnSpc>
-                <a:spcPct val="115000"/>
-              </a:lnSpc>
-              <a:buNone/>
-            </a:pPr>
-            <a:r>
-              <a:rPr lang="en-US" sz="1250" dirty="0">
-                <a:solidFill>
-                  <a:srgbClr val="FFFFFF"/>
-                </a:solidFill>
-                <a:latin typeface="Calibri" pitchFamily="34" charset="0"/>
-                <a:ea typeface="Calibri" pitchFamily="34" charset="-122"/>
-                <a:cs typeface="Calibri" pitchFamily="34" charset="-120"/>
-              </a:rPr>
-              <a:t>@t403_hakaton_max_bot</a:t>
-            </a:r>
-            <a:endParaRPr lang="en-US" sz="1250" dirty="0"/>
-          </a:p>
-        </p:txBody>
-      </p:sp>
-      <p:sp>
-        <p:nvSpPr>
-          <p:cNvPr id="10" name="Text 8"/>
+              <a:t>Открыть витрину</a:t>
+            </a:r>
+            <a:endParaRPr lang="en-US" sz="1100" dirty="0"/>
+          </a:p>
+        </p:txBody>
+      </p:sp>
+      <p:sp>
+        <p:nvSpPr>
+          <p:cNvPr id="29" name="Text 24"/>
           <p:cNvSpPr txBox="1"/>
           <p:nvPr/>
         </p:nvSpPr>
@@ -9261,35 +10776,7 @@
                 <a:ea typeface="Calibri" pitchFamily="34" charset="-122"/>
                 <a:cs typeface="Calibri" pitchFamily="34" charset="-120"/>
               </a:rPr>
-              <a:t>AIRUNTIME</a:t>
-            </a:r>
-            <a:pPr indent="0" marL="0">
-              <a:buNone/>
-            </a:pPr>
-            <a:r>
-              <a:rPr lang="en-US" sz="1000" spc="120" kern="0" dirty="0">
-                <a:solidFill>
-                  <a:srgbClr val="5C6B84"/>
-                </a:solidFill>
-                <a:latin typeface="Calibri" pitchFamily="34" charset="0"/>
-                <a:ea typeface="Calibri" pitchFamily="34" charset="-122"/>
-                <a:cs typeface="Calibri" pitchFamily="34" charset="-120"/>
-              </a:rPr>
-              <a:t>  ×  </a:t>
-            </a:r>
-            <a:pPr indent="0" marL="0">
-              <a:buNone/>
-            </a:pPr>
-            <a:r>
-              <a:rPr lang="en-US" sz="1000" b="1" spc="120" kern="0" dirty="0">
-                <a:solidFill>
-                  <a:srgbClr val="8193AE"/>
-                </a:solidFill>
-                <a:latin typeface="Calibri" pitchFamily="34" charset="0"/>
-                <a:ea typeface="Calibri" pitchFamily="34" charset="-122"/>
-                <a:cs typeface="Calibri" pitchFamily="34" charset="-120"/>
-              </a:rPr>
-              <a:t>MAX</a:t>
+              <a:t>ХАКАТОН MAX  ·  2026</a:t>
             </a:r>
             <a:endParaRPr lang="en-US" sz="1000" dirty="0"/>
           </a:p>
@@ -9297,7 +10784,7 @@
       </p:sp>
       <p:sp>
         <p:nvSpPr>
-          <p:cNvPr id="11" name="Text 9"/>
+          <p:cNvPr id="30" name="Text 25"/>
           <p:cNvSpPr txBox="1"/>
           <p:nvPr/>
         </p:nvSpPr>
@@ -13868,9 +15355,43 @@
           </a:p>
         </p:txBody>
       </p:sp>
+      <p:sp>
+        <p:nvSpPr>
+          <p:cNvPr id="4" name="Shape 2"/>
+          <p:cNvSpPr/>
+          <p:nvPr/>
+        </p:nvSpPr>
+        <p:spPr>
+          <a:xfrm>
+            <a:off x="1226820" y="1371600"/>
+            <a:ext cx="1975104" cy="3847503"/>
+          </a:xfrm>
+          <a:prstGeom prst="roundRect">
+            <a:avLst>
+              <a:gd name="adj" fmla="val 8200"/>
+            </a:avLst>
+          </a:prstGeom>
+          <a:solidFill>
+            <a:srgbClr val="DCE3EE"/>
+          </a:solidFill>
+          <a:ln w="9525">
+            <a:solidFill>
+              <a:srgbClr val="CCD5E3"/>
+            </a:solidFill>
+            <a:prstDash val="solid"/>
+          </a:ln>
+          <a:effectLst>
+            <a:outerShdw sx="100000" sy="100000" kx="0" ky="0" algn="bl" rotWithShape="0" blurRad="203200" dist="76200" dir="5400000">
+              <a:srgbClr val="091228">
+                <a:alpha val="20000"/>
+              </a:srgbClr>
+            </a:outerShdw>
+          </a:effectLst>
+        </p:spPr>
+      </p:sp>
       <p:pic>
         <p:nvPicPr>
-          <p:cNvPr id="4" name="Image 0" descr="shot-storefront.png">    </p:cNvPr>
+          <p:cNvPr id="5" name="Image 0" descr="screen-storefront.png">    </p:cNvPr>
           <p:cNvPicPr>
             <a:picLocks noChangeAspect="1"/>
           </p:cNvPicPr>
@@ -13884,8 +15405,8 @@
         </p:blipFill>
         <p:spPr>
           <a:xfrm>
-            <a:off x="1277112" y="1280160"/>
-            <a:ext cx="1874520" cy="3749040"/>
+            <a:off x="1278173" y="1422953"/>
+            <a:ext cx="1872399" cy="3744797"/>
           </a:xfrm>
           <a:prstGeom prst="rect">
             <a:avLst/>
@@ -13894,13 +15415,13 @@
       </p:pic>
       <p:sp>
         <p:nvSpPr>
-          <p:cNvPr id="5" name="Text 2"/>
-          <p:cNvSpPr txBox="1"/>
-          <p:nvPr/>
-        </p:nvSpPr>
-        <p:spPr>
-          <a:xfrm>
-            <a:off x="502920" y="5166360"/>
+          <p:cNvPr id="6" name="Text 3"/>
+          <p:cNvSpPr txBox="1"/>
+          <p:nvPr/>
+        </p:nvSpPr>
+        <p:spPr>
+          <a:xfrm>
+            <a:off x="502920" y="5383695"/>
             <a:ext cx="3422904" cy="274320"/>
           </a:xfrm>
           <a:prstGeom prst="rect">
@@ -13933,28 +15454,28 @@
       </p:sp>
       <p:sp>
         <p:nvSpPr>
-          <p:cNvPr id="6" name="Text 3"/>
-          <p:cNvSpPr txBox="1"/>
-          <p:nvPr/>
-        </p:nvSpPr>
-        <p:spPr>
-          <a:xfrm>
-            <a:off x="502920" y="5468112"/>
-            <a:ext cx="3422904" cy="640080"/>
-          </a:xfrm>
-          <a:prstGeom prst="rect">
-            <a:avLst/>
-          </a:prstGeom>
-          <a:noFill/>
-          <a:ln/>
-        </p:spPr>
-        <p:txBody>
-          <a:bodyPr wrap="square" lIns="0" tIns="0" rIns="0" bIns="0" rtlCol="0" anchor="ctr"/>
+          <p:cNvPr id="7" name="Text 4"/>
+          <p:cNvSpPr txBox="1"/>
+          <p:nvPr/>
+        </p:nvSpPr>
+        <p:spPr>
+          <a:xfrm>
+            <a:off x="502920" y="5676303"/>
+            <a:ext cx="3422904" cy="457200"/>
+          </a:xfrm>
+          <a:prstGeom prst="rect">
+            <a:avLst/>
+          </a:prstGeom>
+          <a:noFill/>
+          <a:ln/>
+        </p:spPr>
+        <p:txBody>
+          <a:bodyPr wrap="square" lIns="0" tIns="0" rIns="0" bIns="0" rtlCol="0" anchor="t"/>
           <a:lstStyle/>
           <a:p>
             <a:pPr algn="ctr" indent="0" marL="0">
               <a:lnSpc>
-                <a:spcPct val="112000"/>
+                <a:spcPct val="110000"/>
               </a:lnSpc>
               <a:buNone/>
             </a:pPr>
@@ -13967,15 +15488,49 @@
                 <a:ea typeface="Calibri" pitchFamily="34" charset="-122"/>
                 <a:cs typeface="Calibri" pitchFamily="34" charset="-120"/>
               </a:rPr>
-              <a:t>Услуги с ценами и длительностью. Адрес и часы — в шапке.</a:t>
+              <a:t>Услуги с ценами и длительностью, ближайшие слоты. Имя подставляется из профиля MAX.</a:t>
             </a:r>
             <a:endParaRPr lang="en-US" sz="1100" dirty="0"/>
           </a:p>
         </p:txBody>
+      </p:sp>
+      <p:sp>
+        <p:nvSpPr>
+          <p:cNvPr id="8" name="Shape 5"/>
+          <p:cNvSpPr/>
+          <p:nvPr/>
+        </p:nvSpPr>
+        <p:spPr>
+          <a:xfrm>
+            <a:off x="5106924" y="1371600"/>
+            <a:ext cx="1975104" cy="3847503"/>
+          </a:xfrm>
+          <a:prstGeom prst="roundRect">
+            <a:avLst>
+              <a:gd name="adj" fmla="val 8200"/>
+            </a:avLst>
+          </a:prstGeom>
+          <a:solidFill>
+            <a:srgbClr val="DCE3EE"/>
+          </a:solidFill>
+          <a:ln w="9525">
+            <a:solidFill>
+              <a:srgbClr val="CCD5E3"/>
+            </a:solidFill>
+            <a:prstDash val="solid"/>
+          </a:ln>
+          <a:effectLst>
+            <a:outerShdw sx="100000" sy="100000" kx="0" ky="0" algn="bl" rotWithShape="0" blurRad="203200" dist="76200" dir="5400000">
+              <a:srgbClr val="091228">
+                <a:alpha val="20000"/>
+              </a:srgbClr>
+            </a:outerShdw>
+          </a:effectLst>
+        </p:spPr>
       </p:sp>
       <p:pic>
         <p:nvPicPr>
-          <p:cNvPr id="7" name="Image 1" descr="shot-booking.png">    </p:cNvPr>
+          <p:cNvPr id="9" name="Image 1" descr="screen-booking.png">    </p:cNvPr>
           <p:cNvPicPr>
             <a:picLocks noChangeAspect="1"/>
           </p:cNvPicPr>
@@ -13989,8 +15544,8 @@
         </p:blipFill>
         <p:spPr>
           <a:xfrm>
-            <a:off x="5157216" y="1280160"/>
-            <a:ext cx="1874520" cy="3749040"/>
+            <a:off x="5158277" y="1422953"/>
+            <a:ext cx="1872399" cy="3744797"/>
           </a:xfrm>
           <a:prstGeom prst="rect">
             <a:avLst/>
@@ -13999,13 +15554,13 @@
       </p:pic>
       <p:sp>
         <p:nvSpPr>
-          <p:cNvPr id="8" name="Text 4"/>
-          <p:cNvSpPr txBox="1"/>
-          <p:nvPr/>
-        </p:nvSpPr>
-        <p:spPr>
-          <a:xfrm>
-            <a:off x="4383024" y="5166360"/>
+          <p:cNvPr id="10" name="Text 6"/>
+          <p:cNvSpPr txBox="1"/>
+          <p:nvPr/>
+        </p:nvSpPr>
+        <p:spPr>
+          <a:xfrm>
+            <a:off x="4383024" y="5383695"/>
             <a:ext cx="3422904" cy="274320"/>
           </a:xfrm>
           <a:prstGeom prst="rect">
@@ -14038,28 +15593,28 @@
       </p:sp>
       <p:sp>
         <p:nvSpPr>
-          <p:cNvPr id="9" name="Text 5"/>
-          <p:cNvSpPr txBox="1"/>
-          <p:nvPr/>
-        </p:nvSpPr>
-        <p:spPr>
-          <a:xfrm>
-            <a:off x="4383024" y="5468112"/>
-            <a:ext cx="3422904" cy="640080"/>
-          </a:xfrm>
-          <a:prstGeom prst="rect">
-            <a:avLst/>
-          </a:prstGeom>
-          <a:noFill/>
-          <a:ln/>
-        </p:spPr>
-        <p:txBody>
-          <a:bodyPr wrap="square" lIns="0" tIns="0" rIns="0" bIns="0" rtlCol="0" anchor="ctr"/>
+          <p:cNvPr id="11" name="Text 7"/>
+          <p:cNvSpPr txBox="1"/>
+          <p:nvPr/>
+        </p:nvSpPr>
+        <p:spPr>
+          <a:xfrm>
+            <a:off x="4383024" y="5676303"/>
+            <a:ext cx="3422904" cy="457200"/>
+          </a:xfrm>
+          <a:prstGeom prst="rect">
+            <a:avLst/>
+          </a:prstGeom>
+          <a:noFill/>
+          <a:ln/>
+        </p:spPr>
+        <p:txBody>
+          <a:bodyPr wrap="square" lIns="0" tIns="0" rIns="0" bIns="0" rtlCol="0" anchor="t"/>
           <a:lstStyle/>
           <a:p>
             <a:pPr algn="ctr" indent="0" marL="0">
               <a:lnSpc>
-                <a:spcPct val="112000"/>
+                <a:spcPct val="110000"/>
               </a:lnSpc>
               <a:buNone/>
             </a:pPr>
@@ -14072,15 +15627,49 @@
                 <a:ea typeface="Calibri" pitchFamily="34" charset="-122"/>
                 <a:cs typeface="Calibri" pitchFamily="34" charset="-120"/>
               </a:rPr>
-              <a:t>Телефон берётся из MAX по кнопке. Внизу видно, что именно бронируется.</a:t>
+              <a:t>Телефон берётся из MAX по кнопке — вводить ничего не нужно. Кнопка действия закреплена внизу.</a:t>
             </a:r>
             <a:endParaRPr lang="en-US" sz="1100" dirty="0"/>
           </a:p>
         </p:txBody>
+      </p:sp>
+      <p:sp>
+        <p:nvSpPr>
+          <p:cNvPr id="12" name="Shape 8"/>
+          <p:cNvSpPr/>
+          <p:nvPr/>
+        </p:nvSpPr>
+        <p:spPr>
+          <a:xfrm>
+            <a:off x="8987028" y="1371600"/>
+            <a:ext cx="1975104" cy="3847503"/>
+          </a:xfrm>
+          <a:prstGeom prst="roundRect">
+            <a:avLst>
+              <a:gd name="adj" fmla="val 8200"/>
+            </a:avLst>
+          </a:prstGeom>
+          <a:solidFill>
+            <a:srgbClr val="DCE3EE"/>
+          </a:solidFill>
+          <a:ln w="9525">
+            <a:solidFill>
+              <a:srgbClr val="CCD5E3"/>
+            </a:solidFill>
+            <a:prstDash val="solid"/>
+          </a:ln>
+          <a:effectLst>
+            <a:outerShdw sx="100000" sy="100000" kx="0" ky="0" algn="bl" rotWithShape="0" blurRad="203200" dist="76200" dir="5400000">
+              <a:srgbClr val="091228">
+                <a:alpha val="20000"/>
+              </a:srgbClr>
+            </a:outerShdw>
+          </a:effectLst>
+        </p:spPr>
       </p:sp>
       <p:pic>
         <p:nvPicPr>
-          <p:cNvPr id="10" name="Image 2" descr="shot-owner.png">    </p:cNvPr>
+          <p:cNvPr id="13" name="Image 2" descr="screen-owner.png">    </p:cNvPr>
           <p:cNvPicPr>
             <a:picLocks noChangeAspect="1"/>
           </p:cNvPicPr>
@@ -14094,8 +15683,8 @@
         </p:blipFill>
         <p:spPr>
           <a:xfrm>
-            <a:off x="9037320" y="1280160"/>
-            <a:ext cx="1874520" cy="3749040"/>
+            <a:off x="9038381" y="1422953"/>
+            <a:ext cx="1872399" cy="3744797"/>
           </a:xfrm>
           <a:prstGeom prst="rect">
             <a:avLst/>
@@ -14104,13 +15693,13 @@
       </p:pic>
       <p:sp>
         <p:nvSpPr>
-          <p:cNvPr id="11" name="Text 6"/>
-          <p:cNvSpPr txBox="1"/>
-          <p:nvPr/>
-        </p:nvSpPr>
-        <p:spPr>
-          <a:xfrm>
-            <a:off x="8263128" y="5166360"/>
+          <p:cNvPr id="14" name="Text 9"/>
+          <p:cNvSpPr txBox="1"/>
+          <p:nvPr/>
+        </p:nvSpPr>
+        <p:spPr>
+          <a:xfrm>
+            <a:off x="8263128" y="5383695"/>
             <a:ext cx="3422904" cy="274320"/>
           </a:xfrm>
           <a:prstGeom prst="rect">
@@ -14143,28 +15732,28 @@
       </p:sp>
       <p:sp>
         <p:nvSpPr>
-          <p:cNvPr id="12" name="Text 7"/>
-          <p:cNvSpPr txBox="1"/>
-          <p:nvPr/>
-        </p:nvSpPr>
-        <p:spPr>
-          <a:xfrm>
-            <a:off x="8263128" y="5468112"/>
-            <a:ext cx="3422904" cy="640080"/>
-          </a:xfrm>
-          <a:prstGeom prst="rect">
-            <a:avLst/>
-          </a:prstGeom>
-          <a:noFill/>
-          <a:ln/>
-        </p:spPr>
-        <p:txBody>
-          <a:bodyPr wrap="square" lIns="0" tIns="0" rIns="0" bIns="0" rtlCol="0" anchor="ctr"/>
+          <p:cNvPr id="15" name="Text 10"/>
+          <p:cNvSpPr txBox="1"/>
+          <p:nvPr/>
+        </p:nvSpPr>
+        <p:spPr>
+          <a:xfrm>
+            <a:off x="8263128" y="5676303"/>
+            <a:ext cx="3422904" cy="457200"/>
+          </a:xfrm>
+          <a:prstGeom prst="rect">
+            <a:avLst/>
+          </a:prstGeom>
+          <a:noFill/>
+          <a:ln/>
+        </p:spPr>
+        <p:txBody>
+          <a:bodyPr wrap="square" lIns="0" tIns="0" rIns="0" bIns="0" rtlCol="0" anchor="t"/>
           <a:lstStyle/>
           <a:p>
             <a:pPr algn="ctr" indent="0" marL="0">
               <a:lnSpc>
-                <a:spcPct val="112000"/>
+                <a:spcPct val="110000"/>
               </a:lnSpc>
               <a:buNone/>
             </a:pPr>
@@ -14177,7 +15766,7 @@
                 <a:ea typeface="Calibri" pitchFamily="34" charset="-122"/>
                 <a:cs typeface="Calibri" pitchFamily="34" charset="-120"/>
               </a:rPr>
-              <a:t>Заявка приходит владельцу в чат и в кабинет. Подтверждение — одна кнопка.</a:t>
+              <a:t>Заявка приходит владельцу в чат и в кабинет. Подтверждение — одна кнопка, клиент узнаёт в MAX.</a:t>
             </a:r>
             <a:endParaRPr lang="en-US" sz="1100" dirty="0"/>
           </a:p>
@@ -14185,7 +15774,7 @@
       </p:sp>
       <p:sp>
         <p:nvSpPr>
-          <p:cNvPr id="13" name="Text 8"/>
+          <p:cNvPr id="16" name="Text 11"/>
           <p:cNvSpPr txBox="1"/>
           <p:nvPr/>
         </p:nvSpPr>
@@ -14252,7 +15841,7 @@
       </p:sp>
       <p:sp>
         <p:nvSpPr>
-          <p:cNvPr id="14" name="Text 9"/>
+          <p:cNvPr id="17" name="Text 12"/>
           <p:cNvSpPr txBox="1"/>
           <p:nvPr/>
         </p:nvSpPr>

--- a/docs/max-presentation/presentation.pptx
+++ b/docs/max-presentation/presentation.pptx
@@ -2991,7 +2991,7 @@
                 <a:ea typeface="Calibri" pitchFamily="34" charset="-122"/>
                 <a:cs typeface="Calibri" pitchFamily="34" charset="-120"/>
               </a:rPr>
-              <a:t>Открыть max.ru/t403_hakaton_max_bot и нажать «Начать»</a:t>
+              <a:t>Открыть max.ru/t403_hakaton_max_bot, нажать «Начать», затем «Открыть Витрину»</a:t>
             </a:r>
             <a:endParaRPr lang="en-US" sz="1250" dirty="0"/>
           </a:p>
@@ -3015,7 +3015,7 @@
                 <a:ea typeface="Calibri" pitchFamily="34" charset="-122"/>
                 <a:cs typeface="Calibri" pitchFamily="34" charset="-120"/>
               </a:rPr>
-              <a:t>Отправить одним сообщением: «Автосервис на Лесной. Диагностика 1500, замена масла 900, шиномонтаж 2400. Работаем с 9 до 20»</a:t>
+              <a:t>В мини-приложении описать бизнес одним сообщением: «Автосервис на Лесной. Диагностика 1500, замена масла 900, шиномонтаж 2400. Работаем с 9 до 20» — и нажать «Собрать витрину»</a:t>
             </a:r>
             <a:endParaRPr lang="en-US" sz="1250" dirty="0"/>
           </a:p>
@@ -3039,7 +3039,7 @@
                 <a:ea typeface="Calibri" pitchFamily="34" charset="-122"/>
                 <a:cs typeface="Calibri" pitchFamily="34" charset="-120"/>
               </a:rPr>
-              <a:t>Бот вернёт карточку витрины, кнопку «Открыть витрину» и ссылку для клиентов</a:t>
+              <a:t>Через несколько секунд витрина опубликована: ссылка для клиентов, «Поделиться», «Посмотреть»</a:t>
             </a:r>
             <a:endParaRPr lang="en-US" sz="1250" dirty="0"/>
           </a:p>
@@ -3111,7 +3111,7 @@
                 <a:ea typeface="Calibri" pitchFamily="34" charset="-122"/>
                 <a:cs typeface="Calibri" pitchFamily="34" charset="-120"/>
               </a:rPr>
-              <a:t>Заявка придёт в чат владельца с кнопками «Подтвердить» / «Отклонить»</a:t>
+              <a:t>Владельцу в чат с ботом придёт заявка с кнопкой «Открыть заявки»</a:t>
             </a:r>
             <a:endParaRPr lang="en-US" sz="1250" dirty="0"/>
           </a:p>
@@ -3135,7 +3135,7 @@
                 <a:ea typeface="Calibri" pitchFamily="34" charset="-122"/>
                 <a:cs typeface="Calibri" pitchFamily="34" charset="-120"/>
               </a:rPr>
-              <a:t>Нажать «Подтвердить» — клиенту придёт уведомление в MAX</a:t>
+              <a:t>Нажать «Подтвердить» в приложении — клиенту придёт уведомление в MAX</a:t>
             </a:r>
             <a:endParaRPr lang="en-US" sz="1250" dirty="0"/>
           </a:p>
@@ -3910,7 +3910,7 @@
                 <a:ea typeface="Calibri" pitchFamily="34" charset="-122"/>
                 <a:cs typeface="Calibri" pitchFamily="34" charset="-120"/>
               </a:rPr>
-              <a:t>Inline-клавиатуры</a:t>
+              <a:t>shareMaxContent()</a:t>
             </a:r>
             <a:pPr indent="0" marL="0">
               <a:lnSpc>
@@ -3945,7 +3945,7 @@
                 <a:ea typeface="Calibri" pitchFamily="34" charset="-122"/>
                 <a:cs typeface="Calibri" pitchFamily="34" charset="-120"/>
               </a:rPr>
-              <a:t>Подтверждение и отклонение заявки — callback-кнопки прямо под сообщением.</a:t>
+              <a:t>«Поделиться» открывает родной экран MAX «Отправить в чат» — ссылка уходит клиентам, не выходя из мессенджера.</a:t>
             </a:r>
             <a:endParaRPr lang="en-US" sz="1500" dirty="0"/>
           </a:p>
@@ -4595,7 +4595,7 @@
                 <a:ea typeface="Calibri" pitchFamily="34" charset="-122"/>
                 <a:cs typeface="Calibri" pitchFamily="34" charset="-120"/>
               </a:rPr>
-              <a:t>Описание бизнеса — вводит сам владелец в чате</a:t>
+              <a:t>Описание бизнеса — вводит сам владелец в мини-приложении</a:t>
             </a:r>
             <a:endParaRPr lang="en-US" sz="1250" dirty="0"/>
           </a:p>
@@ -8081,7 +8081,7 @@
                 <a:ea typeface="Calibri" pitchFamily="34" charset="-122"/>
                 <a:cs typeface="Calibri" pitchFamily="34" charset="-120"/>
               </a:rPr>
-              <a:t>сквозной путь «одно сообщение → заявка в чате владельца» проходит целиком и покрыт 30 автотестами, включая попытки подделать подпись стартовых параметров, подставить чужой токен, переиспользовать просроченные параметры и записаться на услугу, которой в витрине нет.</a:t>
+              <a:t>сквозной путь «одно сообщение → заявка в чате владельца» проходит целиком и покрыт 54 автотестами, включая попытки подделать подпись стартовых параметров, подставить чужой токен, переиспользовать просроченные параметры и записаться на услугу, которой в витрине нет.</a:t>
             </a:r>
             <a:endParaRPr lang="en-US" sz="1200" dirty="0"/>
           </a:p>
@@ -10368,7 +10368,7 @@
                 <a:ea typeface="Calibri" pitchFamily="34" charset="-122"/>
                 <a:cs typeface="Calibri" pitchFamily="34" charset="-120"/>
               </a:rPr>
-              <a:t>ВЛАДЕЛЕЦ ПИШЕТ БОТУ</a:t>
+              <a:t>ВЛАДЕЛЕЦ ОПИСЫВАЕТ БИЗНЕС</a:t>
             </a:r>
             <a:endParaRPr lang="en-US" sz="825" dirty="0"/>
           </a:p>
@@ -10671,7 +10671,7 @@
                 <a:ea typeface="Calibri" pitchFamily="34" charset="-122"/>
                 <a:cs typeface="Calibri" pitchFamily="34" charset="-120"/>
               </a:rPr>
-              <a:t>Клиенты записываются по ссылке, заявки приходят сюда, в чат.</a:t>
+              <a:t>Клиенты записываются по ссылке, заявки приходят в чат с ботом.</a:t>
             </a:r>
             <a:endParaRPr lang="en-US" sz="1050" dirty="0"/>
           </a:p>
@@ -10737,7 +10737,7 @@
                 <a:ea typeface="Calibri" pitchFamily="34" charset="-122"/>
                 <a:cs typeface="Calibri" pitchFamily="34" charset="-120"/>
               </a:rPr>
-              <a:t>Открыть витрину</a:t>
+              <a:t>Поделиться ссылкой</a:t>
             </a:r>
             <a:endParaRPr lang="en-US" sz="1100" dirty="0"/>
           </a:p>
@@ -10967,7 +10967,7 @@
                 <a:ea typeface="Calibri" pitchFamily="34" charset="-122"/>
                 <a:cs typeface="Calibri" pitchFamily="34" charset="-120"/>
               </a:rPr>
-              <a:t>Микробизнес услуг ведёт запись руками — в личных сообщениях и по телефону. Витрина превращает одно сообщение в чат-боте MAX в работающую витрину с онлайн-записью, которую клиенты открывают прямо в MAX. Заявки возвращаются владельцу в тот же чат.</a:t>
+              <a:t>Микробизнес услуг ведёт запись руками — в личных сообщениях и по телефону. Витрина превращает одно сообщение в мини-приложении MAX в работающую витрину с онлайн-записью, которую клиенты открывают прямо в MAX. Заявки приходят владельцу в чат с ботом.</a:t>
             </a:r>
             <a:endParaRPr lang="en-US" sz="1500" dirty="0"/>
           </a:p>
@@ -14210,7 +14210,7 @@
                 <a:ea typeface="Calibri" pitchFamily="34" charset="-122"/>
                 <a:cs typeface="Calibri" pitchFamily="34" charset="-120"/>
               </a:rPr>
-              <a:t>Находит @t403_hakaton_max_bot в MAX и нажимает «Начать». Регистрации нет — аккаунт MAX и есть вход.</a:t>
+              <a:t>Находит @t403_hakaton_max_bot и нажимает «Начать» — в ответ одна кнопка «Открыть Витрину». Регистрации нет.</a:t>
             </a:r>
             <a:endParaRPr lang="en-US" sz="1150" dirty="0"/>
           </a:p>
@@ -14389,7 +14389,7 @@
                 <a:ea typeface="Calibri" pitchFamily="34" charset="-122"/>
                 <a:cs typeface="Calibri" pitchFamily="34" charset="-120"/>
               </a:rPr>
-              <a:t>Обычными словами, одним сообщением: название, услуги, цены, часы работы. Никаких форм и полей.</a:t>
+              <a:t>Обычными словами, одним сообщением прямо в мини-приложении: название, услуги, цены, часы работы.</a:t>
             </a:r>
             <a:endParaRPr lang="en-US" sz="1150" dirty="0"/>
           </a:p>
@@ -14568,7 +14568,7 @@
                 <a:ea typeface="Calibri" pitchFamily="34" charset="-122"/>
                 <a:cs typeface="Calibri" pitchFamily="34" charset="-120"/>
               </a:rPr>
-              <a:t>Через несколько секунд — карточка с составом витрины, кнопка «Открыть витрину» и ссылка для клиентов.</a:t>
+              <a:t>Через несколько секунд витрина опубликована: ссылка для клиентов, «Поделиться» в чаты MAX и просмотр глазами клиента.</a:t>
             </a:r>
             <a:endParaRPr lang="en-US" sz="1150" dirty="0"/>
           </a:p>
@@ -14747,7 +14747,7 @@
                 <a:ea typeface="Calibri" pitchFamily="34" charset="-122"/>
                 <a:cs typeface="Calibri" pitchFamily="34" charset="-120"/>
               </a:rPr>
-              <a:t>«Добавь развал-схождение 3000», «убери слоты на завтра» — правка тем же способом, что и создание.</a:t>
+              <a:t>«Добавь развал-схождение 3000», «убери слоты на завтра» — правка тем же способом, что и создание. Ссылка не меняется.</a:t>
             </a:r>
             <a:endParaRPr lang="en-US" sz="1150" dirty="0"/>
           </a:p>
@@ -14820,7 +14820,7 @@
                 <a:ea typeface="Calibri" pitchFamily="34" charset="-122"/>
                 <a:cs typeface="Calibri" pitchFamily="34" charset="-120"/>
               </a:rPr>
-              <a:t>Что уходит владельцу в чат</a:t>
+              <a:t>Что приходит владельцу в чат</a:t>
             </a:r>
             <a:endParaRPr lang="en-US" sz="1400" dirty="0"/>
           </a:p>
@@ -14889,8 +14889,17 @@
                 <a:ea typeface="Courier New" pitchFamily="34" charset="-122"/>
                 <a:cs typeface="Courier New" pitchFamily="34" charset="-120"/>
               </a:rPr>
-              <a:t>Автосервис на Лесной</a:t>
-            </a:r>
+              <a:t>Новая заявка · Автосервис на Лесной</a:t>
+            </a:r>
+            <a:endParaRPr lang="en-US" sz="1000" dirty="0"/>
+          </a:p>
+          <a:p>
+            <a:pPr indent="0" marL="0">
+              <a:lnSpc>
+                <a:spcPct val="115000"/>
+              </a:lnSpc>
+              <a:buNone/>
+            </a:pPr>
             <a:endParaRPr lang="en-US" sz="1000" dirty="0"/>
           </a:p>
           <a:p>
@@ -14909,17 +14918,8 @@
                 <a:ea typeface="Courier New" pitchFamily="34" charset="-122"/>
                 <a:cs typeface="Courier New" pitchFamily="34" charset="-120"/>
               </a:rPr>
-              <a:t>Запишитесь за минуту</a:t>
-            </a:r>
-            <a:endParaRPr lang="en-US" sz="1000" dirty="0"/>
-          </a:p>
-          <a:p>
-            <a:pPr indent="0" marL="0">
-              <a:lnSpc>
-                <a:spcPct val="115000"/>
-              </a:lnSpc>
-              <a:buNone/>
-            </a:pPr>
+              <a:t>Диагностика подвески · Сегодня 14:00</a:t>
+            </a:r>
             <a:endParaRPr lang="en-US" sz="1000" dirty="0"/>
           </a:p>
           <a:p>
@@ -14938,7 +14938,7 @@
                 <a:ea typeface="Courier New" pitchFamily="34" charset="-122"/>
                 <a:cs typeface="Courier New" pitchFamily="34" charset="-120"/>
               </a:rPr>
-              <a:t>Позиций: 3   Слотов: 4   Статус: опубликован</a:t>
+              <a:t>Пётр, +7 999 000-11-22</a:t>
             </a:r>
             <a:endParaRPr lang="en-US" sz="1000" dirty="0"/>
           </a:p>
@@ -14958,7 +14958,27 @@
                 <a:ea typeface="Courier New" pitchFamily="34" charset="-122"/>
                 <a:cs typeface="Courier New" pitchFamily="34" charset="-120"/>
               </a:rPr>
-              <a:t>max.ru/t403_hakaton_max_bot?startapp=avtoservis-na-lesnoi</a:t>
+              <a:t>«Mazda 6, стучит подвеска»</a:t>
+            </a:r>
+            <a:endParaRPr lang="en-US" sz="1000" dirty="0"/>
+          </a:p>
+          <a:p>
+            <a:pPr indent="0" marL="0">
+              <a:lnSpc>
+                <a:spcPct val="115000"/>
+              </a:lnSpc>
+              <a:buNone/>
+            </a:pPr>
+            <a:r>
+              <a:rPr lang="en-US" sz="1000" dirty="0">
+                <a:solidFill>
+                  <a:srgbClr val="0D1117"/>
+                </a:solidFill>
+                <a:latin typeface="Courier New" pitchFamily="34" charset="0"/>
+                <a:ea typeface="Courier New" pitchFamily="34" charset="-122"/>
+                <a:cs typeface="Courier New" pitchFamily="34" charset="-120"/>
+              </a:rPr>
+              <a:t>[ Открыть заявки ]</a:t>
             </a:r>
             <a:endParaRPr lang="en-US" sz="1000" dirty="0"/>
           </a:p>
@@ -16973,7 +16993,7 @@
                 <a:ea typeface="Calibri" pitchFamily="34" charset="-122"/>
                 <a:cs typeface="Calibri" pitchFamily="34" charset="-120"/>
               </a:rPr>
-              <a:t>мастер, правки, заявки владельцу</a:t>
+              <a:t>приветствие и уведомления</a:t>
             </a:r>
             <a:endParaRPr lang="en-US" sz="1050" dirty="0"/>
           </a:p>
@@ -17078,7 +17098,7 @@
                 <a:ea typeface="Calibri" pitchFamily="34" charset="-122"/>
                 <a:cs typeface="Calibri" pitchFamily="34" charset="-120"/>
               </a:rPr>
-              <a:t>витрина клиента и кабинет</a:t>
+              <a:t>создание, витрина, заявки</a:t>
             </a:r>
             <a:endParaRPr lang="en-US" sz="1050" dirty="0"/>
           </a:p>

--- a/docs/max-presentation/presentation.pptx
+++ b/docs/max-presentation/presentation.pptx
@@ -2658,7 +2658,7 @@
                 <a:ea typeface="Calibri" pitchFamily="34" charset="-122"/>
                 <a:cs typeface="Calibri" pitchFamily="34" charset="-120"/>
               </a:rPr>
-              <a:t>967024c · ветка main</a:t>
+              <a:t>376b483 · ветка main</a:t>
             </a:r>
             <a:pPr indent="0" marL="0">
               <a:lnSpc>
@@ -2684,7 +2684,7 @@
                 <a:ea typeface="Calibri" pitchFamily="34" charset="-122"/>
                 <a:cs typeface="Calibri" pitchFamily="34" charset="-120"/>
               </a:rPr>
-              <a:t>967024c0cb024ab93c623fc4e6189b29a17cfede</a:t>
+              <a:t>376b483180331187bd900c2dce8a18bda4ca5672</a:t>
             </a:r>
             <a:endParaRPr lang="en-US" sz="1200" dirty="0"/>
           </a:p>

--- a/docs/max-presentation/presentation.pptx
+++ b/docs/max-presentation/presentation.pptx
@@ -3018,7 +3018,7 @@
                 <a:ea typeface="Calibri" pitchFamily="34" charset="-122"/>
                 <a:cs typeface="Calibri" pitchFamily="34" charset="-120"/>
               </a:rPr>
-              <a:t>Подключено к боту: кнопка «Открыть Витрину» и ссылки max.ru/t403_hakaton_max_bot?startapp=&lt;slug&gt;</a:t>
+              <a:t>Подключено к боту: кнопка «Открыть AIRuntime» и ссылки max.ru/t403_hakaton_max_bot?startapp=&lt;slug&gt;</a:t>
             </a:r>
             <a:endParaRPr lang="en-US" sz="1150" dirty="0"/>
           </a:p>
@@ -3665,7 +3665,7 @@
                 <a:ea typeface="Calibri" pitchFamily="34" charset="-122"/>
                 <a:cs typeface="Calibri" pitchFamily="34" charset="-120"/>
               </a:rPr>
-              <a:t> = по запросу; без ключа витрина собирается шаблоном</a:t>
+              <a:t> = по запросу; без ключа сервис собирается шаблоном</a:t>
             </a:r>
             <a:endParaRPr lang="en-US" sz="1050" dirty="0"/>
           </a:p>
@@ -3826,7 +3826,7 @@
                 <a:ea typeface="Calibri" pitchFamily="34" charset="-122"/>
                 <a:cs typeface="Calibri" pitchFamily="34" charset="-120"/>
               </a:rPr>
-              <a:t>Открыть max.ru/t403_hakaton_max_bot, нажать «Начать», затем «Открыть Витрину»</a:t>
+              <a:t>Открыть max.ru/t403_hakaton_max_bot, нажать «Начать», затем «Открыть AIRuntime»</a:t>
             </a:r>
             <a:endParaRPr lang="en-US" sz="1250" dirty="0"/>
           </a:p>
@@ -3872,7 +3872,7 @@
                 <a:ea typeface="Calibri" pitchFamily="34" charset="-122"/>
                 <a:cs typeface="Calibri" pitchFamily="34" charset="-120"/>
               </a:rPr>
-              <a:t>: «Автосервис на Лесной. Диагностика 1500, замена масла 900, шиномонтаж 2400. Работаем с 9 до 20» — и нажать «Собрать витрину»</a:t>
+              <a:t>: «Автосервис на Лесной. Диагностика 1500, замена масла 900, шиномонтаж 2400. Работаем с 9 до 20» — и нажать «Собрать AIRuntime»</a:t>
             </a:r>
             <a:endParaRPr lang="en-US" sz="1250" dirty="0"/>
           </a:p>
@@ -3896,7 +3896,7 @@
                 <a:ea typeface="Calibri" pitchFamily="34" charset="-122"/>
                 <a:cs typeface="Calibri" pitchFamily="34" charset="-120"/>
               </a:rPr>
-              <a:t>Через ~10 секунд витрина опубликована: ссылка, «Поделиться», «Посмотреть»</a:t>
+              <a:t>Через ~10 секунд сервис опубликован: ссылка, «Поделиться», «Посмотреть»</a:t>
             </a:r>
             <a:endParaRPr lang="en-US" sz="1250" dirty="0"/>
           </a:p>
@@ -4839,7 +4839,7 @@
                 <a:ea typeface="Calibri" pitchFamily="34" charset="-122"/>
                 <a:cs typeface="Calibri" pitchFamily="34" charset="-120"/>
               </a:rPr>
-              <a:t>Открыть витрину</a:t>
+              <a:t>Открыть AIRuntime</a:t>
             </a:r>
             <a:endParaRPr lang="en-US" sz="1150" dirty="0"/>
           </a:p>
@@ -5055,7 +5055,7 @@
                 <a:ea typeface="Calibri" pitchFamily="34" charset="-122"/>
                 <a:cs typeface="Calibri" pitchFamily="34" charset="-120"/>
               </a:rPr>
-              <a:t>Скелетоны экрана и индикатор сборки витрины</a:t>
+              <a:t>Скелетоны экрана и индикатор сборки AIRuntime</a:t>
             </a:r>
             <a:endParaRPr lang="en-US" sz="1250" dirty="0"/>
           </a:p>
@@ -5117,7 +5117,7 @@
                 <a:ea typeface="Calibri" pitchFamily="34" charset="-122"/>
                 <a:cs typeface="Calibri" pitchFamily="34" charset="-120"/>
               </a:rPr>
-              <a:t>«Витрина готова», «Заявка принята», статусы заявок</a:t>
+              <a:t>«AIRuntime готов», «Заявка принята», статусы заявок</a:t>
             </a:r>
             <a:endParaRPr lang="en-US" sz="1250" dirty="0"/>
           </a:p>
@@ -5623,7 +5623,7 @@
                 <a:ea typeface="Calibri" pitchFamily="34" charset="-122"/>
                 <a:cs typeface="Calibri" pitchFamily="34" charset="-120"/>
               </a:rPr>
-              <a:t> — открыл витрину → отправил заявку</a:t>
+              <a:t> — открыл AIRuntime → отправил заявку</a:t>
             </a:r>
             <a:endParaRPr lang="en-US" sz="1250" dirty="0"/>
           </a:p>
@@ -5967,7 +5967,7 @@
                 <a:ea typeface="Calibri" pitchFamily="34" charset="-122"/>
                 <a:cs typeface="Calibri" pitchFamily="34" charset="-120"/>
               </a:rPr>
-              <a:t>Пилот — три недели через витрину, сравнение по тем же величинам</a:t>
+              <a:t>Пилот — три недели через AIRuntime, сравнение по тем же величинам</a:t>
             </a:r>
             <a:endParaRPr lang="en-US" sz="1250" dirty="0"/>
           </a:p>
@@ -6508,7 +6508,7 @@
                 <a:ea typeface="Calibri" pitchFamily="34" charset="-122"/>
                 <a:cs typeface="Calibri" pitchFamily="34" charset="-120"/>
               </a:rPr>
-              <a:t>Описание → опубликованная витрина</a:t>
+              <a:t>Описание → опубликованный сервис</a:t>
             </a:r>
             <a:endParaRPr lang="en-US" sz="1200" dirty="0"/>
           </a:p>
@@ -6765,7 +6765,7 @@
                 <a:ea typeface="Calibri" pitchFamily="34" charset="-122"/>
                 <a:cs typeface="Calibri" pitchFamily="34" charset="-120"/>
               </a:rPr>
-              <a:t>Правка витрины одной фразой</a:t>
+              <a:t>Правка одной фразой</a:t>
             </a:r>
             <a:endParaRPr lang="en-US" sz="1200" dirty="0"/>
           </a:p>
@@ -7279,7 +7279,7 @@
                 <a:ea typeface="Calibri" pitchFamily="34" charset="-122"/>
                 <a:cs typeface="Calibri" pitchFamily="34" charset="-120"/>
               </a:rPr>
-              <a:t>Онлайн-оплата: витрина доводит до заявки</a:t>
+              <a:t>Онлайн-оплата: сервис доводит до заявки</a:t>
             </a:r>
             <a:endParaRPr lang="en-US" sz="1200" dirty="0"/>
           </a:p>
@@ -7351,7 +7351,7 @@
                 <a:ea typeface="Calibri" pitchFamily="34" charset="-122"/>
                 <a:cs typeface="Calibri" pitchFamily="34" charset="-120"/>
               </a:rPr>
-              <a:t>Код под каждый бизнес: витрина — это данные</a:t>
+              <a:t>Код под каждый бизнес: AIRuntime — это данные</a:t>
             </a:r>
             <a:endParaRPr lang="en-US" sz="1200" dirty="0"/>
           </a:p>
@@ -7982,7 +7982,7 @@
                 <a:ea typeface="Calibri" pitchFamily="34" charset="-122"/>
                 <a:cs typeface="Calibri" pitchFamily="34" charset="-120"/>
               </a:rPr>
-              <a:t>создание, витрина, заявки</a:t>
+              <a:t>создание, сервис, заявки</a:t>
             </a:r>
             <a:endParaRPr lang="en-US" sz="1050" dirty="0"/>
           </a:p>
@@ -8258,7 +8258,7 @@
                 <a:ea typeface="Calibri" pitchFamily="34" charset="-122"/>
                 <a:cs typeface="Calibri" pitchFamily="34" charset="-120"/>
               </a:rPr>
-              <a:t>Генератор витрины</a:t>
+              <a:t>Генератор сервиса</a:t>
             </a:r>
             <a:endParaRPr lang="en-US" sz="1350" dirty="0"/>
           </a:p>
@@ -8402,7 +8402,7 @@
                 <a:ea typeface="Calibri" pitchFamily="34" charset="-122"/>
                 <a:cs typeface="Calibri" pitchFamily="34" charset="-120"/>
               </a:rPr>
-              <a:t>владельцы, витрины, заявки</a:t>
+              <a:t>владельцы, сервисы, заявки</a:t>
             </a:r>
             <a:endParaRPr lang="en-US" sz="1050" dirty="0"/>
           </a:p>
@@ -8910,7 +8910,7 @@
                 <a:ea typeface="Calibri" pitchFamily="34" charset="-122"/>
                 <a:cs typeface="Calibri" pitchFamily="34" charset="-120"/>
               </a:rPr>
-              <a:t>Витрина — это данные, а не код</a:t>
+              <a:t>AIRuntime — это данные, а не код</a:t>
             </a:r>
             <a:endParaRPr lang="en-US" sz="1350" dirty="0"/>
           </a:p>
@@ -8950,7 +8950,7 @@
                 <a:ea typeface="Calibri" pitchFamily="34" charset="-122"/>
                 <a:cs typeface="Calibri" pitchFamily="34" charset="-120"/>
               </a:rPr>
-              <a:t>Модель заполняет схему, а не пишет программу: один мультитенантный мини-апп рендерит все витрины. «Описал → клиент может записаться» занимает секунды, а кривое поле обрезает валидация.</a:t>
+              <a:t>Модель заполняет схему, а не пишет программу: один мультитенантный мини-апп рендерит все сервисы. «Описал → клиент может записаться» занимает секунды, а кривое поле обрезает валидация.</a:t>
             </a:r>
             <a:endParaRPr lang="en-US" sz="1350" dirty="0"/>
           </a:p>
@@ -9066,7 +9066,7 @@
                 <a:ea typeface="Calibri" pitchFamily="34" charset="-122"/>
                 <a:cs typeface="Calibri" pitchFamily="34" charset="-120"/>
               </a:rPr>
-              <a:t>Как советует задание: чат-бот — для уведомлений и коротких действий, форма, каталог и список заявок — в мини-приложении. Первая версия с мастером в чате делала витрину из любого сообщения, мы её заменили.</a:t>
+              <a:t>Как советует задание: чат-бот — для уведомлений и коротких действий, форма, каталог и список заявок — в мини-приложении. Первая версия с мастером в чате делала сервис из любого сообщения, мы её заменили.</a:t>
             </a:r>
             <a:endParaRPr lang="en-US" sz="1350" dirty="0"/>
           </a:p>
@@ -9182,7 +9182,7 @@
                 <a:ea typeface="Calibri" pitchFamily="34" charset="-122"/>
                 <a:cs typeface="Calibri" pitchFamily="34" charset="-120"/>
               </a:rPr>
-              <a:t>Мини-приложение подключено к чат-боту и не живёт отдельно. Роль задаёт стартовый параметр: без него — кабинет владельца, со слагом витрины — витрина для клиента.</a:t>
+              <a:t>Мини-приложение подключено к чат-боту и не живёт отдельно. Роль задаёт стартовый параметр: без него — кабинет владельца, со слагом сервиса — страница для клиента.</a:t>
             </a:r>
             <a:endParaRPr lang="en-US" sz="1350" dirty="0"/>
           </a:p>
@@ -9607,7 +9607,7 @@
                 <a:ea typeface="Calibri" pitchFamily="34" charset="-122"/>
                 <a:cs typeface="Calibri" pitchFamily="34" charset="-120"/>
               </a:rPr>
-              <a:t>Повторный прогон сценария — новая витрина со своим адресом; после 10 — понятное сообщение, лишние удаляются кнопкой</a:t>
+              <a:t>Повторный прогон сценария — новый сервис со своим адресом; после 10 — понятное сообщение, лишние удаляются кнопкой</a:t>
             </a:r>
             <a:endParaRPr lang="en-US" sz="1150" dirty="0"/>
           </a:p>
@@ -9774,7 +9774,7 @@
                 <a:ea typeface="Calibri" pitchFamily="34" charset="-122"/>
                 <a:cs typeface="Calibri" pitchFamily="34" charset="-120"/>
               </a:rPr>
-              <a:t>Владелец видит и меняет только свои витрины и заявки</a:t>
+              <a:t>Владелец видит и меняет только свои сервисы и заявки</a:t>
             </a:r>
             <a:endParaRPr lang="en-US" sz="1150" dirty="0"/>
           </a:p>
@@ -10013,7 +10013,7 @@
                 <a:ea typeface="Calibri" pitchFamily="34" charset="-122"/>
                 <a:cs typeface="Calibri" pitchFamily="34" charset="-120"/>
               </a:rPr>
-              <a:t>54 автотеста: подделка подписи, чужой токен, чужие витрины, сквозной сценарий через HTTP</a:t>
+              <a:t>54 автотеста: подделка подписи, чужой токен, чужие сервисы, сквозной сценарий через HTTP</a:t>
             </a:r>
             <a:endParaRPr lang="en-US" sz="1150" dirty="0"/>
           </a:p>
@@ -10100,7 +10100,7 @@
                 <a:ea typeface="Calibri" pitchFamily="34" charset="-122"/>
                 <a:cs typeface="Calibri" pitchFamily="34" charset="-120"/>
               </a:rPr>
-              <a:t> витрина из описания собирается за ~9 секунд с реальной моделью, правка — за ~3 секунды; сообщения бота с баннером и кнопками проходят валидацию MAX API.</a:t>
+              <a:t> сервис из описания собирается за ~9 секунд с реальной моделью, правка — за ~3 секунды; сообщения бота с баннером и кнопками проходят валидацию MAX API.</a:t>
             </a:r>
             <a:endParaRPr lang="en-US" sz="1250" dirty="0"/>
           </a:p>
@@ -10730,7 +10730,7 @@
                 <a:ea typeface="Calibri" pitchFamily="34" charset="-122"/>
                 <a:cs typeface="Calibri" pitchFamily="34" charset="-120"/>
               </a:rPr>
-              <a:t>Каждое сообщение бота открывает нужный экран: владельцу — заявки, клиенту — его витрину. Диплинк startapp — для ссылки и QR-кода.</a:t>
+              <a:t>Каждое сообщение бота открывает нужный экран: владельцу — заявки, клиенту — его сервис. Диплинк startapp — для ссылки и QR-кода.</a:t>
             </a:r>
             <a:endParaRPr lang="en-US" sz="1150" dirty="0"/>
           </a:p>
@@ -10982,7 +10982,7 @@
                 <a:ea typeface="Calibri" pitchFamily="34" charset="-122"/>
                 <a:cs typeface="Calibri" pitchFamily="34" charset="-120"/>
               </a:rPr>
-              <a:t>Родная кнопка «Назад» в предпросмотре витрины; если закрыть приложение во время сборки, MAX переспросит.</a:t>
+              <a:t>Родная кнопка «Назад» в предпросмотре; если закрыть приложение во время сборки, MAX переспросит.</a:t>
             </a:r>
             <a:endParaRPr lang="en-US" sz="1150" dirty="0"/>
           </a:p>
@@ -11629,7 +11629,7 @@
                 <a:ea typeface="Calibri" pitchFamily="34" charset="-122"/>
                 <a:cs typeface="Calibri" pitchFamily="34" charset="-120"/>
               </a:rPr>
-              <a:t> — то, что клиент выбрал в витрине</a:t>
+              <a:t> — то, что клиент выбрал в сервисе</a:t>
             </a:r>
             <a:endParaRPr lang="en-US" sz="1200" dirty="0"/>
           </a:p>
@@ -11796,7 +11796,7 @@
                 <a:ea typeface="Calibri" pitchFamily="34" charset="-122"/>
                 <a:cs typeface="Calibri" pitchFamily="34" charset="-120"/>
               </a:rPr>
-              <a:t>Модель недоступна — витрина собирается шаблоном, сценарий не блокируется</a:t>
+              <a:t>Модель недоступна — сервис собирается шаблоном, сценарий не блокируется</a:t>
             </a:r>
             <a:endParaRPr lang="en-US" sz="1200" dirty="0"/>
           </a:p>
@@ -11996,7 +11996,7 @@
                 <a:ea typeface="Calibri" pitchFamily="34" charset="-122"/>
                 <a:cs typeface="Calibri" pitchFamily="34" charset="-120"/>
               </a:rPr>
-              <a:t> — описание → конфигурация витрины, с детерминированным фоллбэком</a:t>
+              <a:t> — описание → конфигурация сервиса, с детерминированным фоллбэком</a:t>
             </a:r>
             <a:endParaRPr lang="en-US" sz="1200" dirty="0"/>
           </a:p>
@@ -12147,7 +12147,7 @@
                 <a:ea typeface="Calibri" pitchFamily="34" charset="-122"/>
                 <a:cs typeface="Calibri" pitchFamily="34" charset="-120"/>
               </a:rPr>
-              <a:t>«Автосервис на Лесной» и заявки на слайдах 8–10 — демо: не реальные организации и клиенты. Витрины созданы через тот же продуктовый сценарий, а экраны сняты с подставленными демо-данными.</a:t>
+              <a:t>«Автосервис на Лесной» и заявки на слайдах 8–10 — демо: не реальные организации и клиенты. Сервисы созданы через тот же продуктовый сценарий, а экраны сняты с подставленными демо-данными.</a:t>
             </a:r>
             <a:endParaRPr lang="en-US" sz="1450" dirty="0"/>
           </a:p>
@@ -12549,7 +12549,7 @@
                 <a:ea typeface="Calibri" pitchFamily="34" charset="-122"/>
                 <a:cs typeface="Calibri" pitchFamily="34" charset="-120"/>
               </a:rPr>
-              <a:t>Схема витрины: позиции, цены, длительность, время, поля заявки</a:t>
+              <a:t>Схема сервиса: позиции, цены, длительность, время, поля заявки</a:t>
             </a:r>
             <a:endParaRPr lang="en-US" sz="1200" dirty="0"/>
           </a:p>
@@ -12621,7 +12621,7 @@
                 <a:ea typeface="Calibri" pitchFamily="34" charset="-122"/>
                 <a:cs typeface="Calibri" pitchFamily="34" charset="-120"/>
               </a:rPr>
-              <a:t>Мультитенантный рендер: новая витрина не требует деплоя</a:t>
+              <a:t>Мультитенантный рендер: новый сервис не требует деплоя</a:t>
             </a:r>
             <a:endParaRPr lang="en-US" sz="1200" dirty="0"/>
           </a:p>
@@ -12740,7 +12740,7 @@
                 <a:ea typeface="Calibri" pitchFamily="34" charset="-122"/>
                 <a:cs typeface="Calibri" pitchFamily="34" charset="-120"/>
               </a:rPr>
-              <a:t>Тип витрины: запись / меню / заявка — </a:t>
+              <a:t>Тип сервиса: запись / меню / заявка — </a:t>
             </a:r>
             <a:r>
               <a:rPr lang="en-US" sz="1200" b="1" dirty="0">
@@ -12934,7 +12934,7 @@
                 <a:ea typeface="Calibri" pitchFamily="34" charset="-122"/>
                 <a:cs typeface="Calibri" pitchFamily="34" charset="-120"/>
               </a:rPr>
-              <a:t> кафе и пекарни (предзаказ), аренда инвентаря и помещений, секции и студии (запись на занятия), ремонт и бытовые услуги (вызов мастера). Каждое направление использует готовый тип витрины и меняет только переменную часть. Порядок — на следующем слайде.</a:t>
+              <a:t> кафе и пекарни (предзаказ), аренда инвентаря и помещений, секции и студии (запись на занятия), ремонт и бытовые услуги (вызов мастера). Каждое направление использует готовый тип сервиса и меняет только переменную часть. Порядок — на следующем слайде.</a:t>
             </a:r>
             <a:endParaRPr lang="en-US" sz="1250" dirty="0"/>
           </a:p>
@@ -13144,7 +13144,7 @@
                 <a:ea typeface="Calibri" pitchFamily="34" charset="-122"/>
                 <a:cs typeface="Calibri" pitchFamily="34" charset="-120"/>
               </a:rPr>
-              <a:t>Как Витрина переходит из пилота дальше</a:t>
+              <a:t>Как AIRuntime переходит из пилота дальше</a:t>
             </a:r>
             <a:endParaRPr lang="en-US" sz="3200" dirty="0"/>
           </a:p>
@@ -14131,7 +14131,7 @@
                 <a:ea typeface="Calibri" pitchFamily="34" charset="-122"/>
                 <a:cs typeface="Calibri" pitchFamily="34" charset="-120"/>
               </a:rPr>
-              <a:t>роли «сеть → филиал → мастер», витрина на филиал — первая доработка ядра</a:t>
+              <a:t>роли «сеть → филиал → мастер», сервис на филиал — первая доработка ядра</a:t>
             </a:r>
             <a:endParaRPr lang="en-US" sz="850" dirty="0"/>
           </a:p>
@@ -14260,7 +14260,7 @@
                 <a:ea typeface="Calibri" pitchFamily="34" charset="-122"/>
                 <a:cs typeface="Calibri" pitchFamily="34" charset="-120"/>
               </a:rPr>
-              <a:t>сеть переводит на витрины все свои точки</a:t>
+              <a:t>сеть переводит на AIRuntime все свои точки</a:t>
             </a:r>
             <a:endParaRPr lang="en-US" sz="850" dirty="0"/>
           </a:p>
@@ -14503,7 +14503,7 @@
                 <a:ea typeface="Calibri" pitchFamily="34" charset="-122"/>
                 <a:cs typeface="Calibri" pitchFamily="34" charset="-120"/>
               </a:rPr>
-              <a:t>правила времени и праздники региона; модерация витрин</a:t>
+              <a:t>правила времени и праздники региона; модерация сервисов</a:t>
             </a:r>
             <a:endParaRPr lang="en-US" sz="850" dirty="0"/>
           </a:p>
@@ -14632,7 +14632,7 @@
                 <a:ea typeface="Calibri" pitchFamily="34" charset="-122"/>
                 <a:cs typeface="Calibri" pitchFamily="34" charset="-120"/>
               </a:rPr>
-              <a:t>консультант собирает витрину вместе с предпринимателем на приёме</a:t>
+              <a:t>консультант собирает сервис вместе с предпринимателем на приёме</a:t>
             </a:r>
             <a:endParaRPr lang="en-US" sz="850" dirty="0"/>
           </a:p>
@@ -14719,7 +14719,7 @@
                 <a:ea typeface="Calibri" pitchFamily="34" charset="-122"/>
                 <a:cs typeface="Calibri" pitchFamily="34" charset="-120"/>
               </a:rPr>
-              <a:t> та же механика «одно сообщение → работающий сервис в MAX» подходит не только бизнесу — продуктовые команды проверяют гипотезы без разработки, люди делают небольшие сервисы для себя. Это ядро AIRuntime; Витрина — первый вертикальный сценарий на нём.</a:t>
+              <a:t> та же механика «одно сообщение → работающий сервис в MAX» подходит не только бизнесу — продуктовые команды проверяют гипотезы без разработки, люди делают небольшие сервисы для себя. Это ядро AIRuntime: первый вертикальный сценарий на этой механике.</a:t>
             </a:r>
             <a:endParaRPr lang="en-US" sz="1150" dirty="0"/>
           </a:p>
@@ -15277,7 +15277,7 @@
                 <a:ea typeface="Calibri" pitchFamily="34" charset="-122"/>
                 <a:cs typeface="Calibri" pitchFamily="34" charset="-120"/>
               </a:rPr>
-              <a:t>Витрина заменяет пересказ прайса и согласование времени. Приём, оплата и сама услуга остаются как были.</a:t>
+              <a:t>AIRuntime заменяет пересказ прайса и согласование времени. Приём, оплата и сама услуга остаются как были.</a:t>
             </a:r>
             <a:endParaRPr lang="en-US" sz="1450" dirty="0"/>
           </a:p>
@@ -15393,7 +15393,7 @@
                 <a:ea typeface="Calibri" pitchFamily="34" charset="-122"/>
                 <a:cs typeface="Calibri" pitchFamily="34" charset="-120"/>
               </a:rPr>
-              <a:t>Владелец создаёт витрину и подтверждает записи, клиенты записываются, команда сопровождает и снимает метрики. Внешние владельцы процесса не нужны.</a:t>
+              <a:t>Владелец создаёт сервис и подтверждает записи, клиенты записываются, команда сопровождает и снимает метрики. Внешние владельцы процесса не нужны.</a:t>
             </a:r>
             <a:endParaRPr lang="en-US" sz="1450" dirty="0"/>
           </a:p>
@@ -15981,501 +15981,9 @@
           </a:p>
         </p:txBody>
       </p:sp>
-      <p:sp>
-        <p:nvSpPr>
-          <p:cNvPr id="5" name="Shape 2"/>
-          <p:cNvSpPr/>
-          <p:nvPr/>
-        </p:nvSpPr>
-        <p:spPr>
-          <a:xfrm>
-            <a:off x="2371725" y="1376363"/>
-            <a:ext cx="219075" cy="219075"/>
-          </a:xfrm>
-          <a:prstGeom prst="ellipse">
-            <a:avLst/>
-          </a:prstGeom>
-          <a:solidFill>
-            <a:srgbClr val="FFFFFF"/>
-          </a:solidFill>
-          <a:ln w="12700">
-            <a:solidFill>
-              <a:srgbClr val="FFFFFF"/>
-            </a:solidFill>
-            <a:prstDash val="solid"/>
-          </a:ln>
-        </p:spPr>
-      </p:sp>
-      <p:sp>
-        <p:nvSpPr>
-          <p:cNvPr id="6" name="Shape 3"/>
-          <p:cNvSpPr/>
-          <p:nvPr/>
-        </p:nvSpPr>
-        <p:spPr>
-          <a:xfrm>
-            <a:off x="2443163" y="1447800"/>
-            <a:ext cx="76200" cy="76200"/>
-          </a:xfrm>
-          <a:prstGeom prst="ellipse">
-            <a:avLst/>
-          </a:prstGeom>
-          <a:solidFill>
-            <a:srgbClr val="0077FF"/>
-          </a:solidFill>
-          <a:ln w="12700">
-            <a:solidFill>
-              <a:srgbClr val="0077FF"/>
-            </a:solidFill>
-            <a:prstDash val="solid"/>
-          </a:ln>
-        </p:spPr>
-      </p:sp>
-      <p:sp>
-        <p:nvSpPr>
-          <p:cNvPr id="7" name="Text 4"/>
-          <p:cNvSpPr txBox="1"/>
-          <p:nvPr/>
-        </p:nvSpPr>
-        <p:spPr>
-          <a:xfrm>
-            <a:off x="2667000" y="1333500"/>
-            <a:ext cx="762000" cy="304800"/>
-          </a:xfrm>
-          <a:prstGeom prst="rect">
-            <a:avLst/>
-          </a:prstGeom>
-          <a:noFill/>
-          <a:ln/>
-        </p:spPr>
-        <p:txBody>
-          <a:bodyPr wrap="square" lIns="0" tIns="0" rIns="0" bIns="0" rtlCol="0" anchor="ctr"/>
-          <a:lstStyle/>
-          <a:p>
-            <a:pPr indent="0" marL="0">
-              <a:buNone/>
-            </a:pPr>
-            <a:r>
-              <a:rPr lang="en-US" sz="1600" b="1" dirty="0">
-                <a:solidFill>
-                  <a:srgbClr val="FFFFFF"/>
-                </a:solidFill>
-                <a:latin typeface="Calibri" pitchFamily="34" charset="0"/>
-                <a:ea typeface="Calibri" pitchFamily="34" charset="-122"/>
-                <a:cs typeface="Calibri" pitchFamily="34" charset="-120"/>
-              </a:rPr>
-              <a:t>max</a:t>
-            </a:r>
-            <a:endParaRPr lang="en-US" sz="1600" dirty="0"/>
-          </a:p>
-        </p:txBody>
-      </p:sp>
-      <p:sp>
-        <p:nvSpPr>
-          <p:cNvPr id="8" name="Text 5"/>
-          <p:cNvSpPr txBox="1"/>
-          <p:nvPr/>
-        </p:nvSpPr>
-        <p:spPr>
-          <a:xfrm>
-            <a:off x="685800" y="1943100"/>
-            <a:ext cx="4953000" cy="190500"/>
-          </a:xfrm>
-          <a:prstGeom prst="rect">
-            <a:avLst/>
-          </a:prstGeom>
-          <a:noFill/>
-          <a:ln/>
-        </p:spPr>
-        <p:txBody>
-          <a:bodyPr wrap="square" lIns="0" tIns="0" rIns="0" bIns="0" rtlCol="0" anchor="ctr"/>
-          <a:lstStyle/>
-          <a:p>
-            <a:pPr indent="0" marL="0">
-              <a:buNone/>
-            </a:pPr>
-            <a:r>
-              <a:rPr lang="en-US" sz="860" b="1" spc="200" kern="0" dirty="0">
-                <a:solidFill>
-                  <a:srgbClr val="8EC4FF"/>
-                </a:solidFill>
-                <a:latin typeface="Calibri" pitchFamily="34" charset="0"/>
-                <a:ea typeface="Calibri" pitchFamily="34" charset="-122"/>
-                <a:cs typeface="Calibri" pitchFamily="34" charset="-120"/>
-              </a:rPr>
-              <a:t>ТРЕК «ЭФФЕКТИВНЫЙ БИЗНЕС»</a:t>
-            </a:r>
-            <a:endParaRPr lang="en-US" sz="860" dirty="0"/>
-          </a:p>
-        </p:txBody>
-      </p:sp>
-      <p:sp>
-        <p:nvSpPr>
-          <p:cNvPr id="9" name="Text 6"/>
-          <p:cNvSpPr txBox="1"/>
-          <p:nvPr/>
-        </p:nvSpPr>
-        <p:spPr>
-          <a:xfrm>
-            <a:off x="647700" y="2152650"/>
-            <a:ext cx="5334000" cy="1181100"/>
-          </a:xfrm>
-          <a:prstGeom prst="rect">
-            <a:avLst/>
-          </a:prstGeom>
-          <a:noFill/>
-          <a:ln/>
-        </p:spPr>
-        <p:txBody>
-          <a:bodyPr wrap="square" lIns="0" tIns="0" rIns="0" bIns="0" rtlCol="0" anchor="t"/>
-          <a:lstStyle/>
-          <a:p>
-            <a:pPr indent="0" marL="0">
-              <a:buNone/>
-            </a:pPr>
-            <a:r>
-              <a:rPr lang="en-US" sz="8400" b="1" dirty="0">
-                <a:solidFill>
-                  <a:srgbClr val="FFFFFF"/>
-                </a:solidFill>
-                <a:latin typeface="Calibri" pitchFamily="34" charset="0"/>
-                <a:ea typeface="Calibri" pitchFamily="34" charset="-122"/>
-                <a:cs typeface="Calibri" pitchFamily="34" charset="-120"/>
-              </a:rPr>
-              <a:t>Витрина</a:t>
-            </a:r>
-            <a:endParaRPr lang="en-US" sz="8400" dirty="0"/>
-          </a:p>
-        </p:txBody>
-      </p:sp>
-      <p:sp>
-        <p:nvSpPr>
-          <p:cNvPr id="10" name="Text 7"/>
-          <p:cNvSpPr txBox="1"/>
-          <p:nvPr/>
-        </p:nvSpPr>
-        <p:spPr>
-          <a:xfrm>
-            <a:off x="685800" y="3505200"/>
-            <a:ext cx="4762500" cy="876300"/>
-          </a:xfrm>
-          <a:prstGeom prst="rect">
-            <a:avLst/>
-          </a:prstGeom>
-          <a:noFill/>
-          <a:ln/>
-        </p:spPr>
-        <p:txBody>
-          <a:bodyPr wrap="square" lIns="0" tIns="0" rIns="0" bIns="0" rtlCol="0" anchor="t"/>
-          <a:lstStyle/>
-          <a:p>
-            <a:pPr indent="0" marL="0">
-              <a:lnSpc>
-                <a:spcPct val="115000"/>
-              </a:lnSpc>
-              <a:buNone/>
-            </a:pPr>
-            <a:r>
-              <a:rPr lang="en-US" sz="1600" dirty="0">
-                <a:solidFill>
-                  <a:srgbClr val="BDC4D2"/>
-                </a:solidFill>
-                <a:latin typeface="Calibri" pitchFamily="34" charset="0"/>
-                <a:ea typeface="Calibri" pitchFamily="34" charset="-122"/>
-                <a:cs typeface="Calibri" pitchFamily="34" charset="-120"/>
-              </a:rPr>
-              <a:t>Рабочий сервис записи в MAX из одного сообщения — без разработчика, без подрядчика, без ожидания.</a:t>
-            </a:r>
-            <a:endParaRPr lang="en-US" sz="1600" dirty="0"/>
-          </a:p>
-        </p:txBody>
-      </p:sp>
-      <p:sp>
-        <p:nvSpPr>
-          <p:cNvPr id="11" name="Text 8"/>
-          <p:cNvSpPr txBox="1"/>
-          <p:nvPr/>
-        </p:nvSpPr>
-        <p:spPr>
-          <a:xfrm>
-            <a:off x="685800" y="4810125"/>
-            <a:ext cx="1905000" cy="152400"/>
-          </a:xfrm>
-          <a:prstGeom prst="rect">
-            <a:avLst/>
-          </a:prstGeom>
-          <a:noFill/>
-          <a:ln/>
-        </p:spPr>
-        <p:txBody>
-          <a:bodyPr wrap="square" lIns="0" tIns="0" rIns="0" bIns="0" rtlCol="0" anchor="ctr"/>
-          <a:lstStyle/>
-          <a:p>
-            <a:pPr indent="0" marL="0">
-              <a:buNone/>
-            </a:pPr>
-            <a:r>
-              <a:rPr lang="en-US" sz="860" b="1" spc="200" kern="0" dirty="0">
-                <a:solidFill>
-                  <a:srgbClr val="7B8190"/>
-                </a:solidFill>
-                <a:latin typeface="Calibri" pitchFamily="34" charset="0"/>
-                <a:ea typeface="Calibri" pitchFamily="34" charset="-122"/>
-                <a:cs typeface="Calibri" pitchFamily="34" charset="-120"/>
-              </a:rPr>
-              <a:t>КОМАНДА</a:t>
-            </a:r>
-            <a:endParaRPr lang="en-US" sz="860" dirty="0"/>
-          </a:p>
-        </p:txBody>
-      </p:sp>
-      <p:sp>
-        <p:nvSpPr>
-          <p:cNvPr id="12" name="Text 9"/>
-          <p:cNvSpPr txBox="1"/>
-          <p:nvPr/>
-        </p:nvSpPr>
-        <p:spPr>
-          <a:xfrm>
-            <a:off x="685800" y="5029200"/>
-            <a:ext cx="2000250" cy="228600"/>
-          </a:xfrm>
-          <a:prstGeom prst="rect">
-            <a:avLst/>
-          </a:prstGeom>
-          <a:noFill/>
-          <a:ln/>
-        </p:spPr>
-        <p:txBody>
-          <a:bodyPr wrap="square" lIns="0" tIns="0" rIns="0" bIns="0" rtlCol="0" anchor="ctr"/>
-          <a:lstStyle/>
-          <a:p>
-            <a:pPr indent="0" marL="0">
-              <a:buNone/>
-            </a:pPr>
-            <a:r>
-              <a:rPr lang="en-US" sz="1275" b="1" u="dash" dirty="0">
-                <a:solidFill>
-                  <a:srgbClr val="8F96A6"/>
-                </a:solidFill>
-                <a:uFill>
-                  <a:solidFill>
-                    <a:srgbClr val="59627A"/>
-                  </a:solidFill>
-                </a:uFill>
-                <a:latin typeface="Calibri" pitchFamily="34" charset="0"/>
-                <a:ea typeface="Calibri" pitchFamily="34" charset="-122"/>
-                <a:cs typeface="Calibri" pitchFamily="34" charset="-120"/>
-              </a:rPr>
-              <a:t>[Название команды]</a:t>
-            </a:r>
-            <a:endParaRPr lang="en-US" sz="1275" dirty="0"/>
-          </a:p>
-        </p:txBody>
-      </p:sp>
-      <p:sp>
-        <p:nvSpPr>
-          <p:cNvPr id="13" name="Text 10"/>
-          <p:cNvSpPr txBox="1"/>
-          <p:nvPr/>
-        </p:nvSpPr>
-        <p:spPr>
-          <a:xfrm>
-            <a:off x="685800" y="5295900"/>
-            <a:ext cx="2000250" cy="190500"/>
-          </a:xfrm>
-          <a:prstGeom prst="rect">
-            <a:avLst/>
-          </a:prstGeom>
-          <a:noFill/>
-          <a:ln/>
-        </p:spPr>
-        <p:txBody>
-          <a:bodyPr wrap="square" lIns="0" tIns="0" rIns="0" bIns="0" rtlCol="0" anchor="ctr"/>
-          <a:lstStyle/>
-          <a:p>
-            <a:pPr indent="0" marL="0">
-              <a:buNone/>
-            </a:pPr>
-            <a:r>
-              <a:rPr lang="en-US" sz="1000" u="dash" dirty="0">
-                <a:solidFill>
-                  <a:srgbClr val="8F96A6"/>
-                </a:solidFill>
-                <a:uFill>
-                  <a:solidFill>
-                    <a:srgbClr val="59627A"/>
-                  </a:solidFill>
-                </a:uFill>
-                <a:latin typeface="Calibri" pitchFamily="34" charset="0"/>
-                <a:ea typeface="Calibri" pitchFamily="34" charset="-122"/>
-                <a:cs typeface="Calibri" pitchFamily="34" charset="-120"/>
-              </a:rPr>
-              <a:t>[Участники и роли]</a:t>
-            </a:r>
-            <a:endParaRPr lang="en-US" sz="1000" dirty="0"/>
-          </a:p>
-        </p:txBody>
-      </p:sp>
-      <p:sp>
-        <p:nvSpPr>
-          <p:cNvPr id="14" name="Text 11"/>
-          <p:cNvSpPr txBox="1"/>
-          <p:nvPr/>
-        </p:nvSpPr>
-        <p:spPr>
-          <a:xfrm>
-            <a:off x="2838450" y="4810125"/>
-            <a:ext cx="2381250" cy="152400"/>
-          </a:xfrm>
-          <a:prstGeom prst="rect">
-            <a:avLst/>
-          </a:prstGeom>
-          <a:noFill/>
-          <a:ln/>
-        </p:spPr>
-        <p:txBody>
-          <a:bodyPr wrap="square" lIns="0" tIns="0" rIns="0" bIns="0" rtlCol="0" anchor="ctr"/>
-          <a:lstStyle/>
-          <a:p>
-            <a:pPr indent="0" marL="0">
-              <a:buNone/>
-            </a:pPr>
-            <a:r>
-              <a:rPr lang="en-US" sz="860" b="1" spc="200" kern="0" dirty="0">
-                <a:solidFill>
-                  <a:srgbClr val="7B8190"/>
-                </a:solidFill>
-                <a:latin typeface="Calibri" pitchFamily="34" charset="0"/>
-                <a:ea typeface="Calibri" pitchFamily="34" charset="-122"/>
-                <a:cs typeface="Calibri" pitchFamily="34" charset="-120"/>
-              </a:rPr>
-              <a:t>РЕШЕНИЕ</a:t>
-            </a:r>
-            <a:endParaRPr lang="en-US" sz="860" dirty="0"/>
-          </a:p>
-        </p:txBody>
-      </p:sp>
-      <p:sp>
-        <p:nvSpPr>
-          <p:cNvPr id="15" name="Text 12"/>
-          <p:cNvSpPr txBox="1"/>
-          <p:nvPr/>
-        </p:nvSpPr>
-        <p:spPr>
-          <a:xfrm>
-            <a:off x="2838450" y="5029200"/>
-            <a:ext cx="2571750" cy="228600"/>
-          </a:xfrm>
-          <a:prstGeom prst="rect">
-            <a:avLst/>
-          </a:prstGeom>
-          <a:noFill/>
-          <a:ln/>
-        </p:spPr>
-        <p:txBody>
-          <a:bodyPr wrap="square" lIns="0" tIns="0" rIns="0" bIns="0" rtlCol="0" anchor="ctr"/>
-          <a:lstStyle/>
-          <a:p>
-            <a:pPr indent="0" marL="0">
-              <a:buNone/>
-            </a:pPr>
-            <a:r>
-              <a:rPr lang="en-US" sz="1275" b="1" dirty="0">
-                <a:solidFill>
-                  <a:srgbClr val="FFFFFF"/>
-                </a:solidFill>
-                <a:latin typeface="Calibri" pitchFamily="34" charset="0"/>
-                <a:ea typeface="Calibri" pitchFamily="34" charset="-122"/>
-                <a:cs typeface="Calibri" pitchFamily="34" charset="-120"/>
-              </a:rPr>
-              <a:t>Чат-бот + мини-приложение</a:t>
-            </a:r>
-            <a:endParaRPr lang="en-US" sz="1275" dirty="0"/>
-          </a:p>
-        </p:txBody>
-      </p:sp>
-      <p:sp>
-        <p:nvSpPr>
-          <p:cNvPr id="16" name="Text 13"/>
-          <p:cNvSpPr txBox="1"/>
-          <p:nvPr/>
-        </p:nvSpPr>
-        <p:spPr>
-          <a:xfrm>
-            <a:off x="2838450" y="5295900"/>
-            <a:ext cx="2571750" cy="190500"/>
-          </a:xfrm>
-          <a:prstGeom prst="rect">
-            <a:avLst/>
-          </a:prstGeom>
-          <a:noFill/>
-          <a:ln/>
-        </p:spPr>
-        <p:txBody>
-          <a:bodyPr wrap="square" lIns="0" tIns="0" rIns="0" bIns="0" rtlCol="0" anchor="ctr"/>
-          <a:lstStyle/>
-          <a:p>
-            <a:pPr indent="0" marL="0">
-              <a:buNone/>
-            </a:pPr>
-            <a:r>
-              <a:rPr lang="en-US" sz="1000" dirty="0">
-                <a:solidFill>
-                  <a:srgbClr val="A5ACBC"/>
-                </a:solidFill>
-                <a:latin typeface="Calibri" pitchFamily="34" charset="0"/>
-                <a:ea typeface="Calibri" pitchFamily="34" charset="-122"/>
-                <a:cs typeface="Calibri" pitchFamily="34" charset="-120"/>
-              </a:rPr>
-              <a:t>@t403_hakaton_max_bot</a:t>
-            </a:r>
-            <a:endParaRPr lang="en-US" sz="1000" dirty="0"/>
-          </a:p>
-        </p:txBody>
-      </p:sp>
-      <p:sp>
-        <p:nvSpPr>
-          <p:cNvPr id="17" name="Text 14"/>
-          <p:cNvSpPr txBox="1"/>
-          <p:nvPr/>
-        </p:nvSpPr>
-        <p:spPr>
-          <a:xfrm>
-            <a:off x="5848350" y="990600"/>
-            <a:ext cx="2857500" cy="152400"/>
-          </a:xfrm>
-          <a:prstGeom prst="rect">
-            <a:avLst/>
-          </a:prstGeom>
-          <a:noFill/>
-          <a:ln/>
-        </p:spPr>
-        <p:txBody>
-          <a:bodyPr wrap="square" lIns="0" tIns="0" rIns="0" bIns="0" rtlCol="0" anchor="ctr"/>
-          <a:lstStyle/>
-          <a:p>
-            <a:pPr indent="0" marL="0">
-              <a:buNone/>
-            </a:pPr>
-            <a:r>
-              <a:rPr lang="en-US" sz="825" b="1" spc="200" kern="0" dirty="0">
-                <a:solidFill>
-                  <a:srgbClr val="7B8190"/>
-                </a:solidFill>
-                <a:latin typeface="Calibri" pitchFamily="34" charset="0"/>
-                <a:ea typeface="Calibri" pitchFamily="34" charset="-122"/>
-                <a:cs typeface="Calibri" pitchFamily="34" charset="-120"/>
-              </a:rPr>
-              <a:t>ВЛАДЕЛЕЦ ОПИСЫВАЕТ БИЗНЕС</a:t>
-            </a:r>
-            <a:endParaRPr lang="en-US" sz="825" dirty="0"/>
-          </a:p>
-        </p:txBody>
-      </p:sp>
       <p:pic>
         <p:nvPicPr>
-          <p:cNvPr id="18" name="Image 1" descr="bubble-owner.png">    </p:cNvPr>
+          <p:cNvPr id="5" name="Image 1" descr="mark-max.png">    </p:cNvPr>
           <p:cNvPicPr>
             <a:picLocks noChangeAspect="1"/>
           </p:cNvPicPr>
@@ -16489,6 +15997,472 @@
         </p:blipFill>
         <p:spPr>
           <a:xfrm>
+            <a:off x="2371725" y="1333500"/>
+            <a:ext cx="304800" cy="304800"/>
+          </a:xfrm>
+          <a:prstGeom prst="rect">
+            <a:avLst/>
+          </a:prstGeom>
+        </p:spPr>
+      </p:pic>
+      <p:sp>
+        <p:nvSpPr>
+          <p:cNvPr id="6" name="Text 2"/>
+          <p:cNvSpPr txBox="1"/>
+          <p:nvPr/>
+        </p:nvSpPr>
+        <p:spPr>
+          <a:xfrm>
+            <a:off x="2752725" y="1333500"/>
+            <a:ext cx="762000" cy="304800"/>
+          </a:xfrm>
+          <a:prstGeom prst="rect">
+            <a:avLst/>
+          </a:prstGeom>
+          <a:noFill/>
+          <a:ln/>
+        </p:spPr>
+        <p:txBody>
+          <a:bodyPr wrap="square" lIns="0" tIns="0" rIns="0" bIns="0" rtlCol="0" anchor="ctr"/>
+          <a:lstStyle/>
+          <a:p>
+            <a:pPr indent="0" marL="0">
+              <a:buNone/>
+            </a:pPr>
+            <a:r>
+              <a:rPr lang="en-US" sz="1600" b="1" dirty="0">
+                <a:solidFill>
+                  <a:srgbClr val="FFFFFF"/>
+                </a:solidFill>
+                <a:latin typeface="Calibri" pitchFamily="34" charset="0"/>
+                <a:ea typeface="Calibri" pitchFamily="34" charset="-122"/>
+                <a:cs typeface="Calibri" pitchFamily="34" charset="-120"/>
+              </a:rPr>
+              <a:t>max</a:t>
+            </a:r>
+            <a:endParaRPr lang="en-US" sz="1600" dirty="0"/>
+          </a:p>
+        </p:txBody>
+      </p:sp>
+      <p:sp>
+        <p:nvSpPr>
+          <p:cNvPr id="7" name="Text 3"/>
+          <p:cNvSpPr txBox="1"/>
+          <p:nvPr/>
+        </p:nvSpPr>
+        <p:spPr>
+          <a:xfrm>
+            <a:off x="685800" y="1943100"/>
+            <a:ext cx="4953000" cy="190500"/>
+          </a:xfrm>
+          <a:prstGeom prst="rect">
+            <a:avLst/>
+          </a:prstGeom>
+          <a:noFill/>
+          <a:ln/>
+        </p:spPr>
+        <p:txBody>
+          <a:bodyPr wrap="square" lIns="0" tIns="0" rIns="0" bIns="0" rtlCol="0" anchor="ctr"/>
+          <a:lstStyle/>
+          <a:p>
+            <a:pPr indent="0" marL="0">
+              <a:buNone/>
+            </a:pPr>
+            <a:r>
+              <a:rPr lang="en-US" sz="860" b="1" spc="200" kern="0" dirty="0">
+                <a:solidFill>
+                  <a:srgbClr val="8EC4FF"/>
+                </a:solidFill>
+                <a:latin typeface="Calibri" pitchFamily="34" charset="0"/>
+                <a:ea typeface="Calibri" pitchFamily="34" charset="-122"/>
+                <a:cs typeface="Calibri" pitchFamily="34" charset="-120"/>
+              </a:rPr>
+              <a:t>ТРЕК «ЭФФЕКТИВНЫЙ БИЗНЕС»</a:t>
+            </a:r>
+            <a:endParaRPr lang="en-US" sz="860" dirty="0"/>
+          </a:p>
+        </p:txBody>
+      </p:sp>
+      <p:sp>
+        <p:nvSpPr>
+          <p:cNvPr id="8" name="Text 4"/>
+          <p:cNvSpPr txBox="1"/>
+          <p:nvPr/>
+        </p:nvSpPr>
+        <p:spPr>
+          <a:xfrm>
+            <a:off x="647700" y="2152650"/>
+            <a:ext cx="5334000" cy="1181100"/>
+          </a:xfrm>
+          <a:prstGeom prst="rect">
+            <a:avLst/>
+          </a:prstGeom>
+          <a:noFill/>
+          <a:ln/>
+        </p:spPr>
+        <p:txBody>
+          <a:bodyPr wrap="square" lIns="0" tIns="0" rIns="0" bIns="0" rtlCol="0" anchor="t"/>
+          <a:lstStyle/>
+          <a:p>
+            <a:pPr indent="0" marL="0">
+              <a:buNone/>
+            </a:pPr>
+            <a:r>
+              <a:rPr lang="en-US" sz="6400" b="1" dirty="0">
+                <a:solidFill>
+                  <a:srgbClr val="FFFFFF"/>
+                </a:solidFill>
+                <a:latin typeface="Calibri" pitchFamily="34" charset="0"/>
+                <a:ea typeface="Calibri" pitchFamily="34" charset="-122"/>
+                <a:cs typeface="Calibri" pitchFamily="34" charset="-120"/>
+              </a:rPr>
+              <a:t>AIRuntime</a:t>
+            </a:r>
+            <a:endParaRPr lang="en-US" sz="6400" dirty="0"/>
+          </a:p>
+        </p:txBody>
+      </p:sp>
+      <p:sp>
+        <p:nvSpPr>
+          <p:cNvPr id="9" name="Text 5"/>
+          <p:cNvSpPr txBox="1"/>
+          <p:nvPr/>
+        </p:nvSpPr>
+        <p:spPr>
+          <a:xfrm>
+            <a:off x="685800" y="3505200"/>
+            <a:ext cx="4762500" cy="876300"/>
+          </a:xfrm>
+          <a:prstGeom prst="rect">
+            <a:avLst/>
+          </a:prstGeom>
+          <a:noFill/>
+          <a:ln/>
+        </p:spPr>
+        <p:txBody>
+          <a:bodyPr wrap="square" lIns="0" tIns="0" rIns="0" bIns="0" rtlCol="0" anchor="t"/>
+          <a:lstStyle/>
+          <a:p>
+            <a:pPr indent="0" marL="0">
+              <a:lnSpc>
+                <a:spcPct val="115000"/>
+              </a:lnSpc>
+              <a:buNone/>
+            </a:pPr>
+            <a:r>
+              <a:rPr lang="en-US" sz="1600" dirty="0">
+                <a:solidFill>
+                  <a:srgbClr val="BDC4D2"/>
+                </a:solidFill>
+                <a:latin typeface="Calibri" pitchFamily="34" charset="0"/>
+                <a:ea typeface="Calibri" pitchFamily="34" charset="-122"/>
+                <a:cs typeface="Calibri" pitchFamily="34" charset="-120"/>
+              </a:rPr>
+              <a:t>Рабочий сервис записи в MAX из одного сообщения — без разработчика, без подрядчика, без ожидания.</a:t>
+            </a:r>
+            <a:endParaRPr lang="en-US" sz="1600" dirty="0"/>
+          </a:p>
+        </p:txBody>
+      </p:sp>
+      <p:sp>
+        <p:nvSpPr>
+          <p:cNvPr id="10" name="Text 6"/>
+          <p:cNvSpPr txBox="1"/>
+          <p:nvPr/>
+        </p:nvSpPr>
+        <p:spPr>
+          <a:xfrm>
+            <a:off x="685800" y="4810125"/>
+            <a:ext cx="1905000" cy="152400"/>
+          </a:xfrm>
+          <a:prstGeom prst="rect">
+            <a:avLst/>
+          </a:prstGeom>
+          <a:noFill/>
+          <a:ln/>
+        </p:spPr>
+        <p:txBody>
+          <a:bodyPr wrap="square" lIns="0" tIns="0" rIns="0" bIns="0" rtlCol="0" anchor="ctr"/>
+          <a:lstStyle/>
+          <a:p>
+            <a:pPr indent="0" marL="0">
+              <a:buNone/>
+            </a:pPr>
+            <a:r>
+              <a:rPr lang="en-US" sz="860" b="1" spc="200" kern="0" dirty="0">
+                <a:solidFill>
+                  <a:srgbClr val="7B8190"/>
+                </a:solidFill>
+                <a:latin typeface="Calibri" pitchFamily="34" charset="0"/>
+                <a:ea typeface="Calibri" pitchFamily="34" charset="-122"/>
+                <a:cs typeface="Calibri" pitchFamily="34" charset="-120"/>
+              </a:rPr>
+              <a:t>КОМАНДА</a:t>
+            </a:r>
+            <a:endParaRPr lang="en-US" sz="860" dirty="0"/>
+          </a:p>
+        </p:txBody>
+      </p:sp>
+      <p:sp>
+        <p:nvSpPr>
+          <p:cNvPr id="11" name="Text 7"/>
+          <p:cNvSpPr txBox="1"/>
+          <p:nvPr/>
+        </p:nvSpPr>
+        <p:spPr>
+          <a:xfrm>
+            <a:off x="685800" y="5029200"/>
+            <a:ext cx="2000250" cy="228600"/>
+          </a:xfrm>
+          <a:prstGeom prst="rect">
+            <a:avLst/>
+          </a:prstGeom>
+          <a:noFill/>
+          <a:ln/>
+        </p:spPr>
+        <p:txBody>
+          <a:bodyPr wrap="square" lIns="0" tIns="0" rIns="0" bIns="0" rtlCol="0" anchor="ctr"/>
+          <a:lstStyle/>
+          <a:p>
+            <a:pPr indent="0" marL="0">
+              <a:buNone/>
+            </a:pPr>
+            <a:r>
+              <a:rPr lang="en-US" sz="1275" b="1" u="dash" dirty="0">
+                <a:solidFill>
+                  <a:srgbClr val="8F96A6"/>
+                </a:solidFill>
+                <a:uFill>
+                  <a:solidFill>
+                    <a:srgbClr val="59627A"/>
+                  </a:solidFill>
+                </a:uFill>
+                <a:latin typeface="Calibri" pitchFamily="34" charset="0"/>
+                <a:ea typeface="Calibri" pitchFamily="34" charset="-122"/>
+                <a:cs typeface="Calibri" pitchFamily="34" charset="-120"/>
+              </a:rPr>
+              <a:t>[Название команды]</a:t>
+            </a:r>
+            <a:endParaRPr lang="en-US" sz="1275" dirty="0"/>
+          </a:p>
+        </p:txBody>
+      </p:sp>
+      <p:sp>
+        <p:nvSpPr>
+          <p:cNvPr id="12" name="Text 8"/>
+          <p:cNvSpPr txBox="1"/>
+          <p:nvPr/>
+        </p:nvSpPr>
+        <p:spPr>
+          <a:xfrm>
+            <a:off x="685800" y="5295900"/>
+            <a:ext cx="2000250" cy="190500"/>
+          </a:xfrm>
+          <a:prstGeom prst="rect">
+            <a:avLst/>
+          </a:prstGeom>
+          <a:noFill/>
+          <a:ln/>
+        </p:spPr>
+        <p:txBody>
+          <a:bodyPr wrap="square" lIns="0" tIns="0" rIns="0" bIns="0" rtlCol="0" anchor="ctr"/>
+          <a:lstStyle/>
+          <a:p>
+            <a:pPr indent="0" marL="0">
+              <a:buNone/>
+            </a:pPr>
+            <a:r>
+              <a:rPr lang="en-US" sz="1000" u="dash" dirty="0">
+                <a:solidFill>
+                  <a:srgbClr val="8F96A6"/>
+                </a:solidFill>
+                <a:uFill>
+                  <a:solidFill>
+                    <a:srgbClr val="59627A"/>
+                  </a:solidFill>
+                </a:uFill>
+                <a:latin typeface="Calibri" pitchFamily="34" charset="0"/>
+                <a:ea typeface="Calibri" pitchFamily="34" charset="-122"/>
+                <a:cs typeface="Calibri" pitchFamily="34" charset="-120"/>
+              </a:rPr>
+              <a:t>[Участники и роли]</a:t>
+            </a:r>
+            <a:endParaRPr lang="en-US" sz="1000" dirty="0"/>
+          </a:p>
+        </p:txBody>
+      </p:sp>
+      <p:sp>
+        <p:nvSpPr>
+          <p:cNvPr id="13" name="Text 9"/>
+          <p:cNvSpPr txBox="1"/>
+          <p:nvPr/>
+        </p:nvSpPr>
+        <p:spPr>
+          <a:xfrm>
+            <a:off x="2838450" y="4810125"/>
+            <a:ext cx="2381250" cy="152400"/>
+          </a:xfrm>
+          <a:prstGeom prst="rect">
+            <a:avLst/>
+          </a:prstGeom>
+          <a:noFill/>
+          <a:ln/>
+        </p:spPr>
+        <p:txBody>
+          <a:bodyPr wrap="square" lIns="0" tIns="0" rIns="0" bIns="0" rtlCol="0" anchor="ctr"/>
+          <a:lstStyle/>
+          <a:p>
+            <a:pPr indent="0" marL="0">
+              <a:buNone/>
+            </a:pPr>
+            <a:r>
+              <a:rPr lang="en-US" sz="860" b="1" spc="200" kern="0" dirty="0">
+                <a:solidFill>
+                  <a:srgbClr val="7B8190"/>
+                </a:solidFill>
+                <a:latin typeface="Calibri" pitchFamily="34" charset="0"/>
+                <a:ea typeface="Calibri" pitchFamily="34" charset="-122"/>
+                <a:cs typeface="Calibri" pitchFamily="34" charset="-120"/>
+              </a:rPr>
+              <a:t>РЕШЕНИЕ</a:t>
+            </a:r>
+            <a:endParaRPr lang="en-US" sz="860" dirty="0"/>
+          </a:p>
+        </p:txBody>
+      </p:sp>
+      <p:sp>
+        <p:nvSpPr>
+          <p:cNvPr id="14" name="Text 10"/>
+          <p:cNvSpPr txBox="1"/>
+          <p:nvPr/>
+        </p:nvSpPr>
+        <p:spPr>
+          <a:xfrm>
+            <a:off x="2838450" y="5029200"/>
+            <a:ext cx="2571750" cy="228600"/>
+          </a:xfrm>
+          <a:prstGeom prst="rect">
+            <a:avLst/>
+          </a:prstGeom>
+          <a:noFill/>
+          <a:ln/>
+        </p:spPr>
+        <p:txBody>
+          <a:bodyPr wrap="square" lIns="0" tIns="0" rIns="0" bIns="0" rtlCol="0" anchor="ctr"/>
+          <a:lstStyle/>
+          <a:p>
+            <a:pPr indent="0" marL="0">
+              <a:buNone/>
+            </a:pPr>
+            <a:r>
+              <a:rPr lang="en-US" sz="1275" b="1" dirty="0">
+                <a:solidFill>
+                  <a:srgbClr val="FFFFFF"/>
+                </a:solidFill>
+                <a:latin typeface="Calibri" pitchFamily="34" charset="0"/>
+                <a:ea typeface="Calibri" pitchFamily="34" charset="-122"/>
+                <a:cs typeface="Calibri" pitchFamily="34" charset="-120"/>
+              </a:rPr>
+              <a:t>Чат-бот + мини-приложение</a:t>
+            </a:r>
+            <a:endParaRPr lang="en-US" sz="1275" dirty="0"/>
+          </a:p>
+        </p:txBody>
+      </p:sp>
+      <p:sp>
+        <p:nvSpPr>
+          <p:cNvPr id="15" name="Text 11"/>
+          <p:cNvSpPr txBox="1"/>
+          <p:nvPr/>
+        </p:nvSpPr>
+        <p:spPr>
+          <a:xfrm>
+            <a:off x="2838450" y="5295900"/>
+            <a:ext cx="2571750" cy="190500"/>
+          </a:xfrm>
+          <a:prstGeom prst="rect">
+            <a:avLst/>
+          </a:prstGeom>
+          <a:noFill/>
+          <a:ln/>
+        </p:spPr>
+        <p:txBody>
+          <a:bodyPr wrap="square" lIns="0" tIns="0" rIns="0" bIns="0" rtlCol="0" anchor="ctr"/>
+          <a:lstStyle/>
+          <a:p>
+            <a:pPr indent="0" marL="0">
+              <a:buNone/>
+            </a:pPr>
+            <a:r>
+              <a:rPr lang="en-US" sz="1000" dirty="0">
+                <a:solidFill>
+                  <a:srgbClr val="A5ACBC"/>
+                </a:solidFill>
+                <a:latin typeface="Calibri" pitchFamily="34" charset="0"/>
+                <a:ea typeface="Calibri" pitchFamily="34" charset="-122"/>
+                <a:cs typeface="Calibri" pitchFamily="34" charset="-120"/>
+              </a:rPr>
+              <a:t>@t403_hakaton_max_bot</a:t>
+            </a:r>
+            <a:endParaRPr lang="en-US" sz="1000" dirty="0"/>
+          </a:p>
+        </p:txBody>
+      </p:sp>
+      <p:sp>
+        <p:nvSpPr>
+          <p:cNvPr id="16" name="Text 12"/>
+          <p:cNvSpPr txBox="1"/>
+          <p:nvPr/>
+        </p:nvSpPr>
+        <p:spPr>
+          <a:xfrm>
+            <a:off x="5848350" y="990600"/>
+            <a:ext cx="2857500" cy="152400"/>
+          </a:xfrm>
+          <a:prstGeom prst="rect">
+            <a:avLst/>
+          </a:prstGeom>
+          <a:noFill/>
+          <a:ln/>
+        </p:spPr>
+        <p:txBody>
+          <a:bodyPr wrap="square" lIns="0" tIns="0" rIns="0" bIns="0" rtlCol="0" anchor="ctr"/>
+          <a:lstStyle/>
+          <a:p>
+            <a:pPr indent="0" marL="0">
+              <a:buNone/>
+            </a:pPr>
+            <a:r>
+              <a:rPr lang="en-US" sz="825" b="1" spc="200" kern="0" dirty="0">
+                <a:solidFill>
+                  <a:srgbClr val="7B8190"/>
+                </a:solidFill>
+                <a:latin typeface="Calibri" pitchFamily="34" charset="0"/>
+                <a:ea typeface="Calibri" pitchFamily="34" charset="-122"/>
+                <a:cs typeface="Calibri" pitchFamily="34" charset="-120"/>
+              </a:rPr>
+              <a:t>ВЛАДЕЛЕЦ ОПИСЫВАЕТ БИЗНЕС</a:t>
+            </a:r>
+            <a:endParaRPr lang="en-US" sz="825" dirty="0"/>
+          </a:p>
+        </p:txBody>
+      </p:sp>
+      <p:pic>
+        <p:nvPicPr>
+          <p:cNvPr id="17" name="Image 2" descr="bubble-owner.png">    </p:cNvPr>
+          <p:cNvPicPr>
+            <a:picLocks noChangeAspect="1"/>
+          </p:cNvPicPr>
+          <p:nvPr/>
+        </p:nvPicPr>
+        <p:blipFill>
+          <a:blip r:embed="rId4"/>
+          <a:stretch>
+            <a:fillRect/>
+          </a:stretch>
+        </p:blipFill>
+        <p:spPr>
+          <a:xfrm>
             <a:off x="5848350" y="1257300"/>
             <a:ext cx="2590800" cy="1047750"/>
           </a:xfrm>
@@ -16499,7 +16473,7 @@
       </p:pic>
       <p:sp>
         <p:nvSpPr>
-          <p:cNvPr id="19" name="Text 15"/>
+          <p:cNvPr id="18" name="Text 13"/>
           <p:cNvSpPr txBox="1"/>
           <p:nvPr/>
         </p:nvSpPr>
@@ -16541,7 +16515,7 @@
       </p:sp>
       <p:sp>
         <p:nvSpPr>
-          <p:cNvPr id="20" name="Shape 16"/>
+          <p:cNvPr id="19" name="Shape 14"/>
           <p:cNvSpPr/>
           <p:nvPr/>
         </p:nvSpPr>
@@ -16575,14 +16549,14 @@
       </p:sp>
       <p:pic>
         <p:nvPicPr>
-          <p:cNvPr id="21" name="Image 2" descr="screen-storefront.png">    </p:cNvPr>
+          <p:cNvPr id="20" name="Image 3" descr="screen-storefront.png">    </p:cNvPr>
           <p:cNvPicPr>
             <a:picLocks noChangeAspect="1"/>
           </p:cNvPicPr>
           <p:nvPr/>
         </p:nvPicPr>
         <p:blipFill>
-          <a:blip r:embed="rId4"/>
+          <a:blip r:embed="rId5"/>
           <a:stretch>
             <a:fillRect/>
           </a:stretch>
@@ -16599,7 +16573,7 @@
       </p:pic>
       <p:sp>
         <p:nvSpPr>
-          <p:cNvPr id="22" name="Shape 17"/>
+          <p:cNvPr id="21" name="Shape 15"/>
           <p:cNvSpPr/>
           <p:nvPr/>
         </p:nvSpPr>
@@ -16633,7 +16607,7 @@
       </p:sp>
       <p:sp>
         <p:nvSpPr>
-          <p:cNvPr id="23" name="Shape 18"/>
+          <p:cNvPr id="22" name="Shape 16"/>
           <p:cNvSpPr/>
           <p:nvPr/>
         </p:nvSpPr>
@@ -16658,7 +16632,7 @@
       </p:sp>
       <p:sp>
         <p:nvSpPr>
-          <p:cNvPr id="24" name="Text 19"/>
+          <p:cNvPr id="23" name="Text 17"/>
           <p:cNvSpPr txBox="1"/>
           <p:nvPr/>
         </p:nvSpPr>
@@ -16697,7 +16671,7 @@
       </p:sp>
       <p:sp>
         <p:nvSpPr>
-          <p:cNvPr id="25" name="Text 20"/>
+          <p:cNvPr id="24" name="Text 18"/>
           <p:cNvSpPr txBox="1"/>
           <p:nvPr/>
         </p:nvSpPr>
@@ -16728,7 +16702,7 @@
                 <a:ea typeface="Calibri" pitchFamily="34" charset="-122"/>
                 <a:cs typeface="Calibri" pitchFamily="34" charset="-120"/>
               </a:rPr>
-              <a:t>Витрина готова</a:t>
+              <a:t>AIRuntime готов</a:t>
             </a:r>
             <a:endParaRPr lang="en-US" sz="1250" dirty="0"/>
           </a:p>
@@ -16736,7 +16710,7 @@
       </p:sp>
       <p:sp>
         <p:nvSpPr>
-          <p:cNvPr id="26" name="Text 21"/>
+          <p:cNvPr id="25" name="Text 19"/>
           <p:cNvSpPr txBox="1"/>
           <p:nvPr/>
         </p:nvSpPr>
@@ -16778,7 +16752,7 @@
       </p:sp>
       <p:sp>
         <p:nvSpPr>
-          <p:cNvPr id="27" name="Shape 22"/>
+          <p:cNvPr id="26" name="Shape 20"/>
           <p:cNvSpPr/>
           <p:nvPr/>
         </p:nvSpPr>
@@ -16805,7 +16779,7 @@
       </p:sp>
       <p:sp>
         <p:nvSpPr>
-          <p:cNvPr id="28" name="Text 23"/>
+          <p:cNvPr id="27" name="Text 21"/>
           <p:cNvSpPr txBox="1"/>
           <p:nvPr/>
         </p:nvSpPr>
@@ -16844,7 +16818,7 @@
       </p:sp>
       <p:sp>
         <p:nvSpPr>
-          <p:cNvPr id="29" name="Text 24"/>
+          <p:cNvPr id="28" name="Text 22"/>
           <p:cNvSpPr txBox="1"/>
           <p:nvPr/>
         </p:nvSpPr>
@@ -16883,7 +16857,7 @@
       </p:sp>
       <p:sp>
         <p:nvSpPr>
-          <p:cNvPr id="30" name="Text 25"/>
+          <p:cNvPr id="29" name="Text 23"/>
           <p:cNvSpPr txBox="1"/>
           <p:nvPr/>
         </p:nvSpPr>
@@ -17236,7 +17210,7 @@
                 <a:ea typeface="Calibri" pitchFamily="34" charset="-122"/>
                 <a:cs typeface="Calibri" pitchFamily="34" charset="-120"/>
               </a:rPr>
-              <a:t>Один владелец на витрину, до 10 витрин</a:t>
+              <a:t>Один владелец на сервис, до 10 сервисов</a:t>
             </a:r>
             <a:endParaRPr lang="en-US" sz="1200" dirty="0"/>
           </a:p>
@@ -17718,7 +17692,7 @@
                 <a:ea typeface="Calibri" pitchFamily="34" charset="-122"/>
                 <a:cs typeface="Calibri" pitchFamily="34" charset="-120"/>
               </a:rPr>
-              <a:t> — витрина собирается шаблоном, сценарий не блокируется</a:t>
+              <a:t> — сервис собирается шаблоном, сценарий не блокируется</a:t>
             </a:r>
             <a:endParaRPr lang="en-US" sz="1200" dirty="0"/>
           </a:p>
@@ -17753,7 +17727,7 @@
                 <a:ea typeface="Calibri" pitchFamily="34" charset="-122"/>
                 <a:cs typeface="Calibri" pitchFamily="34" charset="-120"/>
               </a:rPr>
-              <a:t> — при росте нужна проверка содержимого витрин</a:t>
+              <a:t> — при росте нужна проверка содержимого сервисов</a:t>
             </a:r>
             <a:endParaRPr lang="en-US" sz="1200" dirty="0"/>
           </a:p>
@@ -17840,7 +17814,7 @@
                 <a:ea typeface="Calibri" pitchFamily="34" charset="-122"/>
                 <a:cs typeface="Calibri" pitchFamily="34" charset="-120"/>
               </a:rPr>
-              <a:t> сквозной путь «описание → витрина → запись → заявка владельцу → ответ клиенту» проходит на проде целиком и покрыт 54 автотестами — включая подделку подписи, чужой токен, просроченные параметры и запись на услугу, которой в витрине нет.</a:t>
+              <a:t> сквозной путь «описание → сервис → запись → заявка владельцу → ответ клиенту» проходит на проде целиком и покрыт 54 автотестами — включая подделку подписи, чужой токен, просроченные параметры и запись на услугу, которой в сервисе нет.</a:t>
             </a:r>
             <a:endParaRPr lang="en-US" sz="1250" dirty="0"/>
           </a:p>
@@ -18837,65 +18811,39 @@
           </a:p>
         </p:txBody>
       </p:sp>
-      <p:sp>
-        <p:nvSpPr>
-          <p:cNvPr id="5" name="Shape 2"/>
-          <p:cNvSpPr/>
-          <p:nvPr/>
-        </p:nvSpPr>
-        <p:spPr>
-          <a:xfrm>
-            <a:off x="2371725" y="1281113"/>
-            <a:ext cx="219075" cy="219075"/>
-          </a:xfrm>
-          <a:prstGeom prst="ellipse">
-            <a:avLst/>
-          </a:prstGeom>
-          <a:solidFill>
-            <a:srgbClr val="FFFFFF"/>
-          </a:solidFill>
-          <a:ln w="12700">
-            <a:solidFill>
-              <a:srgbClr val="FFFFFF"/>
-            </a:solidFill>
-            <a:prstDash val="solid"/>
-          </a:ln>
-        </p:spPr>
-      </p:sp>
-      <p:sp>
-        <p:nvSpPr>
-          <p:cNvPr id="6" name="Shape 3"/>
-          <p:cNvSpPr/>
-          <p:nvPr/>
-        </p:nvSpPr>
-        <p:spPr>
-          <a:xfrm>
-            <a:off x="2443163" y="1352550"/>
-            <a:ext cx="76200" cy="76200"/>
-          </a:xfrm>
-          <a:prstGeom prst="ellipse">
-            <a:avLst/>
-          </a:prstGeom>
-          <a:solidFill>
-            <a:srgbClr val="0077FF"/>
-          </a:solidFill>
-          <a:ln w="12700">
-            <a:solidFill>
-              <a:srgbClr val="0077FF"/>
-            </a:solidFill>
-            <a:prstDash val="solid"/>
-          </a:ln>
-        </p:spPr>
-      </p:sp>
-      <p:sp>
-        <p:nvSpPr>
-          <p:cNvPr id="7" name="Text 4"/>
-          <p:cNvSpPr txBox="1"/>
-          <p:nvPr/>
-        </p:nvSpPr>
-        <p:spPr>
-          <a:xfrm>
-            <a:off x="2667000" y="1238250"/>
+      <p:pic>
+        <p:nvPicPr>
+          <p:cNvPr id="5" name="Image 1" descr="mark-max.png">    </p:cNvPr>
+          <p:cNvPicPr>
+            <a:picLocks noChangeAspect="1"/>
+          </p:cNvPicPr>
+          <p:nvPr/>
+        </p:nvPicPr>
+        <p:blipFill>
+          <a:blip r:embed="rId3"/>
+          <a:stretch>
+            <a:fillRect/>
+          </a:stretch>
+        </p:blipFill>
+        <p:spPr>
+          <a:xfrm>
+            <a:off x="2371725" y="1238250"/>
+            <a:ext cx="304800" cy="304800"/>
+          </a:xfrm>
+          <a:prstGeom prst="rect">
+            <a:avLst/>
+          </a:prstGeom>
+        </p:spPr>
+      </p:pic>
+      <p:sp>
+        <p:nvSpPr>
+          <p:cNvPr id="6" name="Text 2"/>
+          <p:cNvSpPr txBox="1"/>
+          <p:nvPr/>
+        </p:nvSpPr>
+        <p:spPr>
+          <a:xfrm>
+            <a:off x="2752725" y="1238250"/>
             <a:ext cx="762000" cy="304800"/>
           </a:xfrm>
           <a:prstGeom prst="rect">
@@ -18928,7 +18876,7 @@
       </p:sp>
       <p:sp>
         <p:nvSpPr>
-          <p:cNvPr id="8" name="Text 5"/>
+          <p:cNvPr id="7" name="Text 3"/>
           <p:cNvSpPr txBox="1"/>
           <p:nvPr/>
         </p:nvSpPr>
@@ -18967,7 +18915,7 @@
       </p:sp>
       <p:sp>
         <p:nvSpPr>
-          <p:cNvPr id="9" name="Text 6"/>
+          <p:cNvPr id="8" name="Text 4"/>
           <p:cNvSpPr txBox="1"/>
           <p:nvPr/>
         </p:nvSpPr>
@@ -19029,7 +18977,7 @@
       </p:sp>
       <p:sp>
         <p:nvSpPr>
-          <p:cNvPr id="10" name="Text 7"/>
+          <p:cNvPr id="9" name="Text 5"/>
           <p:cNvSpPr txBox="1"/>
           <p:nvPr/>
         </p:nvSpPr>
@@ -19063,7 +19011,7 @@
                 <a:ea typeface="Calibri" pitchFamily="34" charset="-122"/>
                 <a:cs typeface="Calibri" pitchFamily="34" charset="-120"/>
               </a:rPr>
-              <a:t>Бот и мини-приложение работают прямо сейчас. Опишите бизнес одним сообщением — секунд через десять у клиентов будет витрина с записью, а у вас заявки в чате.</a:t>
+              <a:t>Бот и мини-приложение работают прямо сейчас. Опишите бизнес одним сообщением — секунд через десять у клиентов будет страница записи, а у вас заявки в чате.</a:t>
             </a:r>
             <a:endParaRPr lang="en-US" sz="1450" dirty="0"/>
           </a:p>
@@ -19071,7 +19019,7 @@
       </p:sp>
       <p:sp>
         <p:nvSpPr>
-          <p:cNvPr id="11" name="Text 8"/>
+          <p:cNvPr id="10" name="Text 6"/>
           <p:cNvSpPr txBox="1"/>
           <p:nvPr/>
         </p:nvSpPr>
@@ -19110,7 +19058,7 @@
       </p:sp>
       <p:sp>
         <p:nvSpPr>
-          <p:cNvPr id="12" name="Text 9"/>
+          <p:cNvPr id="11" name="Text 7"/>
           <p:cNvSpPr txBox="1"/>
           <p:nvPr/>
         </p:nvSpPr>
@@ -19149,7 +19097,7 @@
       </p:sp>
       <p:sp>
         <p:nvSpPr>
-          <p:cNvPr id="13" name="Text 10"/>
+          <p:cNvPr id="12" name="Text 8"/>
           <p:cNvSpPr txBox="1"/>
           <p:nvPr/>
         </p:nvSpPr>
@@ -19188,7 +19136,7 @@
       </p:sp>
       <p:sp>
         <p:nvSpPr>
-          <p:cNvPr id="14" name="Text 11"/>
+          <p:cNvPr id="13" name="Text 9"/>
           <p:cNvSpPr txBox="1"/>
           <p:nvPr/>
         </p:nvSpPr>
@@ -19227,7 +19175,7 @@
       </p:sp>
       <p:sp>
         <p:nvSpPr>
-          <p:cNvPr id="15" name="Text 12"/>
+          <p:cNvPr id="14" name="Text 10"/>
           <p:cNvSpPr txBox="1"/>
           <p:nvPr/>
         </p:nvSpPr>
@@ -19266,7 +19214,7 @@
       </p:sp>
       <p:sp>
         <p:nvSpPr>
-          <p:cNvPr id="16" name="Text 13"/>
+          <p:cNvPr id="15" name="Text 11"/>
           <p:cNvSpPr txBox="1"/>
           <p:nvPr/>
         </p:nvSpPr>
@@ -19305,7 +19253,7 @@
       </p:sp>
       <p:sp>
         <p:nvSpPr>
-          <p:cNvPr id="17" name="Shape 14"/>
+          <p:cNvPr id="16" name="Shape 12"/>
           <p:cNvSpPr/>
           <p:nvPr/>
         </p:nvSpPr>
@@ -19339,14 +19287,14 @@
       </p:sp>
       <p:pic>
         <p:nvPicPr>
-          <p:cNvPr id="18" name="Image 1" descr="qr-bot.png">    </p:cNvPr>
+          <p:cNvPr id="17" name="Image 2" descr="qr-bot.png">    </p:cNvPr>
           <p:cNvPicPr>
             <a:picLocks noChangeAspect="1"/>
           </p:cNvPicPr>
           <p:nvPr/>
         </p:nvPicPr>
         <p:blipFill>
-          <a:blip r:embed="rId3"/>
+          <a:blip r:embed="rId4"/>
           <a:stretch>
             <a:fillRect/>
           </a:stretch>
@@ -19363,7 +19311,7 @@
       </p:pic>
       <p:sp>
         <p:nvSpPr>
-          <p:cNvPr id="19" name="Text 15"/>
+          <p:cNvPr id="18" name="Text 13"/>
           <p:cNvSpPr txBox="1"/>
           <p:nvPr/>
         </p:nvSpPr>
@@ -19402,7 +19350,7 @@
       </p:sp>
       <p:sp>
         <p:nvSpPr>
-          <p:cNvPr id="20" name="Text 16"/>
+          <p:cNvPr id="19" name="Text 14"/>
           <p:cNvSpPr txBox="1"/>
           <p:nvPr/>
         </p:nvSpPr>
@@ -19436,7 +19384,7 @@
                 <a:ea typeface="Calibri" pitchFamily="34" charset="-122"/>
                 <a:cs typeface="Calibri" pitchFamily="34" charset="-120"/>
               </a:rPr>
-              <a:t>Откроется бот в MAX — опишите свой бизнес и получите витрину</a:t>
+              <a:t>Откроется бот в MAX — опишите свой бизнес и получите страницу записи</a:t>
             </a:r>
             <a:endParaRPr lang="en-US" sz="1100" dirty="0"/>
           </a:p>
@@ -19444,7 +19392,7 @@
       </p:sp>
       <p:sp>
         <p:nvSpPr>
-          <p:cNvPr id="21" name="Text 17"/>
+          <p:cNvPr id="20" name="Text 15"/>
           <p:cNvSpPr txBox="1"/>
           <p:nvPr/>
         </p:nvSpPr>
@@ -19505,7 +19453,7 @@
       </p:sp>
       <p:sp>
         <p:nvSpPr>
-          <p:cNvPr id="22" name="Text 18"/>
+          <p:cNvPr id="21" name="Text 16"/>
           <p:cNvSpPr txBox="1"/>
           <p:nvPr/>
         </p:nvSpPr>
@@ -19646,7 +19594,7 @@
                 <a:ea typeface="Calibri" pitchFamily="34" charset="-122"/>
                 <a:cs typeface="Calibri" pitchFamily="34" charset="-120"/>
               </a:rPr>
-              <a:t>Витрина: запись в MAX из одного сообщения</a:t>
+              <a:t>AIRuntime: запись в MAX из одного сообщения</a:t>
             </a:r>
             <a:endParaRPr lang="en-US" sz="3200" dirty="0"/>
           </a:p>
@@ -19688,7 +19636,7 @@
                 <a:ea typeface="Calibri" pitchFamily="34" charset="-122"/>
                 <a:cs typeface="Calibri" pitchFamily="34" charset="-120"/>
               </a:rPr>
-              <a:t>Владелец микробизнеса услуг описывает бизнес одним сообщением в мини-приложении MAX — через ~10 секунд у него опубликованная витрина с онлайн-записью. Клиенты записываются, не выходя из MAX, заявки приходят владельцу в чат.</a:t>
+              <a:t>Владелец микробизнеса услуг описывает бизнес одним сообщением в мини-приложении MAX — через ~10 секунд у него опубликованный сервис с онлайн-записью. Клиенты записываются, не выходя из MAX, заявки приходят владельцу в чат.</a:t>
             </a:r>
             <a:endParaRPr lang="en-US" sz="1500" dirty="0"/>
           </a:p>
@@ -20036,7 +19984,7 @@
                 <a:ea typeface="Calibri" pitchFamily="34" charset="-122"/>
                 <a:cs typeface="Calibri" pitchFamily="34" charset="-120"/>
               </a:rPr>
-              <a:t>Чат-бот и мини-приложение в MAX: описание → витрина с услугами, ценами и временем → запись → заявка владельцу → ответ клиенту.</a:t>
+              <a:t>Чат-бот и мини-приложение в MAX: описание → сервис с услугами, ценами и временем → запись → заявка владельцу → ответ клиенту.</a:t>
             </a:r>
             <a:endParaRPr lang="en-US" sz="1500" dirty="0"/>
           </a:p>
@@ -20267,7 +20215,7 @@
                 <a:ea typeface="Calibri" pitchFamily="34" charset="-122"/>
                 <a:cs typeface="Calibri" pitchFamily="34" charset="-120"/>
               </a:rPr>
-              <a:t>сообщение от владельца до готовой витрины</a:t>
+              <a:t>сообщение от владельца до готового AIRuntime</a:t>
             </a:r>
             <a:endParaRPr lang="en-US" sz="1100" dirty="0"/>
           </a:p>
@@ -24136,7 +24084,7 @@
         <p:spPr>
           <a:xfrm>
             <a:off x="6469380" y="1874520"/>
-            <a:ext cx="1380744" cy="246888"/>
+            <a:ext cx="1449324" cy="246888"/>
           </a:xfrm>
           <a:prstGeom prst="roundRect">
             <a:avLst>
@@ -24163,7 +24111,7 @@
         <p:spPr>
           <a:xfrm>
             <a:off x="6469380" y="1874520"/>
-            <a:ext cx="1380744" cy="246888"/>
+            <a:ext cx="1449324" cy="246888"/>
           </a:xfrm>
           <a:prstGeom prst="rect">
             <a:avLst/>
@@ -24187,7 +24135,7 @@
                 <a:ea typeface="Calibri" pitchFamily="34" charset="-122"/>
                 <a:cs typeface="Calibri" pitchFamily="34" charset="-120"/>
               </a:rPr>
-              <a:t>To Be — с Витриной</a:t>
+              <a:t>To Be — с AIRuntime</a:t>
             </a:r>
             <a:endParaRPr lang="en-US" sz="950" dirty="0"/>
           </a:p>
@@ -24244,7 +24192,7 @@
                 <a:ea typeface="Calibri" pitchFamily="34" charset="-122"/>
                 <a:cs typeface="Calibri" pitchFamily="34" charset="-120"/>
               </a:rPr>
-              <a:t> пересказ прайса: услуги и цены видны в витрине</a:t>
+              <a:t> пересказ прайса: услуги и цены видны в AIRuntime</a:t>
             </a:r>
             <a:endParaRPr lang="en-US" sz="1250" dirty="0"/>
           </a:p>
@@ -24495,7 +24443,7 @@
                 <a:ea typeface="Calibri" pitchFamily="34" charset="-122"/>
                 <a:cs typeface="Calibri" pitchFamily="34" charset="-120"/>
               </a:rPr>
-              <a:t> Если мы поможем владельцу микросервиса принимать записи витриной в MAX, собранной из одного сообщения, доля заявок, дошедших до подтверждения, вырастет, а время на переписку сократится — потому что клиент проходит путь сам, а владельцу остаётся одно решение. Как это проверить — слайд 11.</a:t>
+              <a:t> Если мы поможем владельцу микросервиса принимать записи через AIRuntime в MAX, собранной из одного сообщения, доля заявок, дошедших до подтверждения, вырастет, а время на переписку сократится — потому что клиент проходит путь сам, а владельцу остаётся одно решение. Как это проверить — слайд 11.</a:t>
             </a:r>
             <a:endParaRPr lang="en-US" sz="1350" dirty="0"/>
           </a:p>
@@ -24989,7 +24937,7 @@
                           <a:ea typeface="Calibri" pitchFamily="34" charset="-122"/>
                           <a:cs typeface="Calibri" pitchFamily="34" charset="-120"/>
                         </a:rPr>
-                        <a:t>ВИТРИНА В MAX</a:t>
+                        <a:t>AIRUNTIME В MAX</a:t>
                       </a:r>
                       <a:endParaRPr lang="en-US" sz="950" dirty="0">
                         <a:latin typeface="Calibri" charset="0"/>
@@ -26782,7 +26730,7 @@
                 <a:ea typeface="Calibri" pitchFamily="34" charset="-122"/>
                 <a:cs typeface="Calibri" pitchFamily="34" charset="-120"/>
               </a:rPr>
-              <a:t>Владелец: одно сообщение → опубликованная витрина</a:t>
+              <a:t>Владелец: одно сообщение → опубликованный сервис</a:t>
             </a:r>
             <a:endParaRPr lang="en-US" sz="3200" dirty="0"/>
           </a:p>
@@ -26824,7 +26772,7 @@
                 <a:ea typeface="Calibri" pitchFamily="34" charset="-122"/>
                 <a:cs typeface="Calibri" pitchFamily="34" charset="-120"/>
               </a:rPr>
-              <a:t>Вход — «Начать» в чат-боте, затем «Открыть Витрину». Регистрации нет: аккаунт MAX и есть вход.</a:t>
+              <a:t>Вход — «Начать» в чат-боте, затем «Открыть AIRuntime». Регистрации нет: аккаунт MAX и есть вход.</a:t>
             </a:r>
             <a:endParaRPr lang="en-US" sz="1400" dirty="0"/>
           </a:p>
@@ -27241,7 +27189,7 @@
                 <a:ea typeface="Calibri" pitchFamily="34" charset="-122"/>
                 <a:cs typeface="Calibri" pitchFamily="34" charset="-120"/>
               </a:rPr>
-              <a:t>«✓ Витрина готова»: ссылка, «Поделиться» в чаты MAX, «Посмотреть» глазами клиента.</a:t>
+              <a:t>«✓ AIRuntime готов»: ссылка, «Поделиться» в чаты MAX, «Посмотреть» глазами клиента.</a:t>
             </a:r>
             <a:endParaRPr lang="en-US" sz="1050" dirty="0"/>
           </a:p>
@@ -27493,7 +27441,7 @@
                 <a:ea typeface="Calibri" pitchFamily="34" charset="-122"/>
                 <a:cs typeface="Calibri" pitchFamily="34" charset="-120"/>
               </a:rPr>
-              <a:t>Клиент открывает ссылку или QR-код владельца — витрина сразу внутри MAX, без установки и регистрации.</a:t>
+              <a:t>Клиент открывает ссылку или QR-код владельца — сервис сразу внутри MAX, без установки и регистрации.</a:t>
             </a:r>
             <a:endParaRPr lang="en-US" sz="1400" dirty="0"/>
           </a:p>

--- a/docs/max-presentation/presentation.pptx
+++ b/docs/max-presentation/presentation.pptx
@@ -5623,7 +5623,7 @@
                 <a:ea typeface="Calibri" pitchFamily="34" charset="-122"/>
                 <a:cs typeface="Calibri" pitchFamily="34" charset="-120"/>
               </a:rPr>
-              <a:t> — открыл AIRuntime → отправил заявку</a:t>
+              <a:t> — открыл страницу записи → отправил заявку</a:t>
             </a:r>
             <a:endParaRPr lang="en-US" sz="1250" dirty="0"/>
           </a:p>
@@ -7351,7 +7351,7 @@
                 <a:ea typeface="Calibri" pitchFamily="34" charset="-122"/>
                 <a:cs typeface="Calibri" pitchFamily="34" charset="-120"/>
               </a:rPr>
-              <a:t>Код под каждый бизнес: AIRuntime — это данные</a:t>
+              <a:t>Код под каждый бизнес: сервис — это данные</a:t>
             </a:r>
             <a:endParaRPr lang="en-US" sz="1200" dirty="0"/>
           </a:p>
@@ -8910,7 +8910,7 @@
                 <a:ea typeface="Calibri" pitchFamily="34" charset="-122"/>
                 <a:cs typeface="Calibri" pitchFamily="34" charset="-120"/>
               </a:rPr>
-              <a:t>AIRuntime — это данные, а не код</a:t>
+              <a:t>Сервис — это данные, а не код</a:t>
             </a:r>
             <a:endParaRPr lang="en-US" sz="1350" dirty="0"/>
           </a:p>
@@ -10014,6 +10014,30 @@
                 <a:cs typeface="Calibri" pitchFamily="34" charset="-120"/>
               </a:rPr>
               <a:t>54 автотеста: подделка подписи, чужой токен, чужие сервисы, сквозной сценарий через HTTP</a:t>
+            </a:r>
+            <a:endParaRPr lang="en-US" sz="1150" dirty="0"/>
+          </a:p>
+          <a:p>
+            <a:pPr marL="190500" indent="-190500">
+              <a:lnSpc>
+                <a:spcPct val="108000"/>
+              </a:lnSpc>
+              <a:spcAft>
+                <a:spcPts val="600"/>
+              </a:spcAft>
+              <a:buSzPct val="100000"/>
+              <a:buChar char="•"/>
+            </a:pPr>
+            <a:r>
+              <a:rPr lang="en-US" sz="1150" dirty="0">
+                <a:solidFill>
+                  <a:srgbClr val="4A5464"/>
+                </a:solidFill>
+                <a:latin typeface="Calibri" pitchFamily="34" charset="0"/>
+                <a:ea typeface="Calibri" pitchFamily="34" charset="-122"/>
+                <a:cs typeface="Calibri" pitchFamily="34" charset="-120"/>
+              </a:rPr>
+              <a:t>Сборка образов с нуля — около 4 минут (замер), лимит задания — 5</a:t>
             </a:r>
             <a:endParaRPr lang="en-US" sz="1150" dirty="0"/>
           </a:p>
@@ -14719,7 +14743,7 @@
                 <a:ea typeface="Calibri" pitchFamily="34" charset="-122"/>
                 <a:cs typeface="Calibri" pitchFamily="34" charset="-120"/>
               </a:rPr>
-              <a:t> та же механика «одно сообщение → работающий сервис в MAX» подходит не только бизнесу — продуктовые команды проверяют гипотезы без разработки, люди делают небольшие сервисы для себя. Это ядро AIRuntime: первый вертикальный сценарий на этой механике.</a:t>
+              <a:t> та же механика «одно сообщение → работающий сервис в MAX» подходит не только бизнесу — продуктовые команды проверяют гипотезы без разработки, люди делают небольшие сервисы для себя. Это и есть ядро AIRuntime, а запись для микробизнеса — первый вертикальный сценарий на нём.</a:t>
             </a:r>
             <a:endParaRPr lang="en-US" sz="1150" dirty="0"/>
           </a:p>
@@ -20215,7 +20239,7 @@
                 <a:ea typeface="Calibri" pitchFamily="34" charset="-122"/>
                 <a:cs typeface="Calibri" pitchFamily="34" charset="-120"/>
               </a:rPr>
-              <a:t>сообщение от владельца до готового AIRuntime</a:t>
+              <a:t>сообщение от владельца до готового сервиса</a:t>
             </a:r>
             <a:endParaRPr lang="en-US" sz="1100" dirty="0"/>
           </a:p>
@@ -24192,7 +24216,7 @@
                 <a:ea typeface="Calibri" pitchFamily="34" charset="-122"/>
                 <a:cs typeface="Calibri" pitchFamily="34" charset="-120"/>
               </a:rPr>
-              <a:t> пересказ прайса: услуги и цены видны в AIRuntime</a:t>
+              <a:t> пересказ прайса: услуги и цены видны в самом сервисе</a:t>
             </a:r>
             <a:endParaRPr lang="en-US" sz="1250" dirty="0"/>
           </a:p>
@@ -24443,7 +24467,7 @@
                 <a:ea typeface="Calibri" pitchFamily="34" charset="-122"/>
                 <a:cs typeface="Calibri" pitchFamily="34" charset="-120"/>
               </a:rPr>
-              <a:t> Если мы поможем владельцу микросервиса принимать записи через AIRuntime в MAX, собранной из одного сообщения, доля заявок, дошедших до подтверждения, вырастет, а время на переписку сократится — потому что клиент проходит путь сам, а владельцу остаётся одно решение. Как это проверить — слайд 11.</a:t>
+              <a:t> Если мы поможем владельцу микросервиса принимать записи сервисом в MAX, собранным из одного сообщения, доля заявок, дошедших до подтверждения, вырастет, а время на переписку сократится — потому что клиент проходит путь сам, а владельцу остаётся одно решение. Как это проверить — слайд 11.</a:t>
             </a:r>
             <a:endParaRPr lang="en-US" sz="1350" dirty="0"/>
           </a:p>

--- a/docs/max-presentation/presentation.pptx
+++ b/docs/max-presentation/presentation.pptx
@@ -3872,7 +3872,7 @@
                 <a:ea typeface="Calibri" pitchFamily="34" charset="-122"/>
                 <a:cs typeface="Calibri" pitchFamily="34" charset="-120"/>
               </a:rPr>
-              <a:t>: «Автосервис на Лесной. Диагностика 1500, замена масла 900, шиномонтаж 2400. Работаем с 9 до 20» — и нажать «Собрать AIRuntime»</a:t>
+              <a:t>: «Автосервис на Лесной. Диагностика 1500, замена масла 900, шиномонтаж 2400. Работаем с 9 до 20» — и нажать «Собрать страницу записи»</a:t>
             </a:r>
             <a:endParaRPr lang="en-US" sz="1250" dirty="0"/>
           </a:p>
@@ -3896,7 +3896,7 @@
                 <a:ea typeface="Calibri" pitchFamily="34" charset="-122"/>
                 <a:cs typeface="Calibri" pitchFamily="34" charset="-120"/>
               </a:rPr>
-              <a:t>Через ~10 секунд сервис опубликован: ссылка, «Поделиться», «Посмотреть»</a:t>
+              <a:t>Через несколько секунд страница опубликована: ссылка, «Поделиться», «Посмотреть»</a:t>
             </a:r>
             <a:endParaRPr lang="en-US" sz="1250" dirty="0"/>
           </a:p>
@@ -5055,7 +5055,7 @@
                 <a:ea typeface="Calibri" pitchFamily="34" charset="-122"/>
                 <a:cs typeface="Calibri" pitchFamily="34" charset="-120"/>
               </a:rPr>
-              <a:t>Скелетоны экрана и индикатор сборки AIRuntime</a:t>
+              <a:t>Скелетоны экрана и индикатор сборки страницы</a:t>
             </a:r>
             <a:endParaRPr lang="en-US" sz="1250" dirty="0"/>
           </a:p>
@@ -26935,7 +26935,7 @@
                 <a:ea typeface="Calibri" pitchFamily="34" charset="-122"/>
                 <a:cs typeface="Calibri" pitchFamily="34" charset="-120"/>
               </a:rPr>
-              <a:t>Одним сообщением, как рассказал бы другу. Есть готовые примеры; кнопка активна, когда описание осмысленное.</a:t>
+              <a:t>Одним сообщением, как рассказал бы другу: есть готовые примеры. Сайт и файлы — по желанию, не обязательны.</a:t>
             </a:r>
             <a:endParaRPr lang="en-US" sz="1050" dirty="0"/>
           </a:p>

--- a/docs/max-presentation/presentation.pptx
+++ b/docs/max-presentation/presentation.pptx
@@ -3180,7 +3180,7 @@
                 <a:ea typeface="Consolas" pitchFamily="34" charset="-122"/>
                 <a:cs typeface="Consolas" pitchFamily="34" charset="-120"/>
               </a:rPr>
-              <a:t>376b483180331187bd900c2dce8a18bda4ca5672</a:t>
+              <a:t>eadc752d7bfc2ec65e96972c4c60e3be6547a8ab</a:t>
             </a:r>
             <a:endParaRPr lang="en-US" sz="1150" dirty="0"/>
           </a:p>
@@ -3200,7 +3200,7 @@
                 <a:ea typeface="Calibri" pitchFamily="34" charset="-122"/>
                 <a:cs typeface="Calibri" pitchFamily="34" charset="-120"/>
               </a:rPr>
-              <a:t>ветка main · короткий 376b483</a:t>
+              <a:t>ветка main · короткий eadc752</a:t>
             </a:r>
             <a:endParaRPr lang="en-US" sz="1150" dirty="0"/>
           </a:p>

--- a/docs/max-presentation/presentation.pptx
+++ b/docs/max-presentation/presentation.pptx
@@ -18991,7 +18991,7 @@
         <p:spPr>
           <a:xfrm>
             <a:off x="502920" y="1417320"/>
-            <a:ext cx="5454396" cy="2834640"/>
+            <a:ext cx="11183112" cy="2834640"/>
           </a:xfrm>
           <a:prstGeom prst="roundRect">
             <a:avLst>
@@ -19024,47 +19024,8 @@
         </p:nvSpPr>
         <p:spPr>
           <a:xfrm>
-            <a:off x="740664" y="1600200"/>
-            <a:ext cx="4978908" cy="274320"/>
-          </a:xfrm>
-          <a:prstGeom prst="rect">
-            <a:avLst/>
-          </a:prstGeom>
-          <a:noFill/>
-          <a:ln/>
-        </p:spPr>
-        <p:txBody>
-          <a:bodyPr wrap="square" lIns="0" tIns="0" rIns="0" bIns="0" rtlCol="0" anchor="ctr"/>
-          <a:lstStyle/>
-          <a:p>
-            <a:pPr indent="0" marL="0">
-              <a:buNone/>
-            </a:pPr>
-            <a:r>
-              <a:rPr lang="en-US" sz="1450" b="1" dirty="0">
-                <a:solidFill>
-                  <a:srgbClr val="FFFFFF"/>
-                </a:solidFill>
-                <a:latin typeface="Calibri" pitchFamily="34" charset="0"/>
-                <a:ea typeface="Calibri" pitchFamily="34" charset="-122"/>
-                <a:cs typeface="Calibri" pitchFamily="34" charset="-120"/>
-              </a:rPr>
-              <a:t>Задача и аудитория</a:t>
-            </a:r>
-            <a:endParaRPr lang="en-US" sz="1450" dirty="0"/>
-          </a:p>
-        </p:txBody>
-      </p:sp>
-      <p:sp>
-        <p:nvSpPr>
-          <p:cNvPr id="6" name="Text 4"/>
-          <p:cNvSpPr txBox="1"/>
-          <p:nvPr/>
-        </p:nvSpPr>
-        <p:spPr>
-          <a:xfrm>
-            <a:off x="740664" y="2011680"/>
-            <a:ext cx="4978908" cy="2148840"/>
+            <a:off x="777240" y="1645920"/>
+            <a:ext cx="10634472" cy="2468880"/>
           </a:xfrm>
           <a:prstGeom prst="rect">
             <a:avLst/>
@@ -19081,13 +19042,13 @@
                 <a:spcPct val="108000"/>
               </a:lnSpc>
               <a:spcAft>
-                <a:spcPts val="700"/>
+                <a:spcPts val="900"/>
               </a:spcAft>
               <a:buSzPct val="100000"/>
               <a:buChar char="•"/>
             </a:pPr>
             <a:r>
-              <a:rPr lang="en-US" sz="1200" b="1" dirty="0">
+              <a:rPr lang="en-US" sz="1300" b="1" dirty="0">
                 <a:solidFill>
                   <a:srgbClr val="FFFFFF"/>
                 </a:solidFill>
@@ -19095,10 +19056,10 @@
                 <a:ea typeface="Calibri" pitchFamily="34" charset="-122"/>
                 <a:cs typeface="Calibri" pitchFamily="34" charset="-120"/>
               </a:rPr>
-              <a:t>Задание трека «Эффективный бизнес»</a:t>
-            </a:r>
-            <a:r>
-              <a:rPr lang="en-US" sz="1200" dirty="0">
+              <a:t>ФНС России</a:t>
+            </a:r>
+            <a:r>
+              <a:rPr lang="en-US" sz="1300" dirty="0">
                 <a:solidFill>
                   <a:srgbClr val="A9B7CE"/>
                 </a:solidFill>
@@ -19106,9 +19067,9 @@
                 <a:ea typeface="Calibri" pitchFamily="34" charset="-122"/>
                 <a:cs typeface="Calibri" pitchFamily="34" charset="-120"/>
               </a:rPr>
-              <a:t> — постановка, критерии оценки, рекомендации, формат сдачи</a:t>
-            </a:r>
-            <a:endParaRPr lang="en-US" sz="1200" dirty="0"/>
+              <a:t> — Единый реестр субъектов МСП, июль 2026: 6,6 млн субъектов, 81,8% всех действующих юрлиц и ИП, рост 3,5% год к году</a:t>
+            </a:r>
+            <a:endParaRPr lang="en-US" sz="1300" dirty="0"/>
           </a:p>
           <a:p>
             <a:pPr marL="190500" indent="-190500">
@@ -19116,13 +19077,13 @@
                 <a:spcPct val="108000"/>
               </a:lnSpc>
               <a:spcAft>
-                <a:spcPts val="700"/>
+                <a:spcPts val="900"/>
               </a:spcAft>
               <a:buSzPct val="100000"/>
               <a:buChar char="•"/>
             </a:pPr>
             <a:r>
-              <a:rPr lang="en-US" sz="1200" b="1" dirty="0">
+              <a:rPr lang="en-US" sz="1300" b="1" dirty="0">
                 <a:solidFill>
                   <a:srgbClr val="FFFFFF"/>
                 </a:solidFill>
@@ -19130,10 +19091,10 @@
                 <a:ea typeface="Calibri" pitchFamily="34" charset="-122"/>
                 <a:cs typeface="Calibri" pitchFamily="34" charset="-120"/>
               </a:rPr>
-              <a:t>ФНС России</a:t>
-            </a:r>
-            <a:r>
-              <a:rPr lang="en-US" sz="1200" dirty="0">
+              <a:t>MAX для разработчиков</a:t>
+            </a:r>
+            <a:r>
+              <a:rPr lang="en-US" sz="1300" dirty="0">
                 <a:solidFill>
                   <a:srgbClr val="A9B7CE"/>
                 </a:solidFill>
@@ -19141,118 +19102,23 @@
                 <a:ea typeface="Calibri" pitchFamily="34" charset="-122"/>
                 <a:cs typeface="Calibri" pitchFamily="34" charset="-120"/>
               </a:rPr>
-              <a:t> — Единый реестр субъектов МСП, июль 2026: 6,6 млн субъектов, 81,8% всех действующих юрлиц и ИП, рост 3,5% год к году (приведено по заданию трека)</a:t>
-            </a:r>
-            <a:endParaRPr lang="en-US" sz="1200" dirty="0"/>
-          </a:p>
-        </p:txBody>
-      </p:sp>
-      <p:sp>
-        <p:nvSpPr>
-          <p:cNvPr id="7" name="Shape 5"/>
-          <p:cNvSpPr/>
-          <p:nvPr/>
-        </p:nvSpPr>
-        <p:spPr>
-          <a:xfrm>
-            <a:off x="6231636" y="1417320"/>
-            <a:ext cx="5454396" cy="2834640"/>
-          </a:xfrm>
-          <a:prstGeom prst="roundRect">
-            <a:avLst>
-              <a:gd name="adj" fmla="val 3226"/>
-            </a:avLst>
-          </a:prstGeom>
-          <a:solidFill>
-            <a:srgbClr val="141C2E"/>
-          </a:solidFill>
-          <a:ln w="12700">
-            <a:solidFill>
-              <a:srgbClr val="2A3550"/>
-            </a:solidFill>
-            <a:prstDash val="solid"/>
-          </a:ln>
-          <a:effectLst>
-            <a:outerShdw sx="100000" sy="100000" kx="0" ky="0" algn="bl" rotWithShape="0" blurRad="127000" dist="25400" dir="5400000">
-              <a:srgbClr val="0B1730">
-                <a:alpha val="7000"/>
-              </a:srgbClr>
-            </a:outerShdw>
-          </a:effectLst>
-        </p:spPr>
-      </p:sp>
-      <p:sp>
-        <p:nvSpPr>
-          <p:cNvPr id="8" name="Text 6"/>
-          <p:cNvSpPr txBox="1"/>
-          <p:nvPr/>
-        </p:nvSpPr>
-        <p:spPr>
-          <a:xfrm>
-            <a:off x="6469380" y="1600200"/>
-            <a:ext cx="4978908" cy="274320"/>
-          </a:xfrm>
-          <a:prstGeom prst="rect">
-            <a:avLst/>
-          </a:prstGeom>
-          <a:noFill/>
-          <a:ln/>
-        </p:spPr>
-        <p:txBody>
-          <a:bodyPr wrap="square" lIns="0" tIns="0" rIns="0" bIns="0" rtlCol="0" anchor="ctr"/>
-          <a:lstStyle/>
-          <a:p>
-            <a:pPr indent="0" marL="0">
-              <a:buNone/>
-            </a:pPr>
-            <a:r>
-              <a:rPr lang="en-US" sz="1450" b="1" dirty="0">
-                <a:solidFill>
-                  <a:srgbClr val="FFFFFF"/>
-                </a:solidFill>
-                <a:latin typeface="Calibri" pitchFamily="34" charset="0"/>
-                <a:ea typeface="Calibri" pitchFamily="34" charset="-122"/>
-                <a:cs typeface="Calibri" pitchFamily="34" charset="-120"/>
-              </a:rPr>
-              <a:t>Техническая документация</a:t>
-            </a:r>
-            <a:endParaRPr lang="en-US" sz="1450" dirty="0"/>
-          </a:p>
-        </p:txBody>
-      </p:sp>
-      <p:sp>
-        <p:nvSpPr>
-          <p:cNvPr id="9" name="Text 7"/>
-          <p:cNvSpPr txBox="1"/>
-          <p:nvPr/>
-        </p:nvSpPr>
-        <p:spPr>
-          <a:xfrm>
-            <a:off x="6469380" y="2011680"/>
-            <a:ext cx="4978908" cy="2148840"/>
-          </a:xfrm>
-          <a:prstGeom prst="rect">
-            <a:avLst/>
-          </a:prstGeom>
-          <a:noFill/>
-          <a:ln/>
-        </p:spPr>
-        <p:txBody>
-          <a:bodyPr wrap="square" lIns="0" tIns="0" rIns="0" bIns="0" rtlCol="0" anchor="t"/>
-          <a:lstStyle/>
+              <a:t> — API ботов: методы, вебхуки, кнопки, лимиты запросов</a:t>
+            </a:r>
+            <a:endParaRPr lang="en-US" sz="1300" dirty="0"/>
+          </a:p>
           <a:p>
             <a:pPr marL="190500" indent="-190500">
               <a:lnSpc>
                 <a:spcPct val="108000"/>
               </a:lnSpc>
               <a:spcAft>
-                <a:spcPts val="700"/>
+                <a:spcPts val="900"/>
               </a:spcAft>
               <a:buSzPct val="100000"/>
               <a:buChar char="•"/>
             </a:pPr>
             <a:r>
-              <a:rPr lang="en-US" sz="1200" b="1" dirty="0">
+              <a:rPr lang="en-US" sz="1300" b="1" dirty="0">
                 <a:solidFill>
                   <a:srgbClr val="FFFFFF"/>
                 </a:solidFill>
@@ -19260,10 +19126,10 @@
                 <a:ea typeface="Calibri" pitchFamily="34" charset="-122"/>
                 <a:cs typeface="Calibri" pitchFamily="34" charset="-120"/>
               </a:rPr>
-              <a:t>MAX для разработчиков</a:t>
-            </a:r>
-            <a:r>
-              <a:rPr lang="en-US" sz="1200" dirty="0">
+              <a:t>OpenAPI-спецификация MAX</a:t>
+            </a:r>
+            <a:r>
+              <a:rPr lang="en-US" sz="1300" dirty="0">
                 <a:solidFill>
                   <a:srgbClr val="A9B7CE"/>
                 </a:solidFill>
@@ -19271,9 +19137,9 @@
                 <a:ea typeface="Calibri" pitchFamily="34" charset="-122"/>
                 <a:cs typeface="Calibri" pitchFamily="34" charset="-120"/>
               </a:rPr>
-              <a:t> — API ботов: методы, вебхуки, кнопки, лимиты запросов</a:t>
-            </a:r>
-            <a:endParaRPr lang="en-US" sz="1200" dirty="0"/>
+              <a:t> — github.com/max-messenger/api-schema: форма кнопок и сообщений сверена по ней</a:t>
+            </a:r>
+            <a:endParaRPr lang="en-US" sz="1300" dirty="0"/>
           </a:p>
           <a:p>
             <a:pPr marL="190500" indent="-190500">
@@ -19281,13 +19147,13 @@
                 <a:spcPct val="108000"/>
               </a:lnSpc>
               <a:spcAft>
-                <a:spcPts val="700"/>
+                <a:spcPts val="900"/>
               </a:spcAft>
               <a:buSzPct val="100000"/>
               <a:buChar char="•"/>
             </a:pPr>
             <a:r>
-              <a:rPr lang="en-US" sz="1200" b="1" dirty="0">
+              <a:rPr lang="en-US" sz="1300" b="1" dirty="0">
                 <a:solidFill>
                   <a:srgbClr val="FFFFFF"/>
                 </a:solidFill>
@@ -19295,10 +19161,10 @@
                 <a:ea typeface="Calibri" pitchFamily="34" charset="-122"/>
                 <a:cs typeface="Calibri" pitchFamily="34" charset="-120"/>
               </a:rPr>
-              <a:t>OpenAPI-спецификация MAX</a:t>
-            </a:r>
-            <a:r>
-              <a:rPr lang="en-US" sz="1200" dirty="0">
+              <a:t>MAX Bridge</a:t>
+            </a:r>
+            <a:r>
+              <a:rPr lang="en-US" sz="1300" dirty="0">
                 <a:solidFill>
                   <a:srgbClr val="A9B7CE"/>
                 </a:solidFill>
@@ -19306,9 +19172,31 @@
                 <a:ea typeface="Calibri" pitchFamily="34" charset="-122"/>
                 <a:cs typeface="Calibri" pitchFamily="34" charset="-120"/>
               </a:rPr>
-              <a:t> — github.com/max-messenger/api-schema: форма кнопок и сообщений сверена по ней</a:t>
-            </a:r>
-            <a:endParaRPr lang="en-US" sz="1200" dirty="0"/>
+              <a:t> и </a:t>
+            </a:r>
+            <a:r>
+              <a:rPr lang="en-US" sz="1300" b="1" dirty="0">
+                <a:solidFill>
+                  <a:srgbClr val="FFFFFF"/>
+                </a:solidFill>
+                <a:latin typeface="Calibri" pitchFamily="34" charset="0"/>
+                <a:ea typeface="Calibri" pitchFamily="34" charset="-122"/>
+                <a:cs typeface="Calibri" pitchFamily="34" charset="-120"/>
+              </a:rPr>
+              <a:t>валидация данных</a:t>
+            </a:r>
+            <a:r>
+              <a:rPr lang="en-US" sz="1300" dirty="0">
+                <a:solidFill>
+                  <a:srgbClr val="A9B7CE"/>
+                </a:solidFill>
+                <a:latin typeface="Calibri" pitchFamily="34" charset="0"/>
+                <a:ea typeface="Calibri" pitchFamily="34" charset="-122"/>
+                <a:cs typeface="Calibri" pitchFamily="34" charset="-120"/>
+              </a:rPr>
+              <a:t> — стартовые параметры, контакт, «Поделиться», проверка подписи</a:t>
+            </a:r>
+            <a:endParaRPr lang="en-US" sz="1300" dirty="0"/>
           </a:p>
           <a:p>
             <a:pPr marL="190500" indent="-190500">
@@ -19316,13 +19204,13 @@
                 <a:spcPct val="108000"/>
               </a:lnSpc>
               <a:spcAft>
-                <a:spcPts val="700"/>
+                <a:spcPts val="900"/>
               </a:spcAft>
               <a:buSzPct val="100000"/>
               <a:buChar char="•"/>
             </a:pPr>
             <a:r>
-              <a:rPr lang="en-US" sz="1200" b="1" dirty="0">
+              <a:rPr lang="en-US" sz="1300" b="1" dirty="0">
                 <a:solidFill>
                   <a:srgbClr val="FFFFFF"/>
                 </a:solidFill>
@@ -19330,10 +19218,10 @@
                 <a:ea typeface="Calibri" pitchFamily="34" charset="-122"/>
                 <a:cs typeface="Calibri" pitchFamily="34" charset="-120"/>
               </a:rPr>
-              <a:t>MAX Bridge</a:t>
-            </a:r>
-            <a:r>
-              <a:rPr lang="en-US" sz="1200" dirty="0">
+              <a:t>Минцифры России</a:t>
+            </a:r>
+            <a:r>
+              <a:rPr lang="en-US" sz="1300" dirty="0">
                 <a:solidFill>
                   <a:srgbClr val="A9B7CE"/>
                 </a:solidFill>
@@ -19341,72 +19229,15 @@
                 <a:ea typeface="Calibri" pitchFamily="34" charset="-122"/>
                 <a:cs typeface="Calibri" pitchFamily="34" charset="-120"/>
               </a:rPr>
-              <a:t> и </a:t>
-            </a:r>
-            <a:r>
-              <a:rPr lang="en-US" sz="1200" b="1" dirty="0">
-                <a:solidFill>
-                  <a:srgbClr val="FFFFFF"/>
-                </a:solidFill>
-                <a:latin typeface="Calibri" pitchFamily="34" charset="0"/>
-                <a:ea typeface="Calibri" pitchFamily="34" charset="-122"/>
-                <a:cs typeface="Calibri" pitchFamily="34" charset="-120"/>
-              </a:rPr>
-              <a:t>валидация данных</a:t>
-            </a:r>
-            <a:r>
-              <a:rPr lang="en-US" sz="1200" dirty="0">
-                <a:solidFill>
-                  <a:srgbClr val="A9B7CE"/>
-                </a:solidFill>
-                <a:latin typeface="Calibri" pitchFamily="34" charset="0"/>
-                <a:ea typeface="Calibri" pitchFamily="34" charset="-122"/>
-                <a:cs typeface="Calibri" pitchFamily="34" charset="-120"/>
-              </a:rPr>
-              <a:t> — стартовые параметры, контакт, «Поделиться», проверка подписи</a:t>
-            </a:r>
-            <a:endParaRPr lang="en-US" sz="1200" dirty="0"/>
-          </a:p>
-          <a:p>
-            <a:pPr marL="190500" indent="-190500">
-              <a:lnSpc>
-                <a:spcPct val="108000"/>
-              </a:lnSpc>
-              <a:spcAft>
-                <a:spcPts val="700"/>
-              </a:spcAft>
-              <a:buSzPct val="100000"/>
-              <a:buChar char="•"/>
-            </a:pPr>
-            <a:r>
-              <a:rPr lang="en-US" sz="1200" b="1" dirty="0">
-                <a:solidFill>
-                  <a:srgbClr val="FFFFFF"/>
-                </a:solidFill>
-                <a:latin typeface="Calibri" pitchFamily="34" charset="0"/>
-                <a:ea typeface="Calibri" pitchFamily="34" charset="-122"/>
-                <a:cs typeface="Calibri" pitchFamily="34" charset="-120"/>
-              </a:rPr>
-              <a:t>Минцифры России</a:t>
-            </a:r>
-            <a:r>
-              <a:rPr lang="en-US" sz="1200" dirty="0">
-                <a:solidFill>
-                  <a:srgbClr val="A9B7CE"/>
-                </a:solidFill>
-                <a:latin typeface="Calibri" pitchFamily="34" charset="0"/>
-                <a:ea typeface="Calibri" pitchFamily="34" charset="-122"/>
-                <a:cs typeface="Calibri" pitchFamily="34" charset="-120"/>
-              </a:rPr>
               <a:t> — корневой сертификат для доступа к API платформы</a:t>
             </a:r>
-            <a:endParaRPr lang="en-US" sz="1200" dirty="0"/>
-          </a:p>
-        </p:txBody>
-      </p:sp>
-      <p:sp>
-        <p:nvSpPr>
-          <p:cNvPr id="10" name="Shape 8"/>
+            <a:endParaRPr lang="en-US" sz="1300" dirty="0"/>
+          </a:p>
+        </p:txBody>
+      </p:sp>
+      <p:sp>
+        <p:nvSpPr>
+          <p:cNvPr id="6" name="Shape 4"/>
           <p:cNvSpPr/>
           <p:nvPr/>
         </p:nvSpPr>
@@ -19440,7 +19271,7 @@
       </p:sp>
       <p:sp>
         <p:nvSpPr>
-          <p:cNvPr id="11" name="Text 9"/>
+          <p:cNvPr id="7" name="Text 5"/>
           <p:cNvSpPr txBox="1"/>
           <p:nvPr/>
         </p:nvSpPr>
@@ -19482,7 +19313,7 @@
       </p:sp>
       <p:sp>
         <p:nvSpPr>
-          <p:cNvPr id="12" name="Text 10"/>
+          <p:cNvPr id="8" name="Text 6"/>
           <p:cNvSpPr txBox="1"/>
           <p:nvPr/>
         </p:nvSpPr>
@@ -19543,7 +19374,7 @@
       </p:sp>
       <p:sp>
         <p:nvSpPr>
-          <p:cNvPr id="13" name="Text 11"/>
+          <p:cNvPr id="9" name="Text 7"/>
           <p:cNvSpPr txBox="1"/>
           <p:nvPr/>
         </p:nvSpPr>

--- a/docs/max-presentation/presentation.pptx
+++ b/docs/max-presentation/presentation.pptx
@@ -3188,7 +3188,7 @@
                 <a:ea typeface="Consolas" pitchFamily="34" charset="-122"/>
                 <a:cs typeface="Consolas" pitchFamily="34" charset="-120"/>
               </a:rPr>
-              <a:t>github.com/airuntime-ru/airuntime</a:t>
+              <a:t>github.com/airuntime-ru/airuntime-max</a:t>
             </a:r>
             <a:endParaRPr lang="en-US" sz="1150" dirty="0"/>
           </a:p>
@@ -19986,7 +19986,7 @@
                 <a:ea typeface="Calibri" pitchFamily="34" charset="-122"/>
                 <a:cs typeface="Calibri" pitchFamily="34" charset="-120"/>
               </a:rPr>
-              <a:t>github.com/airuntime-ru/airuntime</a:t>
+              <a:t>github.com/airuntime-ru/airuntime-max</a:t>
             </a:r>
             <a:endParaRPr lang="en-US" sz="1300" dirty="0"/>
           </a:p>
